--- a/output/wordlabs-phone-3day.pptx
+++ b/output/wordlabs-phone-3day.pptx
@@ -4240,7 +4240,7 @@
                 <a:ea typeface="Calibri" pitchFamily="34" charset="-122"/>
                 <a:cs typeface="Calibri" pitchFamily="34" charset="-120"/>
               </a:rPr>
-              <a:t>"sound, voice"</a:t>
+              <a:t>"sound; a device for talking to someone"</a:t>
             </a:r>
             <a:endParaRPr lang="en-US" sz="2200" dirty="0"/>
           </a:p>
@@ -4279,7 +4279,7 @@
                 <a:ea typeface="Calibri" pitchFamily="34" charset="-122"/>
                 <a:cs typeface="Calibri" pitchFamily="34" charset="-120"/>
               </a:rPr>
-              <a:t>Origin: Greek: phōnē</a:t>
+              <a:t>Origin: Core English root</a:t>
             </a:r>
             <a:endParaRPr lang="en-US" sz="1300" dirty="0"/>
           </a:p>
@@ -5288,7 +5288,7 @@
                 <a:ea typeface="Calibri" pitchFamily="34" charset="-122"/>
                 <a:cs typeface="Calibri" pitchFamily="34" charset="-120"/>
               </a:rPr>
-              <a:t>Word Labs  •  wordlabs.app  •  Root: 'phone' = sound, voice</a:t>
+              <a:t>Word Labs  •  wordlabs.app  •  Root: 'phone' = sound; a device for talking to someone</a:t>
             </a:r>
             <a:endParaRPr lang="en-US" sz="800" dirty="0"/>
           </a:p>
@@ -5622,7 +5622,7 @@
                 <a:ea typeface="Trebuchet MS" pitchFamily="34" charset="-122"/>
                 <a:cs typeface="Trebuchet MS" pitchFamily="34" charset="-120"/>
               </a:rPr>
-              <a:t>1</a:t>
+              <a:t>0</a:t>
             </a:r>
             <a:pPr algn="ctr" indent="0" marL="0">
               <a:buNone/>
@@ -5928,7 +5928,7 @@
                 <a:ea typeface="Calibri" pitchFamily="34" charset="-122"/>
                 <a:cs typeface="Calibri" pitchFamily="34" charset="-120"/>
               </a:rPr>
-              <a:t>Word Labs  •  wordlabs.app  •  Root: 'phone' = sound, voice</a:t>
+              <a:t>Word Labs  •  wordlabs.app  •  Root: 'phone' = sound; a device for talking to someone</a:t>
             </a:r>
             <a:endParaRPr lang="en-US" sz="800" dirty="0"/>
           </a:p>
@@ -6040,7 +6040,7 @@
                 <a:ea typeface="Calibri" pitchFamily="34" charset="-122"/>
                 <a:cs typeface="Calibri" pitchFamily="34" charset="-120"/>
               </a:rPr>
-              <a:t>She picked up the </a:t>
+              <a:t>The singer spoke clearly into the </a:t>
             </a:r>
             <a:pPr algn="l" indent="0" marL="0">
               <a:buNone/>
@@ -6057,7 +6057,7 @@
                 <a:ea typeface="Calibri" pitchFamily="34" charset="-122"/>
                 <a:cs typeface="Calibri" pitchFamily="34" charset="-120"/>
               </a:rPr>
-              <a:t>telephone</a:t>
+              <a:t>microphone</a:t>
             </a:r>
             <a:pPr algn="l" indent="0" marL="0">
               <a:buNone/>
@@ -6071,7 +6071,7 @@
                 <a:ea typeface="Calibri" pitchFamily="34" charset="-122"/>
                 <a:cs typeface="Calibri" pitchFamily="34" charset="-120"/>
               </a:rPr>
-              <a:t>, but the </a:t>
+              <a:t> so everyone could hear her. The band set up three </a:t>
             </a:r>
             <a:pPr algn="l" indent="0" marL="0">
               <a:buNone/>
@@ -6088,7 +6088,7 @@
                 <a:ea typeface="Calibri" pitchFamily="34" charset="-122"/>
                 <a:cs typeface="Calibri" pitchFamily="34" charset="-120"/>
               </a:rPr>
-              <a:t>microphone</a:t>
+              <a:t>microphones</a:t>
             </a:r>
             <a:pPr algn="l" indent="0" marL="0">
               <a:buNone/>
@@ -6102,7 +6102,7 @@
                 <a:ea typeface="Calibri" pitchFamily="34" charset="-122"/>
                 <a:cs typeface="Calibri" pitchFamily="34" charset="-120"/>
               </a:rPr>
-              <a:t> on the other end was broken.</a:t>
+              <a:t> on the stage before the concert.</a:t>
             </a:r>
             <a:endParaRPr lang="en-US" sz="1800" dirty="0"/>
           </a:p>
@@ -6257,7 +6257,7 @@
                 <a:ea typeface="Trebuchet MS" pitchFamily="34" charset="-122"/>
                 <a:cs typeface="Trebuchet MS" pitchFamily="34" charset="-120"/>
               </a:rPr>
-              <a:t>telephone</a:t>
+              <a:t>microphone</a:t>
             </a:r>
             <a:endParaRPr lang="en-US" sz="1400" dirty="0"/>
           </a:p>
@@ -6385,7 +6385,7 @@
                 <a:ea typeface="Trebuchet MS" pitchFamily="34" charset="-122"/>
                 <a:cs typeface="Trebuchet MS" pitchFamily="34" charset="-120"/>
               </a:rPr>
-              <a:t>microphone</a:t>
+              <a:t>microphones</a:t>
             </a:r>
             <a:endParaRPr lang="en-US" sz="1400" dirty="0"/>
           </a:p>
@@ -6716,7 +6716,7 @@
                 <a:ea typeface="Calibri" pitchFamily="34" charset="-122"/>
                 <a:cs typeface="Calibri" pitchFamily="34" charset="-120"/>
               </a:rPr>
-              <a:t>Word Labs  •  wordlabs.app  •  Root: 'phone' = sound, voice</a:t>
+              <a:t>Word Labs  •  wordlabs.app  •  Root: 'phone' = sound; a device for talking to someone</a:t>
             </a:r>
             <a:endParaRPr lang="en-US" sz="800" dirty="0"/>
           </a:p>
@@ -6855,7 +6855,7 @@
                 <a:ea typeface="Trebuchet MS" pitchFamily="34" charset="-122"/>
                 <a:cs typeface="Trebuchet MS" pitchFamily="34" charset="-120"/>
               </a:rPr>
-              <a:t>telephone</a:t>
+              <a:t>microphone</a:t>
             </a:r>
             <a:endParaRPr lang="en-US" sz="2800" dirty="0"/>
           </a:p>
@@ -7543,7 +7543,7 @@
                 <a:ea typeface="Calibri" pitchFamily="34" charset="-122"/>
                 <a:cs typeface="Calibri" pitchFamily="34" charset="-120"/>
               </a:rPr>
-              <a:t>Word Labs  •  wordlabs.app  •  Root: 'phone' = sound, voice</a:t>
+              <a:t>Word Labs  •  wordlabs.app  •  Root: 'phone' = sound; a device for talking to someone</a:t>
             </a:r>
             <a:endParaRPr lang="en-US" sz="800" dirty="0"/>
           </a:p>
@@ -7682,7 +7682,7 @@
                 <a:ea typeface="Trebuchet MS" pitchFamily="34" charset="-122"/>
                 <a:cs typeface="Trebuchet MS" pitchFamily="34" charset="-120"/>
               </a:rPr>
-              <a:t>telephone</a:t>
+              <a:t>microphone</a:t>
             </a:r>
             <a:endParaRPr lang="en-US" sz="2800" dirty="0"/>
           </a:p>
@@ -7821,7 +7821,7 @@
                 <a:ea typeface="Trebuchet MS" pitchFamily="34" charset="-122"/>
                 <a:cs typeface="Trebuchet MS" pitchFamily="34" charset="-120"/>
               </a:rPr>
-              <a:t>tele</a:t>
+              <a:t>micro</a:t>
             </a:r>
             <a:endParaRPr lang="en-US" sz="1300" dirty="0"/>
           </a:p>
@@ -7860,7 +7860,7 @@
                 <a:ea typeface="Calibri" pitchFamily="34" charset="-122"/>
                 <a:cs typeface="Calibri" pitchFamily="34" charset="-120"/>
               </a:rPr>
-              <a:t>far away</a:t>
+              <a:t>small</a:t>
             </a:r>
             <a:endParaRPr lang="en-US" sz="850" dirty="0"/>
           </a:p>
@@ -7972,7 +7972,7 @@
                 <a:ea typeface="Calibri" pitchFamily="34" charset="-122"/>
                 <a:cs typeface="Calibri" pitchFamily="34" charset="-120"/>
               </a:rPr>
-              <a:t>sound, voice</a:t>
+              <a:t>sound; a device for talking to someone</a:t>
             </a:r>
             <a:endParaRPr lang="en-US" sz="850" dirty="0"/>
           </a:p>
@@ -8528,7 +8528,7 @@
                 <a:ea typeface="Calibri" pitchFamily="34" charset="-122"/>
                 <a:cs typeface="Calibri" pitchFamily="34" charset="-120"/>
               </a:rPr>
-              <a:t>Word Labs  •  wordlabs.app  •  Root: 'phone' = sound, voice</a:t>
+              <a:t>Word Labs  •  wordlabs.app  •  Root: 'phone' = sound; a device for talking to someone</a:t>
             </a:r>
             <a:endParaRPr lang="en-US" sz="800" dirty="0"/>
           </a:p>
@@ -8667,7 +8667,7 @@
                 <a:ea typeface="Trebuchet MS" pitchFamily="34" charset="-122"/>
                 <a:cs typeface="Trebuchet MS" pitchFamily="34" charset="-120"/>
               </a:rPr>
-              <a:t>telephone</a:t>
+              <a:t>microphone</a:t>
             </a:r>
             <a:endParaRPr lang="en-US" sz="2800" dirty="0"/>
           </a:p>
@@ -8806,7 +8806,7 @@
                 <a:ea typeface="Trebuchet MS" pitchFamily="34" charset="-122"/>
                 <a:cs typeface="Trebuchet MS" pitchFamily="34" charset="-120"/>
               </a:rPr>
-              <a:t>tele</a:t>
+              <a:t>micro</a:t>
             </a:r>
             <a:endParaRPr lang="en-US" sz="1300" dirty="0"/>
           </a:p>
@@ -8845,7 +8845,7 @@
                 <a:ea typeface="Calibri" pitchFamily="34" charset="-122"/>
                 <a:cs typeface="Calibri" pitchFamily="34" charset="-120"/>
               </a:rPr>
-              <a:t>far away</a:t>
+              <a:t>small</a:t>
             </a:r>
             <a:endParaRPr lang="en-US" sz="850" dirty="0"/>
           </a:p>
@@ -8957,7 +8957,7 @@
                 <a:ea typeface="Calibri" pitchFamily="34" charset="-122"/>
                 <a:cs typeface="Calibri" pitchFamily="34" charset="-120"/>
               </a:rPr>
-              <a:t>sound, voice</a:t>
+              <a:t>sound; a device for talking to someone</a:t>
             </a:r>
             <a:endParaRPr lang="en-US" sz="850" dirty="0"/>
           </a:p>
@@ -9116,7 +9116,7 @@
                 <a:ea typeface="Trebuchet MS" pitchFamily="34" charset="-122"/>
                 <a:cs typeface="Trebuchet MS" pitchFamily="34" charset="-120"/>
               </a:rPr>
-              <a:t>tel</a:t>
+              <a:t>mi</a:t>
             </a:r>
             <a:endParaRPr lang="en-US" sz="1400" dirty="0"/>
           </a:p>
@@ -9221,7 +9221,7 @@
                 <a:ea typeface="Trebuchet MS" pitchFamily="34" charset="-122"/>
                 <a:cs typeface="Trebuchet MS" pitchFamily="34" charset="-120"/>
               </a:rPr>
-              <a:t>e</a:t>
+              <a:t>cro</a:t>
             </a:r>
             <a:endParaRPr lang="en-US" sz="1400" dirty="0"/>
           </a:p>
@@ -9750,7 +9750,7 @@
                 <a:ea typeface="Calibri" pitchFamily="34" charset="-122"/>
                 <a:cs typeface="Calibri" pitchFamily="34" charset="-120"/>
               </a:rPr>
-              <a:t>Word Labs  •  wordlabs.app  •  Root: 'phone' = sound, voice</a:t>
+              <a:t>Word Labs  •  wordlabs.app  •  Root: 'phone' = sound; a device for talking to someone</a:t>
             </a:r>
             <a:endParaRPr lang="en-US" sz="800" dirty="0"/>
           </a:p>
@@ -9889,7 +9889,7 @@
                 <a:ea typeface="Trebuchet MS" pitchFamily="34" charset="-122"/>
                 <a:cs typeface="Trebuchet MS" pitchFamily="34" charset="-120"/>
               </a:rPr>
-              <a:t>telephone</a:t>
+              <a:t>microphone</a:t>
             </a:r>
             <a:endParaRPr lang="en-US" sz="2800" dirty="0"/>
           </a:p>
@@ -10028,7 +10028,7 @@
                 <a:ea typeface="Trebuchet MS" pitchFamily="34" charset="-122"/>
                 <a:cs typeface="Trebuchet MS" pitchFamily="34" charset="-120"/>
               </a:rPr>
-              <a:t>tele</a:t>
+              <a:t>micro</a:t>
             </a:r>
             <a:endParaRPr lang="en-US" sz="1300" dirty="0"/>
           </a:p>
@@ -10067,7 +10067,7 @@
                 <a:ea typeface="Calibri" pitchFamily="34" charset="-122"/>
                 <a:cs typeface="Calibri" pitchFamily="34" charset="-120"/>
               </a:rPr>
-              <a:t>far away</a:t>
+              <a:t>small</a:t>
             </a:r>
             <a:endParaRPr lang="en-US" sz="850" dirty="0"/>
           </a:p>
@@ -10179,7 +10179,7 @@
                 <a:ea typeface="Calibri" pitchFamily="34" charset="-122"/>
                 <a:cs typeface="Calibri" pitchFamily="34" charset="-120"/>
               </a:rPr>
-              <a:t>sound, voice</a:t>
+              <a:t>sound; a device for talking to someone</a:t>
             </a:r>
             <a:endParaRPr lang="en-US" sz="850" dirty="0"/>
           </a:p>
@@ -10338,7 +10338,7 @@
                 <a:ea typeface="Trebuchet MS" pitchFamily="34" charset="-122"/>
                 <a:cs typeface="Trebuchet MS" pitchFamily="34" charset="-120"/>
               </a:rPr>
-              <a:t>tel</a:t>
+              <a:t>mi</a:t>
             </a:r>
             <a:endParaRPr lang="en-US" sz="1400" dirty="0"/>
           </a:p>
@@ -10443,7 +10443,7 @@
                 <a:ea typeface="Trebuchet MS" pitchFamily="34" charset="-122"/>
                 <a:cs typeface="Trebuchet MS" pitchFamily="34" charset="-120"/>
               </a:rPr>
-              <a:t>e</a:t>
+              <a:t>cro</a:t>
             </a:r>
             <a:endParaRPr lang="en-US" sz="1400" dirty="0"/>
           </a:p>
@@ -10629,11 +10629,11 @@
         <p:spPr>
           <a:xfrm>
             <a:off x="1874520" y="4096512"/>
-            <a:ext cx="6903720" cy="804672"/>
+            <a:ext cx="6903720" cy="658368"/>
           </a:xfrm>
           <a:prstGeom prst="rect">
             <a:avLst>
-              <a:gd name="adj" fmla="val 6818"/>
+              <a:gd name="adj" fmla="val 8333"/>
             </a:avLst>
           </a:prstGeom>
           <a:solidFill>
@@ -10656,11 +10656,11 @@
         <p:spPr>
           <a:xfrm>
             <a:off x="2023872" y="4169664"/>
-            <a:ext cx="685800" cy="384048"/>
+            <a:ext cx="685800" cy="475488"/>
           </a:xfrm>
           <a:prstGeom prst="rect">
             <a:avLst>
-              <a:gd name="adj" fmla="val 9524"/>
+              <a:gd name="adj" fmla="val 7692"/>
             </a:avLst>
           </a:prstGeom>
           <a:solidFill>
@@ -10683,7 +10683,7 @@
         <p:spPr>
           <a:xfrm>
             <a:off x="2023872" y="4169664"/>
-            <a:ext cx="685800" cy="384048"/>
+            <a:ext cx="685800" cy="475488"/>
           </a:xfrm>
           <a:prstGeom prst="rect">
             <a:avLst/>
@@ -10707,7 +10707,7 @@
                 <a:ea typeface="Trebuchet MS" pitchFamily="34" charset="-122"/>
                 <a:cs typeface="Trebuchet MS" pitchFamily="34" charset="-120"/>
               </a:rPr>
-              <a:t>t</a:t>
+              <a:t>m</a:t>
             </a:r>
             <a:endParaRPr lang="en-US" sz="900" dirty="0"/>
           </a:p>
@@ -10722,11 +10722,11 @@
         <p:spPr>
           <a:xfrm>
             <a:off x="2831592" y="4169664"/>
-            <a:ext cx="685800" cy="384048"/>
+            <a:ext cx="685800" cy="475488"/>
           </a:xfrm>
           <a:prstGeom prst="rect">
             <a:avLst>
-              <a:gd name="adj" fmla="val 9524"/>
+              <a:gd name="adj" fmla="val 7692"/>
             </a:avLst>
           </a:prstGeom>
           <a:solidFill>
@@ -10749,7 +10749,7 @@
         <p:spPr>
           <a:xfrm>
             <a:off x="2831592" y="4169664"/>
-            <a:ext cx="685800" cy="384048"/>
+            <a:ext cx="685800" cy="475488"/>
           </a:xfrm>
           <a:prstGeom prst="rect">
             <a:avLst/>
@@ -10773,7 +10773,7 @@
                 <a:ea typeface="Trebuchet MS" pitchFamily="34" charset="-122"/>
                 <a:cs typeface="Trebuchet MS" pitchFamily="34" charset="-120"/>
               </a:rPr>
-              <a:t>e</a:t>
+              <a:t>i</a:t>
             </a:r>
             <a:endParaRPr lang="en-US" sz="900" dirty="0"/>
           </a:p>
@@ -10788,11 +10788,11 @@
         <p:spPr>
           <a:xfrm>
             <a:off x="3639312" y="4169664"/>
-            <a:ext cx="685800" cy="384048"/>
+            <a:ext cx="685800" cy="475488"/>
           </a:xfrm>
           <a:prstGeom prst="rect">
             <a:avLst>
-              <a:gd name="adj" fmla="val 9524"/>
+              <a:gd name="adj" fmla="val 7692"/>
             </a:avLst>
           </a:prstGeom>
           <a:solidFill>
@@ -10815,7 +10815,7 @@
         <p:spPr>
           <a:xfrm>
             <a:off x="3639312" y="4169664"/>
-            <a:ext cx="685800" cy="384048"/>
+            <a:ext cx="685800" cy="475488"/>
           </a:xfrm>
           <a:prstGeom prst="rect">
             <a:avLst/>
@@ -10839,7 +10839,7 @@
                 <a:ea typeface="Trebuchet MS" pitchFamily="34" charset="-122"/>
                 <a:cs typeface="Trebuchet MS" pitchFamily="34" charset="-120"/>
               </a:rPr>
-              <a:t>l</a:t>
+              <a:t>c</a:t>
             </a:r>
             <a:endParaRPr lang="en-US" sz="900" dirty="0"/>
           </a:p>
@@ -10854,11 +10854,11 @@
         <p:spPr>
           <a:xfrm>
             <a:off x="4447032" y="4169664"/>
-            <a:ext cx="685800" cy="384048"/>
+            <a:ext cx="685800" cy="475488"/>
           </a:xfrm>
           <a:prstGeom prst="rect">
             <a:avLst>
-              <a:gd name="adj" fmla="val 9524"/>
+              <a:gd name="adj" fmla="val 7692"/>
             </a:avLst>
           </a:prstGeom>
           <a:solidFill>
@@ -10881,7 +10881,7 @@
         <p:spPr>
           <a:xfrm>
             <a:off x="4447032" y="4169664"/>
-            <a:ext cx="685800" cy="384048"/>
+            <a:ext cx="685800" cy="475488"/>
           </a:xfrm>
           <a:prstGeom prst="rect">
             <a:avLst/>
@@ -10905,7 +10905,7 @@
                 <a:ea typeface="Trebuchet MS" pitchFamily="34" charset="-122"/>
                 <a:cs typeface="Trebuchet MS" pitchFamily="34" charset="-120"/>
               </a:rPr>
-              <a:t>e</a:t>
+              <a:t>r</a:t>
             </a:r>
             <a:endParaRPr lang="en-US" sz="900" dirty="0"/>
           </a:p>
@@ -10920,11 +10920,11 @@
         <p:spPr>
           <a:xfrm>
             <a:off x="5254752" y="4169664"/>
-            <a:ext cx="685800" cy="384048"/>
+            <a:ext cx="685800" cy="475488"/>
           </a:xfrm>
           <a:prstGeom prst="rect">
             <a:avLst>
-              <a:gd name="adj" fmla="val 9524"/>
+              <a:gd name="adj" fmla="val 7692"/>
             </a:avLst>
           </a:prstGeom>
           <a:solidFill>
@@ -10947,7 +10947,7 @@
         <p:spPr>
           <a:xfrm>
             <a:off x="5254752" y="4169664"/>
-            <a:ext cx="685800" cy="384048"/>
+            <a:ext cx="685800" cy="475488"/>
           </a:xfrm>
           <a:prstGeom prst="rect">
             <a:avLst/>
@@ -10971,7 +10971,7 @@
                 <a:ea typeface="Trebuchet MS" pitchFamily="34" charset="-122"/>
                 <a:cs typeface="Trebuchet MS" pitchFamily="34" charset="-120"/>
               </a:rPr>
-              <a:t>ph</a:t>
+              <a:t>o</a:t>
             </a:r>
             <a:endParaRPr lang="en-US" sz="900" dirty="0"/>
           </a:p>
@@ -10979,57 +10979,18 @@
       </p:sp>
       <p:sp>
         <p:nvSpPr>
-          <p:cNvPr id="46" name="Text 44"/>
-          <p:cNvSpPr/>
-          <p:nvPr/>
-        </p:nvSpPr>
-        <p:spPr>
-          <a:xfrm>
-            <a:off x="5254752" y="4572000"/>
-            <a:ext cx="685800" cy="219456"/>
-          </a:xfrm>
-          <a:prstGeom prst="rect">
-            <a:avLst/>
-          </a:prstGeom>
-          <a:noFill/>
-          <a:ln/>
-        </p:spPr>
-        <p:txBody>
-          <a:bodyPr wrap="square" lIns="0" tIns="0" rIns="0" bIns="0" rtlCol="0" anchor="t"/>
-          <a:lstStyle/>
-          <a:p>
-            <a:pPr algn="ctr" indent="0" marL="0">
-              <a:buNone/>
-            </a:pPr>
-            <a:r>
-              <a:rPr lang="en-US" sz="750" i="1" dirty="0">
-                <a:solidFill>
-                  <a:srgbClr val="94A3B8"/>
-                </a:solidFill>
-                <a:latin typeface="Calibri" pitchFamily="34" charset="0"/>
-                <a:ea typeface="Calibri" pitchFamily="34" charset="-122"/>
-                <a:cs typeface="Calibri" pitchFamily="34" charset="-120"/>
-              </a:rPr>
-              <a:t>/f/</a:t>
-            </a:r>
-            <a:endParaRPr lang="en-US" sz="750" dirty="0"/>
-          </a:p>
-        </p:txBody>
-      </p:sp>
-      <p:sp>
-        <p:nvSpPr>
-          <p:cNvPr id="47" name="Shape 45"/>
+          <p:cNvPr id="46" name="Shape 44"/>
           <p:cNvSpPr/>
           <p:nvPr/>
         </p:nvSpPr>
         <p:spPr>
           <a:xfrm>
             <a:off x="6062472" y="4169664"/>
-            <a:ext cx="685800" cy="384048"/>
+            <a:ext cx="685800" cy="475488"/>
           </a:xfrm>
           <a:prstGeom prst="rect">
             <a:avLst>
-              <a:gd name="adj" fmla="val 9524"/>
+              <a:gd name="adj" fmla="val 7692"/>
             </a:avLst>
           </a:prstGeom>
           <a:solidFill>
@@ -11045,14 +11006,14 @@
       </p:sp>
       <p:sp>
         <p:nvSpPr>
-          <p:cNvPr id="48" name="Text 46"/>
+          <p:cNvPr id="47" name="Text 45"/>
           <p:cNvSpPr/>
           <p:nvPr/>
         </p:nvSpPr>
         <p:spPr>
           <a:xfrm>
             <a:off x="6062472" y="4169664"/>
-            <a:ext cx="685800" cy="384048"/>
+            <a:ext cx="685800" cy="475488"/>
           </a:xfrm>
           <a:prstGeom prst="rect">
             <a:avLst/>
@@ -11076,7 +11037,7 @@
                 <a:ea typeface="Trebuchet MS" pitchFamily="34" charset="-122"/>
                 <a:cs typeface="Trebuchet MS" pitchFamily="34" charset="-120"/>
               </a:rPr>
-              <a:t>o</a:t>
+              <a:t>ph</a:t>
             </a:r>
             <a:endParaRPr lang="en-US" sz="900" dirty="0"/>
           </a:p>
@@ -11084,18 +11045,18 @@
       </p:sp>
       <p:sp>
         <p:nvSpPr>
-          <p:cNvPr id="49" name="Shape 47"/>
+          <p:cNvPr id="48" name="Shape 46"/>
           <p:cNvSpPr/>
           <p:nvPr/>
         </p:nvSpPr>
         <p:spPr>
           <a:xfrm>
             <a:off x="6870192" y="4169664"/>
-            <a:ext cx="685800" cy="384048"/>
+            <a:ext cx="685800" cy="475488"/>
           </a:xfrm>
           <a:prstGeom prst="rect">
             <a:avLst>
-              <a:gd name="adj" fmla="val 9524"/>
+              <a:gd name="adj" fmla="val 7692"/>
             </a:avLst>
           </a:prstGeom>
           <a:solidFill>
@@ -11111,14 +11072,14 @@
       </p:sp>
       <p:sp>
         <p:nvSpPr>
-          <p:cNvPr id="50" name="Text 48"/>
+          <p:cNvPr id="49" name="Text 47"/>
           <p:cNvSpPr/>
           <p:nvPr/>
         </p:nvSpPr>
         <p:spPr>
           <a:xfrm>
             <a:off x="6870192" y="4169664"/>
-            <a:ext cx="685800" cy="384048"/>
+            <a:ext cx="685800" cy="475488"/>
           </a:xfrm>
           <a:prstGeom prst="rect">
             <a:avLst/>
@@ -11142,7 +11103,7 @@
                 <a:ea typeface="Trebuchet MS" pitchFamily="34" charset="-122"/>
                 <a:cs typeface="Trebuchet MS" pitchFamily="34" charset="-120"/>
               </a:rPr>
-              <a:t>n</a:t>
+              <a:t>o_e</a:t>
             </a:r>
             <a:endParaRPr lang="en-US" sz="900" dirty="0"/>
           </a:p>
@@ -11150,18 +11111,18 @@
       </p:sp>
       <p:sp>
         <p:nvSpPr>
-          <p:cNvPr id="51" name="Shape 49"/>
+          <p:cNvPr id="50" name="Shape 48"/>
           <p:cNvSpPr/>
           <p:nvPr/>
         </p:nvSpPr>
         <p:spPr>
           <a:xfrm>
             <a:off x="7677912" y="4169664"/>
-            <a:ext cx="685800" cy="384048"/>
+            <a:ext cx="685800" cy="475488"/>
           </a:xfrm>
           <a:prstGeom prst="rect">
             <a:avLst>
-              <a:gd name="adj" fmla="val 9524"/>
+              <a:gd name="adj" fmla="val 7692"/>
             </a:avLst>
           </a:prstGeom>
           <a:solidFill>
@@ -11177,14 +11138,14 @@
       </p:sp>
       <p:sp>
         <p:nvSpPr>
-          <p:cNvPr id="52" name="Text 50"/>
+          <p:cNvPr id="51" name="Text 49"/>
           <p:cNvSpPr/>
           <p:nvPr/>
         </p:nvSpPr>
         <p:spPr>
           <a:xfrm>
             <a:off x="7677912" y="4169664"/>
-            <a:ext cx="685800" cy="384048"/>
+            <a:ext cx="685800" cy="475488"/>
           </a:xfrm>
           <a:prstGeom prst="rect">
             <a:avLst/>
@@ -11208,7 +11169,7 @@
                 <a:ea typeface="Trebuchet MS" pitchFamily="34" charset="-122"/>
                 <a:cs typeface="Trebuchet MS" pitchFamily="34" charset="-120"/>
               </a:rPr>
-              <a:t>e</a:t>
+              <a:t>n</a:t>
             </a:r>
             <a:endParaRPr lang="en-US" sz="900" dirty="0"/>
           </a:p>
@@ -11500,7 +11461,7 @@
                 <a:ea typeface="Calibri" pitchFamily="34" charset="-122"/>
                 <a:cs typeface="Calibri" pitchFamily="34" charset="-120"/>
               </a:rPr>
-              <a:t>Word Labs  •  wordlabs.app  •  Root: 'phone' = sound, voice</a:t>
+              <a:t>Word Labs  •  wordlabs.app  •  Root: 'phone' = sound; a device for talking to someone</a:t>
             </a:r>
             <a:endParaRPr lang="en-US" sz="800" dirty="0"/>
           </a:p>
@@ -11639,7 +11600,7 @@
                 <a:ea typeface="Trebuchet MS" pitchFamily="34" charset="-122"/>
                 <a:cs typeface="Trebuchet MS" pitchFamily="34" charset="-120"/>
               </a:rPr>
-              <a:t>microphone</a:t>
+              <a:t>microphones</a:t>
             </a:r>
             <a:endParaRPr lang="en-US" sz="2800" dirty="0"/>
           </a:p>
@@ -12327,7 +12288,7 @@
                 <a:ea typeface="Calibri" pitchFamily="34" charset="-122"/>
                 <a:cs typeface="Calibri" pitchFamily="34" charset="-120"/>
               </a:rPr>
-              <a:t>Word Labs  •  wordlabs.app  •  Root: 'phone' = sound, voice</a:t>
+              <a:t>Word Labs  •  wordlabs.app  •  Root: 'phone' = sound; a device for talking to someone</a:t>
             </a:r>
             <a:endParaRPr lang="en-US" sz="800" dirty="0"/>
           </a:p>
@@ -12466,7 +12427,7 @@
                 <a:ea typeface="Trebuchet MS" pitchFamily="34" charset="-122"/>
                 <a:cs typeface="Trebuchet MS" pitchFamily="34" charset="-120"/>
               </a:rPr>
-              <a:t>microphone</a:t>
+              <a:t>microphones</a:t>
             </a:r>
             <a:endParaRPr lang="en-US" sz="2800" dirty="0"/>
           </a:p>
@@ -12546,7 +12507,7 @@
         </p:nvSpPr>
         <p:spPr>
           <a:xfrm>
-            <a:off x="2938272" y="2258568"/>
+            <a:off x="2221992" y="2258568"/>
             <a:ext cx="1828800" cy="292608"/>
           </a:xfrm>
           <a:prstGeom prst="rect">
@@ -12580,7 +12541,7 @@
         </p:nvSpPr>
         <p:spPr>
           <a:xfrm>
-            <a:off x="2938272" y="2258568"/>
+            <a:off x="2221992" y="2258568"/>
             <a:ext cx="1828800" cy="292608"/>
           </a:xfrm>
           <a:prstGeom prst="rect">
@@ -12619,7 +12580,7 @@
         </p:nvSpPr>
         <p:spPr>
           <a:xfrm>
-            <a:off x="2938272" y="2569464"/>
+            <a:off x="2221992" y="2569464"/>
             <a:ext cx="1828800" cy="201168"/>
           </a:xfrm>
           <a:prstGeom prst="rect">
@@ -12658,7 +12619,7 @@
         </p:nvSpPr>
         <p:spPr>
           <a:xfrm>
-            <a:off x="5803392" y="2258568"/>
+            <a:off x="4370832" y="2258568"/>
             <a:ext cx="1828800" cy="292608"/>
           </a:xfrm>
           <a:prstGeom prst="rect">
@@ -12692,7 +12653,7 @@
         </p:nvSpPr>
         <p:spPr>
           <a:xfrm>
-            <a:off x="5803392" y="2258568"/>
+            <a:off x="4370832" y="2258568"/>
             <a:ext cx="1828800" cy="292608"/>
           </a:xfrm>
           <a:prstGeom prst="rect">
@@ -12731,7 +12692,7 @@
         </p:nvSpPr>
         <p:spPr>
           <a:xfrm>
-            <a:off x="5803392" y="2569464"/>
+            <a:off x="4370832" y="2569464"/>
             <a:ext cx="1828800" cy="201168"/>
           </a:xfrm>
           <a:prstGeom prst="rect">
@@ -12756,7 +12717,7 @@
                 <a:ea typeface="Calibri" pitchFamily="34" charset="-122"/>
                 <a:cs typeface="Calibri" pitchFamily="34" charset="-120"/>
               </a:rPr>
-              <a:t>sound, voice</a:t>
+              <a:t>sound; a device for talking to someone</a:t>
             </a:r>
             <a:endParaRPr lang="en-US" sz="850" dirty="0"/>
           </a:p>
@@ -12765,6 +12726,118 @@
       <p:sp>
         <p:nvSpPr>
           <p:cNvPr id="22" name="Shape 20"/>
+          <p:cNvSpPr/>
+          <p:nvPr/>
+        </p:nvSpPr>
+        <p:spPr>
+          <a:xfrm>
+            <a:off x="6519672" y="2258568"/>
+            <a:ext cx="1828800" cy="292608"/>
+          </a:xfrm>
+          <a:prstGeom prst="rect">
+            <a:avLst>
+              <a:gd name="adj" fmla="val 25000"/>
+            </a:avLst>
+          </a:prstGeom>
+          <a:solidFill>
+            <a:srgbClr val="FCE7F3"/>
+          </a:solidFill>
+          <a:ln w="19050">
+            <a:solidFill>
+              <a:srgbClr val="DB2777"/>
+            </a:solidFill>
+            <a:prstDash val="solid"/>
+          </a:ln>
+          <a:effectLst>
+            <a:outerShdw sx="100000" sy="100000" kx="0" ky="0" algn="bl" rotWithShape="0" blurRad="101600" dist="38100" dir="8100000">
+              <a:srgbClr val="000000">
+                <a:alpha val="12000"/>
+              </a:srgbClr>
+            </a:outerShdw>
+          </a:effectLst>
+        </p:spPr>
+      </p:sp>
+      <p:sp>
+        <p:nvSpPr>
+          <p:cNvPr id="23" name="Text 21"/>
+          <p:cNvSpPr/>
+          <p:nvPr/>
+        </p:nvSpPr>
+        <p:spPr>
+          <a:xfrm>
+            <a:off x="6519672" y="2258568"/>
+            <a:ext cx="1828800" cy="292608"/>
+          </a:xfrm>
+          <a:prstGeom prst="rect">
+            <a:avLst/>
+          </a:prstGeom>
+          <a:noFill/>
+          <a:ln/>
+        </p:spPr>
+        <p:txBody>
+          <a:bodyPr wrap="square" lIns="0" tIns="0" rIns="0" bIns="0" rtlCol="0" anchor="ctr"/>
+          <a:lstStyle/>
+          <a:p>
+            <a:pPr algn="ctr" indent="0" marL="0">
+              <a:buNone/>
+            </a:pPr>
+            <a:r>
+              <a:rPr lang="en-US" sz="1300" b="1" dirty="0">
+                <a:solidFill>
+                  <a:srgbClr val="9D174D"/>
+                </a:solidFill>
+                <a:latin typeface="Trebuchet MS" pitchFamily="34" charset="0"/>
+                <a:ea typeface="Trebuchet MS" pitchFamily="34" charset="-122"/>
+                <a:cs typeface="Trebuchet MS" pitchFamily="34" charset="-120"/>
+              </a:rPr>
+              <a:t>s</a:t>
+            </a:r>
+            <a:endParaRPr lang="en-US" sz="1300" dirty="0"/>
+          </a:p>
+        </p:txBody>
+      </p:sp>
+      <p:sp>
+        <p:nvSpPr>
+          <p:cNvPr id="24" name="Text 22"/>
+          <p:cNvSpPr/>
+          <p:nvPr/>
+        </p:nvSpPr>
+        <p:spPr>
+          <a:xfrm>
+            <a:off x="6519672" y="2569464"/>
+            <a:ext cx="1828800" cy="201168"/>
+          </a:xfrm>
+          <a:prstGeom prst="rect">
+            <a:avLst/>
+          </a:prstGeom>
+          <a:noFill/>
+          <a:ln/>
+        </p:spPr>
+        <p:txBody>
+          <a:bodyPr wrap="square" lIns="0" tIns="0" rIns="0" bIns="0" rtlCol="0" anchor="t"/>
+          <a:lstStyle/>
+          <a:p>
+            <a:pPr algn="ctr" indent="0" marL="0">
+              <a:buNone/>
+            </a:pPr>
+            <a:r>
+              <a:rPr lang="en-US" sz="850" dirty="0">
+                <a:solidFill>
+                  <a:srgbClr val="475569"/>
+                </a:solidFill>
+                <a:latin typeface="Calibri" pitchFamily="34" charset="0"/>
+                <a:ea typeface="Calibri" pitchFamily="34" charset="-122"/>
+                <a:cs typeface="Calibri" pitchFamily="34" charset="-120"/>
+              </a:rPr>
+              <a:t>plural or present tense</a:t>
+            </a:r>
+            <a:endParaRPr lang="en-US" sz="850" dirty="0"/>
+          </a:p>
+        </p:txBody>
+      </p:sp>
+      <p:sp>
+        <p:nvSpPr>
+          <p:cNvPr id="25" name="Shape 23"/>
           <p:cNvSpPr/>
           <p:nvPr/>
         </p:nvSpPr>
@@ -12791,7 +12864,7 @@
       </p:sp>
       <p:sp>
         <p:nvSpPr>
-          <p:cNvPr id="23" name="Text 21"/>
+          <p:cNvPr id="26" name="Text 24"/>
           <p:cNvSpPr/>
           <p:nvPr/>
         </p:nvSpPr>
@@ -12830,7 +12903,7 @@
       </p:sp>
       <p:sp>
         <p:nvSpPr>
-          <p:cNvPr id="24" name="Shape 22"/>
+          <p:cNvPr id="27" name="Shape 25"/>
           <p:cNvSpPr/>
           <p:nvPr/>
         </p:nvSpPr>
@@ -12857,7 +12930,7 @@
       </p:sp>
       <p:sp>
         <p:nvSpPr>
-          <p:cNvPr id="25" name="Text 23"/>
+          <p:cNvPr id="28" name="Text 26"/>
           <p:cNvSpPr/>
           <p:nvPr/>
         </p:nvSpPr>
@@ -12896,7 +12969,7 @@
       </p:sp>
       <p:sp>
         <p:nvSpPr>
-          <p:cNvPr id="26" name="Shape 24"/>
+          <p:cNvPr id="29" name="Shape 27"/>
           <p:cNvSpPr/>
           <p:nvPr/>
         </p:nvSpPr>
@@ -12923,7 +12996,7 @@
       </p:sp>
       <p:sp>
         <p:nvSpPr>
-          <p:cNvPr id="27" name="Text 25"/>
+          <p:cNvPr id="30" name="Text 28"/>
           <p:cNvSpPr/>
           <p:nvPr/>
         </p:nvSpPr>
@@ -12962,7 +13035,7 @@
       </p:sp>
       <p:sp>
         <p:nvSpPr>
-          <p:cNvPr id="28" name="Shape 26"/>
+          <p:cNvPr id="31" name="Shape 29"/>
           <p:cNvSpPr/>
           <p:nvPr/>
         </p:nvSpPr>
@@ -12989,7 +13062,7 @@
       </p:sp>
       <p:sp>
         <p:nvSpPr>
-          <p:cNvPr id="29" name="Text 27"/>
+          <p:cNvPr id="32" name="Text 30"/>
           <p:cNvSpPr/>
           <p:nvPr/>
         </p:nvSpPr>
@@ -13312,7 +13385,7 @@
                 <a:ea typeface="Calibri" pitchFamily="34" charset="-122"/>
                 <a:cs typeface="Calibri" pitchFamily="34" charset="-120"/>
               </a:rPr>
-              <a:t>Word Labs  •  wordlabs.app  •  Root: 'phone' = sound, voice</a:t>
+              <a:t>Word Labs  •  wordlabs.app  •  Root: 'phone' = sound; a device for talking to someone</a:t>
             </a:r>
             <a:endParaRPr lang="en-US" sz="800" dirty="0"/>
           </a:p>
@@ -13451,7 +13524,7 @@
                 <a:ea typeface="Trebuchet MS" pitchFamily="34" charset="-122"/>
                 <a:cs typeface="Trebuchet MS" pitchFamily="34" charset="-120"/>
               </a:rPr>
-              <a:t>microphone</a:t>
+              <a:t>microphones</a:t>
             </a:r>
             <a:endParaRPr lang="en-US" sz="2800" dirty="0"/>
           </a:p>
@@ -13531,7 +13604,7 @@
         </p:nvSpPr>
         <p:spPr>
           <a:xfrm>
-            <a:off x="2938272" y="2258568"/>
+            <a:off x="2221992" y="2258568"/>
             <a:ext cx="1828800" cy="292608"/>
           </a:xfrm>
           <a:prstGeom prst="rect">
@@ -13565,7 +13638,7 @@
         </p:nvSpPr>
         <p:spPr>
           <a:xfrm>
-            <a:off x="2938272" y="2258568"/>
+            <a:off x="2221992" y="2258568"/>
             <a:ext cx="1828800" cy="292608"/>
           </a:xfrm>
           <a:prstGeom prst="rect">
@@ -13604,7 +13677,7 @@
         </p:nvSpPr>
         <p:spPr>
           <a:xfrm>
-            <a:off x="2938272" y="2569464"/>
+            <a:off x="2221992" y="2569464"/>
             <a:ext cx="1828800" cy="201168"/>
           </a:xfrm>
           <a:prstGeom prst="rect">
@@ -13643,7 +13716,7 @@
         </p:nvSpPr>
         <p:spPr>
           <a:xfrm>
-            <a:off x="5803392" y="2258568"/>
+            <a:off x="4370832" y="2258568"/>
             <a:ext cx="1828800" cy="292608"/>
           </a:xfrm>
           <a:prstGeom prst="rect">
@@ -13677,7 +13750,7 @@
         </p:nvSpPr>
         <p:spPr>
           <a:xfrm>
-            <a:off x="5803392" y="2258568"/>
+            <a:off x="4370832" y="2258568"/>
             <a:ext cx="1828800" cy="292608"/>
           </a:xfrm>
           <a:prstGeom prst="rect">
@@ -13716,7 +13789,7 @@
         </p:nvSpPr>
         <p:spPr>
           <a:xfrm>
-            <a:off x="5803392" y="2569464"/>
+            <a:off x="4370832" y="2569464"/>
             <a:ext cx="1828800" cy="201168"/>
           </a:xfrm>
           <a:prstGeom prst="rect">
@@ -13741,7 +13814,7 @@
                 <a:ea typeface="Calibri" pitchFamily="34" charset="-122"/>
                 <a:cs typeface="Calibri" pitchFamily="34" charset="-120"/>
               </a:rPr>
-              <a:t>sound, voice</a:t>
+              <a:t>sound; a device for talking to someone</a:t>
             </a:r>
             <a:endParaRPr lang="en-US" sz="850" dirty="0"/>
           </a:p>
@@ -13750,6 +13823,118 @@
       <p:sp>
         <p:nvSpPr>
           <p:cNvPr id="22" name="Shape 20"/>
+          <p:cNvSpPr/>
+          <p:nvPr/>
+        </p:nvSpPr>
+        <p:spPr>
+          <a:xfrm>
+            <a:off x="6519672" y="2258568"/>
+            <a:ext cx="1828800" cy="292608"/>
+          </a:xfrm>
+          <a:prstGeom prst="rect">
+            <a:avLst>
+              <a:gd name="adj" fmla="val 25000"/>
+            </a:avLst>
+          </a:prstGeom>
+          <a:solidFill>
+            <a:srgbClr val="FCE7F3"/>
+          </a:solidFill>
+          <a:ln w="19050">
+            <a:solidFill>
+              <a:srgbClr val="DB2777"/>
+            </a:solidFill>
+            <a:prstDash val="solid"/>
+          </a:ln>
+          <a:effectLst>
+            <a:outerShdw sx="100000" sy="100000" kx="0" ky="0" algn="bl" rotWithShape="0" blurRad="101600" dist="38100" dir="8100000">
+              <a:srgbClr val="000000">
+                <a:alpha val="12000"/>
+              </a:srgbClr>
+            </a:outerShdw>
+          </a:effectLst>
+        </p:spPr>
+      </p:sp>
+      <p:sp>
+        <p:nvSpPr>
+          <p:cNvPr id="23" name="Text 21"/>
+          <p:cNvSpPr/>
+          <p:nvPr/>
+        </p:nvSpPr>
+        <p:spPr>
+          <a:xfrm>
+            <a:off x="6519672" y="2258568"/>
+            <a:ext cx="1828800" cy="292608"/>
+          </a:xfrm>
+          <a:prstGeom prst="rect">
+            <a:avLst/>
+          </a:prstGeom>
+          <a:noFill/>
+          <a:ln/>
+        </p:spPr>
+        <p:txBody>
+          <a:bodyPr wrap="square" lIns="0" tIns="0" rIns="0" bIns="0" rtlCol="0" anchor="ctr"/>
+          <a:lstStyle/>
+          <a:p>
+            <a:pPr algn="ctr" indent="0" marL="0">
+              <a:buNone/>
+            </a:pPr>
+            <a:r>
+              <a:rPr lang="en-US" sz="1300" b="1" dirty="0">
+                <a:solidFill>
+                  <a:srgbClr val="9D174D"/>
+                </a:solidFill>
+                <a:latin typeface="Trebuchet MS" pitchFamily="34" charset="0"/>
+                <a:ea typeface="Trebuchet MS" pitchFamily="34" charset="-122"/>
+                <a:cs typeface="Trebuchet MS" pitchFamily="34" charset="-120"/>
+              </a:rPr>
+              <a:t>s</a:t>
+            </a:r>
+            <a:endParaRPr lang="en-US" sz="1300" dirty="0"/>
+          </a:p>
+        </p:txBody>
+      </p:sp>
+      <p:sp>
+        <p:nvSpPr>
+          <p:cNvPr id="24" name="Text 22"/>
+          <p:cNvSpPr/>
+          <p:nvPr/>
+        </p:nvSpPr>
+        <p:spPr>
+          <a:xfrm>
+            <a:off x="6519672" y="2569464"/>
+            <a:ext cx="1828800" cy="201168"/>
+          </a:xfrm>
+          <a:prstGeom prst="rect">
+            <a:avLst/>
+          </a:prstGeom>
+          <a:noFill/>
+          <a:ln/>
+        </p:spPr>
+        <p:txBody>
+          <a:bodyPr wrap="square" lIns="0" tIns="0" rIns="0" bIns="0" rtlCol="0" anchor="t"/>
+          <a:lstStyle/>
+          <a:p>
+            <a:pPr algn="ctr" indent="0" marL="0">
+              <a:buNone/>
+            </a:pPr>
+            <a:r>
+              <a:rPr lang="en-US" sz="850" dirty="0">
+                <a:solidFill>
+                  <a:srgbClr val="475569"/>
+                </a:solidFill>
+                <a:latin typeface="Calibri" pitchFamily="34" charset="0"/>
+                <a:ea typeface="Calibri" pitchFamily="34" charset="-122"/>
+                <a:cs typeface="Calibri" pitchFamily="34" charset="-120"/>
+              </a:rPr>
+              <a:t>plural or present tense</a:t>
+            </a:r>
+            <a:endParaRPr lang="en-US" sz="850" dirty="0"/>
+          </a:p>
+        </p:txBody>
+      </p:sp>
+      <p:sp>
+        <p:nvSpPr>
+          <p:cNvPr id="25" name="Shape 23"/>
           <p:cNvSpPr/>
           <p:nvPr/>
         </p:nvSpPr>
@@ -13776,7 +13961,7 @@
       </p:sp>
       <p:sp>
         <p:nvSpPr>
-          <p:cNvPr id="23" name="Text 21"/>
+          <p:cNvPr id="26" name="Text 24"/>
           <p:cNvSpPr/>
           <p:nvPr/>
         </p:nvSpPr>
@@ -13815,7 +14000,7 @@
       </p:sp>
       <p:sp>
         <p:nvSpPr>
-          <p:cNvPr id="24" name="Shape 22"/>
+          <p:cNvPr id="27" name="Shape 25"/>
           <p:cNvSpPr/>
           <p:nvPr/>
         </p:nvSpPr>
@@ -13842,7 +14027,7 @@
       </p:sp>
       <p:sp>
         <p:nvSpPr>
-          <p:cNvPr id="25" name="Shape 23"/>
+          <p:cNvPr id="28" name="Shape 26"/>
           <p:cNvSpPr/>
           <p:nvPr/>
         </p:nvSpPr>
@@ -13869,7 +14054,7 @@
       </p:sp>
       <p:sp>
         <p:nvSpPr>
-          <p:cNvPr id="26" name="Text 24"/>
+          <p:cNvPr id="29" name="Text 27"/>
           <p:cNvSpPr/>
           <p:nvPr/>
         </p:nvSpPr>
@@ -13908,7 +14093,7 @@
       </p:sp>
       <p:sp>
         <p:nvSpPr>
-          <p:cNvPr id="27" name="Text 25"/>
+          <p:cNvPr id="30" name="Text 28"/>
           <p:cNvSpPr/>
           <p:nvPr/>
         </p:nvSpPr>
@@ -13947,7 +14132,7 @@
       </p:sp>
       <p:sp>
         <p:nvSpPr>
-          <p:cNvPr id="28" name="Shape 26"/>
+          <p:cNvPr id="31" name="Shape 29"/>
           <p:cNvSpPr/>
           <p:nvPr/>
         </p:nvSpPr>
@@ -13974,7 +14159,7 @@
       </p:sp>
       <p:sp>
         <p:nvSpPr>
-          <p:cNvPr id="29" name="Text 27"/>
+          <p:cNvPr id="32" name="Text 30"/>
           <p:cNvSpPr/>
           <p:nvPr/>
         </p:nvSpPr>
@@ -14013,7 +14198,7 @@
       </p:sp>
       <p:sp>
         <p:nvSpPr>
-          <p:cNvPr id="30" name="Text 28"/>
+          <p:cNvPr id="33" name="Text 31"/>
           <p:cNvSpPr/>
           <p:nvPr/>
         </p:nvSpPr>
@@ -14052,7 +14237,7 @@
       </p:sp>
       <p:sp>
         <p:nvSpPr>
-          <p:cNvPr id="31" name="Shape 29"/>
+          <p:cNvPr id="34" name="Shape 32"/>
           <p:cNvSpPr/>
           <p:nvPr/>
         </p:nvSpPr>
@@ -14079,7 +14264,7 @@
       </p:sp>
       <p:sp>
         <p:nvSpPr>
-          <p:cNvPr id="32" name="Text 30"/>
+          <p:cNvPr id="35" name="Text 33"/>
           <p:cNvSpPr/>
           <p:nvPr/>
         </p:nvSpPr>
@@ -14110,7 +14295,7 @@
                 <a:ea typeface="Trebuchet MS" pitchFamily="34" charset="-122"/>
                 <a:cs typeface="Trebuchet MS" pitchFamily="34" charset="-120"/>
               </a:rPr>
-              <a:t>phone</a:t>
+              <a:t>phones</a:t>
             </a:r>
             <a:endParaRPr lang="en-US" sz="1400" dirty="0"/>
           </a:p>
@@ -14118,7 +14303,7 @@
       </p:sp>
       <p:sp>
         <p:nvSpPr>
-          <p:cNvPr id="33" name="Shape 31"/>
+          <p:cNvPr id="36" name="Shape 34"/>
           <p:cNvSpPr/>
           <p:nvPr/>
         </p:nvSpPr>
@@ -14145,7 +14330,7 @@
       </p:sp>
       <p:sp>
         <p:nvSpPr>
-          <p:cNvPr id="34" name="Text 32"/>
+          <p:cNvPr id="37" name="Text 35"/>
           <p:cNvSpPr/>
           <p:nvPr/>
         </p:nvSpPr>
@@ -14184,7 +14369,7 @@
       </p:sp>
       <p:sp>
         <p:nvSpPr>
-          <p:cNvPr id="35" name="Shape 33"/>
+          <p:cNvPr id="38" name="Shape 36"/>
           <p:cNvSpPr/>
           <p:nvPr/>
         </p:nvSpPr>
@@ -14211,7 +14396,7 @@
       </p:sp>
       <p:sp>
         <p:nvSpPr>
-          <p:cNvPr id="36" name="Text 34"/>
+          <p:cNvPr id="39" name="Text 37"/>
           <p:cNvSpPr/>
           <p:nvPr/>
         </p:nvSpPr>
@@ -14443,7 +14628,7 @@
                 <a:ea typeface="Calibri" pitchFamily="34" charset="-122"/>
                 <a:cs typeface="Calibri" pitchFamily="34" charset="-120"/>
               </a:rPr>
-              <a:t>Root 'phone' — sound, voice</a:t>
+              <a:t>Root 'phone' — sound; a device for talking to someone</a:t>
             </a:r>
             <a:endParaRPr lang="en-US" sz="1600" dirty="0"/>
           </a:p>
@@ -14799,7 +14984,7 @@
                 <a:ea typeface="Calibri" pitchFamily="34" charset="-122"/>
                 <a:cs typeface="Calibri" pitchFamily="34" charset="-120"/>
               </a:rPr>
-              <a:t>Word Labs  •  wordlabs.app  •  Root: 'phone' = sound, voice</a:t>
+              <a:t>Word Labs  •  wordlabs.app  •  Root: 'phone' = sound; a device for talking to someone</a:t>
             </a:r>
             <a:endParaRPr lang="en-US" sz="800" dirty="0"/>
           </a:p>
@@ -14938,7 +15123,7 @@
                 <a:ea typeface="Trebuchet MS" pitchFamily="34" charset="-122"/>
                 <a:cs typeface="Trebuchet MS" pitchFamily="34" charset="-120"/>
               </a:rPr>
-              <a:t>microphone</a:t>
+              <a:t>microphones</a:t>
             </a:r>
             <a:endParaRPr lang="en-US" sz="2800" dirty="0"/>
           </a:p>
@@ -15018,7 +15203,7 @@
         </p:nvSpPr>
         <p:spPr>
           <a:xfrm>
-            <a:off x="2938272" y="2258568"/>
+            <a:off x="2221992" y="2258568"/>
             <a:ext cx="1828800" cy="292608"/>
           </a:xfrm>
           <a:prstGeom prst="rect">
@@ -15052,7 +15237,7 @@
         </p:nvSpPr>
         <p:spPr>
           <a:xfrm>
-            <a:off x="2938272" y="2258568"/>
+            <a:off x="2221992" y="2258568"/>
             <a:ext cx="1828800" cy="292608"/>
           </a:xfrm>
           <a:prstGeom prst="rect">
@@ -15091,7 +15276,7 @@
         </p:nvSpPr>
         <p:spPr>
           <a:xfrm>
-            <a:off x="2938272" y="2569464"/>
+            <a:off x="2221992" y="2569464"/>
             <a:ext cx="1828800" cy="201168"/>
           </a:xfrm>
           <a:prstGeom prst="rect">
@@ -15130,7 +15315,7 @@
         </p:nvSpPr>
         <p:spPr>
           <a:xfrm>
-            <a:off x="5803392" y="2258568"/>
+            <a:off x="4370832" y="2258568"/>
             <a:ext cx="1828800" cy="292608"/>
           </a:xfrm>
           <a:prstGeom prst="rect">
@@ -15164,7 +15349,7 @@
         </p:nvSpPr>
         <p:spPr>
           <a:xfrm>
-            <a:off x="5803392" y="2258568"/>
+            <a:off x="4370832" y="2258568"/>
             <a:ext cx="1828800" cy="292608"/>
           </a:xfrm>
           <a:prstGeom prst="rect">
@@ -15203,7 +15388,7 @@
         </p:nvSpPr>
         <p:spPr>
           <a:xfrm>
-            <a:off x="5803392" y="2569464"/>
+            <a:off x="4370832" y="2569464"/>
             <a:ext cx="1828800" cy="201168"/>
           </a:xfrm>
           <a:prstGeom prst="rect">
@@ -15228,7 +15413,7 @@
                 <a:ea typeface="Calibri" pitchFamily="34" charset="-122"/>
                 <a:cs typeface="Calibri" pitchFamily="34" charset="-120"/>
               </a:rPr>
-              <a:t>sound, voice</a:t>
+              <a:t>sound; a device for talking to someone</a:t>
             </a:r>
             <a:endParaRPr lang="en-US" sz="850" dirty="0"/>
           </a:p>
@@ -15237,6 +15422,118 @@
       <p:sp>
         <p:nvSpPr>
           <p:cNvPr id="22" name="Shape 20"/>
+          <p:cNvSpPr/>
+          <p:nvPr/>
+        </p:nvSpPr>
+        <p:spPr>
+          <a:xfrm>
+            <a:off x="6519672" y="2258568"/>
+            <a:ext cx="1828800" cy="292608"/>
+          </a:xfrm>
+          <a:prstGeom prst="rect">
+            <a:avLst>
+              <a:gd name="adj" fmla="val 25000"/>
+            </a:avLst>
+          </a:prstGeom>
+          <a:solidFill>
+            <a:srgbClr val="FCE7F3"/>
+          </a:solidFill>
+          <a:ln w="19050">
+            <a:solidFill>
+              <a:srgbClr val="DB2777"/>
+            </a:solidFill>
+            <a:prstDash val="solid"/>
+          </a:ln>
+          <a:effectLst>
+            <a:outerShdw sx="100000" sy="100000" kx="0" ky="0" algn="bl" rotWithShape="0" blurRad="101600" dist="38100" dir="8100000">
+              <a:srgbClr val="000000">
+                <a:alpha val="12000"/>
+              </a:srgbClr>
+            </a:outerShdw>
+          </a:effectLst>
+        </p:spPr>
+      </p:sp>
+      <p:sp>
+        <p:nvSpPr>
+          <p:cNvPr id="23" name="Text 21"/>
+          <p:cNvSpPr/>
+          <p:nvPr/>
+        </p:nvSpPr>
+        <p:spPr>
+          <a:xfrm>
+            <a:off x="6519672" y="2258568"/>
+            <a:ext cx="1828800" cy="292608"/>
+          </a:xfrm>
+          <a:prstGeom prst="rect">
+            <a:avLst/>
+          </a:prstGeom>
+          <a:noFill/>
+          <a:ln/>
+        </p:spPr>
+        <p:txBody>
+          <a:bodyPr wrap="square" lIns="0" tIns="0" rIns="0" bIns="0" rtlCol="0" anchor="ctr"/>
+          <a:lstStyle/>
+          <a:p>
+            <a:pPr algn="ctr" indent="0" marL="0">
+              <a:buNone/>
+            </a:pPr>
+            <a:r>
+              <a:rPr lang="en-US" sz="1300" b="1" dirty="0">
+                <a:solidFill>
+                  <a:srgbClr val="9D174D"/>
+                </a:solidFill>
+                <a:latin typeface="Trebuchet MS" pitchFamily="34" charset="0"/>
+                <a:ea typeface="Trebuchet MS" pitchFamily="34" charset="-122"/>
+                <a:cs typeface="Trebuchet MS" pitchFamily="34" charset="-120"/>
+              </a:rPr>
+              <a:t>s</a:t>
+            </a:r>
+            <a:endParaRPr lang="en-US" sz="1300" dirty="0"/>
+          </a:p>
+        </p:txBody>
+      </p:sp>
+      <p:sp>
+        <p:nvSpPr>
+          <p:cNvPr id="24" name="Text 22"/>
+          <p:cNvSpPr/>
+          <p:nvPr/>
+        </p:nvSpPr>
+        <p:spPr>
+          <a:xfrm>
+            <a:off x="6519672" y="2569464"/>
+            <a:ext cx="1828800" cy="201168"/>
+          </a:xfrm>
+          <a:prstGeom prst="rect">
+            <a:avLst/>
+          </a:prstGeom>
+          <a:noFill/>
+          <a:ln/>
+        </p:spPr>
+        <p:txBody>
+          <a:bodyPr wrap="square" lIns="0" tIns="0" rIns="0" bIns="0" rtlCol="0" anchor="t"/>
+          <a:lstStyle/>
+          <a:p>
+            <a:pPr algn="ctr" indent="0" marL="0">
+              <a:buNone/>
+            </a:pPr>
+            <a:r>
+              <a:rPr lang="en-US" sz="850" dirty="0">
+                <a:solidFill>
+                  <a:srgbClr val="475569"/>
+                </a:solidFill>
+                <a:latin typeface="Calibri" pitchFamily="34" charset="0"/>
+                <a:ea typeface="Calibri" pitchFamily="34" charset="-122"/>
+                <a:cs typeface="Calibri" pitchFamily="34" charset="-120"/>
+              </a:rPr>
+              <a:t>plural or present tense</a:t>
+            </a:r>
+            <a:endParaRPr lang="en-US" sz="850" dirty="0"/>
+          </a:p>
+        </p:txBody>
+      </p:sp>
+      <p:sp>
+        <p:nvSpPr>
+          <p:cNvPr id="25" name="Shape 23"/>
           <p:cNvSpPr/>
           <p:nvPr/>
         </p:nvSpPr>
@@ -15263,7 +15560,7 @@
       </p:sp>
       <p:sp>
         <p:nvSpPr>
-          <p:cNvPr id="23" name="Text 21"/>
+          <p:cNvPr id="26" name="Text 24"/>
           <p:cNvSpPr/>
           <p:nvPr/>
         </p:nvSpPr>
@@ -15302,7 +15599,7 @@
       </p:sp>
       <p:sp>
         <p:nvSpPr>
-          <p:cNvPr id="24" name="Shape 22"/>
+          <p:cNvPr id="27" name="Shape 25"/>
           <p:cNvSpPr/>
           <p:nvPr/>
         </p:nvSpPr>
@@ -15329,7 +15626,7 @@
       </p:sp>
       <p:sp>
         <p:nvSpPr>
-          <p:cNvPr id="25" name="Shape 23"/>
+          <p:cNvPr id="28" name="Shape 26"/>
           <p:cNvSpPr/>
           <p:nvPr/>
         </p:nvSpPr>
@@ -15356,7 +15653,7 @@
       </p:sp>
       <p:sp>
         <p:nvSpPr>
-          <p:cNvPr id="26" name="Text 24"/>
+          <p:cNvPr id="29" name="Text 27"/>
           <p:cNvSpPr/>
           <p:nvPr/>
         </p:nvSpPr>
@@ -15395,7 +15692,7 @@
       </p:sp>
       <p:sp>
         <p:nvSpPr>
-          <p:cNvPr id="27" name="Text 25"/>
+          <p:cNvPr id="30" name="Text 28"/>
           <p:cNvSpPr/>
           <p:nvPr/>
         </p:nvSpPr>
@@ -15434,7 +15731,7 @@
       </p:sp>
       <p:sp>
         <p:nvSpPr>
-          <p:cNvPr id="28" name="Shape 26"/>
+          <p:cNvPr id="31" name="Shape 29"/>
           <p:cNvSpPr/>
           <p:nvPr/>
         </p:nvSpPr>
@@ -15461,7 +15758,7 @@
       </p:sp>
       <p:sp>
         <p:nvSpPr>
-          <p:cNvPr id="29" name="Text 27"/>
+          <p:cNvPr id="32" name="Text 30"/>
           <p:cNvSpPr/>
           <p:nvPr/>
         </p:nvSpPr>
@@ -15500,7 +15797,7 @@
       </p:sp>
       <p:sp>
         <p:nvSpPr>
-          <p:cNvPr id="30" name="Text 28"/>
+          <p:cNvPr id="33" name="Text 31"/>
           <p:cNvSpPr/>
           <p:nvPr/>
         </p:nvSpPr>
@@ -15539,7 +15836,7 @@
       </p:sp>
       <p:sp>
         <p:nvSpPr>
-          <p:cNvPr id="31" name="Shape 29"/>
+          <p:cNvPr id="34" name="Shape 32"/>
           <p:cNvSpPr/>
           <p:nvPr/>
         </p:nvSpPr>
@@ -15566,7 +15863,7 @@
       </p:sp>
       <p:sp>
         <p:nvSpPr>
-          <p:cNvPr id="32" name="Text 30"/>
+          <p:cNvPr id="35" name="Text 33"/>
           <p:cNvSpPr/>
           <p:nvPr/>
         </p:nvSpPr>
@@ -15597,7 +15894,7 @@
                 <a:ea typeface="Trebuchet MS" pitchFamily="34" charset="-122"/>
                 <a:cs typeface="Trebuchet MS" pitchFamily="34" charset="-120"/>
               </a:rPr>
-              <a:t>phone</a:t>
+              <a:t>phones</a:t>
             </a:r>
             <a:endParaRPr lang="en-US" sz="1400" dirty="0"/>
           </a:p>
@@ -15605,7 +15902,7 @@
       </p:sp>
       <p:sp>
         <p:nvSpPr>
-          <p:cNvPr id="33" name="Shape 31"/>
+          <p:cNvPr id="36" name="Shape 34"/>
           <p:cNvSpPr/>
           <p:nvPr/>
         </p:nvSpPr>
@@ -15632,7 +15929,7 @@
       </p:sp>
       <p:sp>
         <p:nvSpPr>
-          <p:cNvPr id="34" name="Text 32"/>
+          <p:cNvPr id="37" name="Text 35"/>
           <p:cNvSpPr/>
           <p:nvPr/>
         </p:nvSpPr>
@@ -15671,18 +15968,18 @@
       </p:sp>
       <p:sp>
         <p:nvSpPr>
-          <p:cNvPr id="35" name="Shape 33"/>
+          <p:cNvPr id="38" name="Shape 36"/>
           <p:cNvSpPr/>
           <p:nvPr/>
         </p:nvSpPr>
         <p:spPr>
           <a:xfrm>
             <a:off x="1874520" y="4096512"/>
-            <a:ext cx="6903720" cy="804672"/>
+            <a:ext cx="6903720" cy="658368"/>
           </a:xfrm>
           <a:prstGeom prst="rect">
             <a:avLst>
-              <a:gd name="adj" fmla="val 6818"/>
+              <a:gd name="adj" fmla="val 8333"/>
             </a:avLst>
           </a:prstGeom>
           <a:solidFill>
@@ -15698,18 +15995,18 @@
       </p:sp>
       <p:sp>
         <p:nvSpPr>
-          <p:cNvPr id="36" name="Shape 34"/>
+          <p:cNvPr id="39" name="Shape 37"/>
           <p:cNvSpPr/>
           <p:nvPr/>
         </p:nvSpPr>
         <p:spPr>
           <a:xfrm>
             <a:off x="1951330" y="4169664"/>
-            <a:ext cx="676656" cy="384048"/>
+            <a:ext cx="676656" cy="475488"/>
           </a:xfrm>
           <a:prstGeom prst="rect">
             <a:avLst>
-              <a:gd name="adj" fmla="val 9524"/>
+              <a:gd name="adj" fmla="val 7692"/>
             </a:avLst>
           </a:prstGeom>
           <a:solidFill>
@@ -15725,14 +16022,14 @@
       </p:sp>
       <p:sp>
         <p:nvSpPr>
-          <p:cNvPr id="37" name="Text 35"/>
+          <p:cNvPr id="40" name="Text 38"/>
           <p:cNvSpPr/>
           <p:nvPr/>
         </p:nvSpPr>
         <p:spPr>
           <a:xfrm>
             <a:off x="1951330" y="4169664"/>
-            <a:ext cx="676656" cy="384048"/>
+            <a:ext cx="676656" cy="475488"/>
           </a:xfrm>
           <a:prstGeom prst="rect">
             <a:avLst/>
@@ -15764,18 +16061,18 @@
       </p:sp>
       <p:sp>
         <p:nvSpPr>
-          <p:cNvPr id="38" name="Shape 36"/>
+          <p:cNvPr id="41" name="Shape 39"/>
           <p:cNvSpPr/>
           <p:nvPr/>
         </p:nvSpPr>
         <p:spPr>
           <a:xfrm>
             <a:off x="2677363" y="4169664"/>
-            <a:ext cx="676656" cy="384048"/>
+            <a:ext cx="676656" cy="475488"/>
           </a:xfrm>
           <a:prstGeom prst="rect">
             <a:avLst>
-              <a:gd name="adj" fmla="val 9524"/>
+              <a:gd name="adj" fmla="val 7692"/>
             </a:avLst>
           </a:prstGeom>
           <a:solidFill>
@@ -15791,14 +16088,14 @@
       </p:sp>
       <p:sp>
         <p:nvSpPr>
-          <p:cNvPr id="39" name="Text 37"/>
+          <p:cNvPr id="42" name="Text 40"/>
           <p:cNvSpPr/>
           <p:nvPr/>
         </p:nvSpPr>
         <p:spPr>
           <a:xfrm>
             <a:off x="2677363" y="4169664"/>
-            <a:ext cx="676656" cy="384048"/>
+            <a:ext cx="676656" cy="475488"/>
           </a:xfrm>
           <a:prstGeom prst="rect">
             <a:avLst/>
@@ -15830,18 +16127,18 @@
       </p:sp>
       <p:sp>
         <p:nvSpPr>
-          <p:cNvPr id="40" name="Shape 38"/>
+          <p:cNvPr id="43" name="Shape 41"/>
           <p:cNvSpPr/>
           <p:nvPr/>
         </p:nvSpPr>
         <p:spPr>
           <a:xfrm>
             <a:off x="3403397" y="4169664"/>
-            <a:ext cx="676656" cy="384048"/>
+            <a:ext cx="676656" cy="475488"/>
           </a:xfrm>
           <a:prstGeom prst="rect">
             <a:avLst>
-              <a:gd name="adj" fmla="val 9524"/>
+              <a:gd name="adj" fmla="val 7692"/>
             </a:avLst>
           </a:prstGeom>
           <a:solidFill>
@@ -15857,14 +16154,14 @@
       </p:sp>
       <p:sp>
         <p:nvSpPr>
-          <p:cNvPr id="41" name="Text 39"/>
+          <p:cNvPr id="44" name="Text 42"/>
           <p:cNvSpPr/>
           <p:nvPr/>
         </p:nvSpPr>
         <p:spPr>
           <a:xfrm>
             <a:off x="3403397" y="4169664"/>
-            <a:ext cx="676656" cy="384048"/>
+            <a:ext cx="676656" cy="475488"/>
           </a:xfrm>
           <a:prstGeom prst="rect">
             <a:avLst/>
@@ -15896,57 +16193,18 @@
       </p:sp>
       <p:sp>
         <p:nvSpPr>
-          <p:cNvPr id="42" name="Text 40"/>
-          <p:cNvSpPr/>
-          <p:nvPr/>
-        </p:nvSpPr>
-        <p:spPr>
-          <a:xfrm>
-            <a:off x="3403397" y="4572000"/>
-            <a:ext cx="676656" cy="219456"/>
-          </a:xfrm>
-          <a:prstGeom prst="rect">
-            <a:avLst/>
-          </a:prstGeom>
-          <a:noFill/>
-          <a:ln/>
-        </p:spPr>
-        <p:txBody>
-          <a:bodyPr wrap="square" lIns="0" tIns="0" rIns="0" bIns="0" rtlCol="0" anchor="t"/>
-          <a:lstStyle/>
-          <a:p>
-            <a:pPr algn="ctr" indent="0" marL="0">
-              <a:buNone/>
-            </a:pPr>
-            <a:r>
-              <a:rPr lang="en-US" sz="750" i="1" dirty="0">
-                <a:solidFill>
-                  <a:srgbClr val="94A3B8"/>
-                </a:solidFill>
-                <a:latin typeface="Calibri" pitchFamily="34" charset="0"/>
-                <a:ea typeface="Calibri" pitchFamily="34" charset="-122"/>
-                <a:cs typeface="Calibri" pitchFamily="34" charset="-120"/>
-              </a:rPr>
-              <a:t>/k/</a:t>
-            </a:r>
-            <a:endParaRPr lang="en-US" sz="750" dirty="0"/>
-          </a:p>
-        </p:txBody>
-      </p:sp>
-      <p:sp>
-        <p:nvSpPr>
-          <p:cNvPr id="43" name="Shape 41"/>
+          <p:cNvPr id="45" name="Shape 43"/>
           <p:cNvSpPr/>
           <p:nvPr/>
         </p:nvSpPr>
         <p:spPr>
           <a:xfrm>
             <a:off x="4129430" y="4169664"/>
-            <a:ext cx="676656" cy="384048"/>
+            <a:ext cx="676656" cy="475488"/>
           </a:xfrm>
           <a:prstGeom prst="rect">
             <a:avLst>
-              <a:gd name="adj" fmla="val 9524"/>
+              <a:gd name="adj" fmla="val 7692"/>
             </a:avLst>
           </a:prstGeom>
           <a:solidFill>
@@ -15962,14 +16220,14 @@
       </p:sp>
       <p:sp>
         <p:nvSpPr>
-          <p:cNvPr id="44" name="Text 42"/>
+          <p:cNvPr id="46" name="Text 44"/>
           <p:cNvSpPr/>
           <p:nvPr/>
         </p:nvSpPr>
         <p:spPr>
           <a:xfrm>
             <a:off x="4129430" y="4169664"/>
-            <a:ext cx="676656" cy="384048"/>
+            <a:ext cx="676656" cy="475488"/>
           </a:xfrm>
           <a:prstGeom prst="rect">
             <a:avLst/>
@@ -16001,18 +16259,18 @@
       </p:sp>
       <p:sp>
         <p:nvSpPr>
-          <p:cNvPr id="45" name="Shape 43"/>
+          <p:cNvPr id="47" name="Shape 45"/>
           <p:cNvSpPr/>
           <p:nvPr/>
         </p:nvSpPr>
         <p:spPr>
           <a:xfrm>
             <a:off x="4855464" y="4169664"/>
-            <a:ext cx="676656" cy="384048"/>
+            <a:ext cx="676656" cy="475488"/>
           </a:xfrm>
           <a:prstGeom prst="rect">
             <a:avLst>
-              <a:gd name="adj" fmla="val 9524"/>
+              <a:gd name="adj" fmla="val 7692"/>
             </a:avLst>
           </a:prstGeom>
           <a:solidFill>
@@ -16028,14 +16286,14 @@
       </p:sp>
       <p:sp>
         <p:nvSpPr>
-          <p:cNvPr id="46" name="Text 44"/>
+          <p:cNvPr id="48" name="Text 46"/>
           <p:cNvSpPr/>
           <p:nvPr/>
         </p:nvSpPr>
         <p:spPr>
           <a:xfrm>
             <a:off x="4855464" y="4169664"/>
-            <a:ext cx="676656" cy="384048"/>
+            <a:ext cx="676656" cy="475488"/>
           </a:xfrm>
           <a:prstGeom prst="rect">
             <a:avLst/>
@@ -16067,18 +16325,18 @@
       </p:sp>
       <p:sp>
         <p:nvSpPr>
-          <p:cNvPr id="47" name="Shape 45"/>
+          <p:cNvPr id="49" name="Shape 47"/>
           <p:cNvSpPr/>
           <p:nvPr/>
         </p:nvSpPr>
         <p:spPr>
           <a:xfrm>
             <a:off x="5581498" y="4169664"/>
-            <a:ext cx="676656" cy="384048"/>
+            <a:ext cx="676656" cy="475488"/>
           </a:xfrm>
           <a:prstGeom prst="rect">
             <a:avLst>
-              <a:gd name="adj" fmla="val 9524"/>
+              <a:gd name="adj" fmla="val 7692"/>
             </a:avLst>
           </a:prstGeom>
           <a:solidFill>
@@ -16094,14 +16352,14 @@
       </p:sp>
       <p:sp>
         <p:nvSpPr>
-          <p:cNvPr id="48" name="Text 46"/>
+          <p:cNvPr id="50" name="Text 48"/>
           <p:cNvSpPr/>
           <p:nvPr/>
         </p:nvSpPr>
         <p:spPr>
           <a:xfrm>
             <a:off x="5581498" y="4169664"/>
-            <a:ext cx="676656" cy="384048"/>
+            <a:ext cx="676656" cy="475488"/>
           </a:xfrm>
           <a:prstGeom prst="rect">
             <a:avLst/>
@@ -16133,57 +16391,18 @@
       </p:sp>
       <p:sp>
         <p:nvSpPr>
-          <p:cNvPr id="49" name="Text 47"/>
-          <p:cNvSpPr/>
-          <p:nvPr/>
-        </p:nvSpPr>
-        <p:spPr>
-          <a:xfrm>
-            <a:off x="5581498" y="4572000"/>
-            <a:ext cx="676656" cy="219456"/>
-          </a:xfrm>
-          <a:prstGeom prst="rect">
-            <a:avLst/>
-          </a:prstGeom>
-          <a:noFill/>
-          <a:ln/>
-        </p:spPr>
-        <p:txBody>
-          <a:bodyPr wrap="square" lIns="0" tIns="0" rIns="0" bIns="0" rtlCol="0" anchor="t"/>
-          <a:lstStyle/>
-          <a:p>
-            <a:pPr algn="ctr" indent="0" marL="0">
-              <a:buNone/>
-            </a:pPr>
-            <a:r>
-              <a:rPr lang="en-US" sz="750" i="1" dirty="0">
-                <a:solidFill>
-                  <a:srgbClr val="94A3B8"/>
-                </a:solidFill>
-                <a:latin typeface="Calibri" pitchFamily="34" charset="0"/>
-                <a:ea typeface="Calibri" pitchFamily="34" charset="-122"/>
-                <a:cs typeface="Calibri" pitchFamily="34" charset="-120"/>
-              </a:rPr>
-              <a:t>/f/</a:t>
-            </a:r>
-            <a:endParaRPr lang="en-US" sz="750" dirty="0"/>
-          </a:p>
-        </p:txBody>
-      </p:sp>
-      <p:sp>
-        <p:nvSpPr>
-          <p:cNvPr id="50" name="Shape 48"/>
+          <p:cNvPr id="51" name="Shape 49"/>
           <p:cNvSpPr/>
           <p:nvPr/>
         </p:nvSpPr>
         <p:spPr>
           <a:xfrm>
             <a:off x="6307531" y="4169664"/>
-            <a:ext cx="676656" cy="384048"/>
+            <a:ext cx="676656" cy="475488"/>
           </a:xfrm>
           <a:prstGeom prst="rect">
             <a:avLst>
-              <a:gd name="adj" fmla="val 9524"/>
+              <a:gd name="adj" fmla="val 7692"/>
             </a:avLst>
           </a:prstGeom>
           <a:solidFill>
@@ -16199,14 +16418,14 @@
       </p:sp>
       <p:sp>
         <p:nvSpPr>
-          <p:cNvPr id="51" name="Text 49"/>
+          <p:cNvPr id="52" name="Text 50"/>
           <p:cNvSpPr/>
           <p:nvPr/>
         </p:nvSpPr>
         <p:spPr>
           <a:xfrm>
             <a:off x="6307531" y="4169664"/>
-            <a:ext cx="676656" cy="384048"/>
+            <a:ext cx="676656" cy="475488"/>
           </a:xfrm>
           <a:prstGeom prst="rect">
             <a:avLst/>
@@ -16230,7 +16449,7 @@
                 <a:ea typeface="Trebuchet MS" pitchFamily="34" charset="-122"/>
                 <a:cs typeface="Trebuchet MS" pitchFamily="34" charset="-120"/>
               </a:rPr>
-              <a:t>o</a:t>
+              <a:t>o_e</a:t>
             </a:r>
             <a:endParaRPr lang="en-US" sz="900" dirty="0"/>
           </a:p>
@@ -16238,18 +16457,18 @@
       </p:sp>
       <p:sp>
         <p:nvSpPr>
-          <p:cNvPr id="52" name="Shape 50"/>
+          <p:cNvPr id="53" name="Shape 51"/>
           <p:cNvSpPr/>
           <p:nvPr/>
         </p:nvSpPr>
         <p:spPr>
           <a:xfrm>
             <a:off x="7033565" y="4169664"/>
-            <a:ext cx="676656" cy="384048"/>
+            <a:ext cx="676656" cy="475488"/>
           </a:xfrm>
           <a:prstGeom prst="rect">
             <a:avLst>
-              <a:gd name="adj" fmla="val 9524"/>
+              <a:gd name="adj" fmla="val 7692"/>
             </a:avLst>
           </a:prstGeom>
           <a:solidFill>
@@ -16265,14 +16484,14 @@
       </p:sp>
       <p:sp>
         <p:nvSpPr>
-          <p:cNvPr id="53" name="Text 51"/>
+          <p:cNvPr id="54" name="Text 52"/>
           <p:cNvSpPr/>
           <p:nvPr/>
         </p:nvSpPr>
         <p:spPr>
           <a:xfrm>
             <a:off x="7033565" y="4169664"/>
-            <a:ext cx="676656" cy="384048"/>
+            <a:ext cx="676656" cy="475488"/>
           </a:xfrm>
           <a:prstGeom prst="rect">
             <a:avLst/>
@@ -16304,18 +16523,18 @@
       </p:sp>
       <p:sp>
         <p:nvSpPr>
-          <p:cNvPr id="54" name="Shape 52"/>
+          <p:cNvPr id="55" name="Shape 53"/>
           <p:cNvSpPr/>
           <p:nvPr/>
         </p:nvSpPr>
         <p:spPr>
           <a:xfrm>
             <a:off x="7759598" y="4169664"/>
-            <a:ext cx="676656" cy="384048"/>
+            <a:ext cx="676656" cy="475488"/>
           </a:xfrm>
           <a:prstGeom prst="rect">
             <a:avLst>
-              <a:gd name="adj" fmla="val 9524"/>
+              <a:gd name="adj" fmla="val 7692"/>
             </a:avLst>
           </a:prstGeom>
           <a:solidFill>
@@ -16331,14 +16550,14 @@
       </p:sp>
       <p:sp>
         <p:nvSpPr>
-          <p:cNvPr id="55" name="Text 53"/>
+          <p:cNvPr id="56" name="Text 54"/>
           <p:cNvSpPr/>
           <p:nvPr/>
         </p:nvSpPr>
         <p:spPr>
           <a:xfrm>
             <a:off x="7759598" y="4169664"/>
-            <a:ext cx="676656" cy="384048"/>
+            <a:ext cx="676656" cy="475488"/>
           </a:xfrm>
           <a:prstGeom prst="rect">
             <a:avLst/>
@@ -16362,7 +16581,7 @@
                 <a:ea typeface="Trebuchet MS" pitchFamily="34" charset="-122"/>
                 <a:cs typeface="Trebuchet MS" pitchFamily="34" charset="-120"/>
               </a:rPr>
-              <a:t>e</a:t>
+              <a:t>s</a:t>
             </a:r>
             <a:endParaRPr lang="en-US" sz="900" dirty="0"/>
           </a:p>
@@ -16936,7 +17155,7 @@
                 <a:ea typeface="Calibri" pitchFamily="34" charset="-122"/>
                 <a:cs typeface="Calibri" pitchFamily="34" charset="-120"/>
               </a:rPr>
-              <a:t>Word Labs  •  wordlabs.app  •  Root: 'phone' = sound, voice</a:t>
+              <a:t>Word Labs  •  wordlabs.app  •  Root: 'phone' = sound; a device for talking to someone</a:t>
             </a:r>
             <a:endParaRPr lang="en-US" sz="800" dirty="0"/>
           </a:p>
@@ -17576,7 +17795,7 @@
                 <a:ea typeface="Calibri" pitchFamily="34" charset="-122"/>
                 <a:cs typeface="Calibri" pitchFamily="34" charset="-120"/>
               </a:rPr>
-              <a:t>Word Labs  •  wordlabs.app  •  Root: 'phone' = sound, voice</a:t>
+              <a:t>Word Labs  •  wordlabs.app  •  Root: 'phone' = sound; a device for talking to someone</a:t>
             </a:r>
             <a:endParaRPr lang="en-US" sz="800" dirty="0"/>
           </a:p>
@@ -17688,7 +17907,7 @@
                 <a:ea typeface="Calibri" pitchFamily="34" charset="-122"/>
                 <a:cs typeface="Calibri" pitchFamily="34" charset="-120"/>
               </a:rPr>
-              <a:t>During the concert, the </a:t>
+              <a:t>In her linguistics degree, she studied the </a:t>
             </a:r>
             <a:pPr algn="l" indent="0" marL="0">
               <a:buNone/>
@@ -17705,7 +17924,7 @@
                 <a:ea typeface="Calibri" pitchFamily="34" charset="-122"/>
                 <a:cs typeface="Calibri" pitchFamily="34" charset="-120"/>
               </a:rPr>
-              <a:t>xylophone</a:t>
+              <a:t>phonology</a:t>
             </a:r>
             <a:pPr algn="l" indent="0" marL="0">
               <a:buNone/>
@@ -17719,7 +17938,7 @@
                 <a:ea typeface="Calibri" pitchFamily="34" charset="-122"/>
                 <a:cs typeface="Calibri" pitchFamily="34" charset="-120"/>
               </a:rPr>
-              <a:t> player used a </a:t>
+              <a:t> of French. The old recording was </a:t>
             </a:r>
             <a:pPr algn="l" indent="0" marL="0">
               <a:buNone/>
@@ -17736,7 +17955,7 @@
                 <a:ea typeface="Calibri" pitchFamily="34" charset="-122"/>
                 <a:cs typeface="Calibri" pitchFamily="34" charset="-120"/>
               </a:rPr>
-              <a:t>megaphone</a:t>
+              <a:t>monophonic</a:t>
             </a:r>
             <a:pPr algn="l" indent="0" marL="0">
               <a:buNone/>
@@ -17750,7 +17969,7 @@
                 <a:ea typeface="Calibri" pitchFamily="34" charset="-122"/>
                 <a:cs typeface="Calibri" pitchFamily="34" charset="-120"/>
               </a:rPr>
-              <a:t> to introduce herself, while everyone wore </a:t>
+              <a:t>, so it played from just one speaker. The choir sang a </a:t>
             </a:r>
             <a:pPr algn="l" indent="0" marL="0">
               <a:buNone/>
@@ -17767,7 +17986,7 @@
                 <a:ea typeface="Calibri" pitchFamily="34" charset="-122"/>
                 <a:cs typeface="Calibri" pitchFamily="34" charset="-120"/>
               </a:rPr>
-              <a:t>headphones</a:t>
+              <a:t>polyphonic</a:t>
             </a:r>
             <a:pPr algn="l" indent="0" marL="0">
               <a:buNone/>
@@ -17781,7 +18000,7 @@
                 <a:ea typeface="Calibri" pitchFamily="34" charset="-122"/>
                 <a:cs typeface="Calibri" pitchFamily="34" charset="-120"/>
               </a:rPr>
-              <a:t> to protect their ears.</a:t>
+              <a:t> piece with several melodies at once.</a:t>
             </a:r>
             <a:endParaRPr lang="en-US" sz="1800" dirty="0"/>
           </a:p>
@@ -17936,7 +18155,7 @@
                 <a:ea typeface="Trebuchet MS" pitchFamily="34" charset="-122"/>
                 <a:cs typeface="Trebuchet MS" pitchFamily="34" charset="-120"/>
               </a:rPr>
-              <a:t>xylophone</a:t>
+              <a:t>phonology</a:t>
             </a:r>
             <a:endParaRPr lang="en-US" sz="1400" dirty="0"/>
           </a:p>
@@ -18064,7 +18283,7 @@
                 <a:ea typeface="Trebuchet MS" pitchFamily="34" charset="-122"/>
                 <a:cs typeface="Trebuchet MS" pitchFamily="34" charset="-120"/>
               </a:rPr>
-              <a:t>megaphone</a:t>
+              <a:t>monophonic</a:t>
             </a:r>
             <a:endParaRPr lang="en-US" sz="1400" dirty="0"/>
           </a:p>
@@ -18192,7 +18411,7 @@
                 <a:ea typeface="Trebuchet MS" pitchFamily="34" charset="-122"/>
                 <a:cs typeface="Trebuchet MS" pitchFamily="34" charset="-120"/>
               </a:rPr>
-              <a:t>headphones</a:t>
+              <a:t>polyphonic</a:t>
             </a:r>
             <a:endParaRPr lang="en-US" sz="1400" dirty="0"/>
           </a:p>
@@ -18523,7 +18742,7 @@
                 <a:ea typeface="Calibri" pitchFamily="34" charset="-122"/>
                 <a:cs typeface="Calibri" pitchFamily="34" charset="-120"/>
               </a:rPr>
-              <a:t>Word Labs  •  wordlabs.app  •  Root: 'phone' = sound, voice</a:t>
+              <a:t>Word Labs  •  wordlabs.app  •  Root: 'phone' = sound; a device for talking to someone</a:t>
             </a:r>
             <a:endParaRPr lang="en-US" sz="800" dirty="0"/>
           </a:p>
@@ -18662,7 +18881,7 @@
                 <a:ea typeface="Trebuchet MS" pitchFamily="34" charset="-122"/>
                 <a:cs typeface="Trebuchet MS" pitchFamily="34" charset="-120"/>
               </a:rPr>
-              <a:t>xylophone</a:t>
+              <a:t>phonology</a:t>
             </a:r>
             <a:endParaRPr lang="en-US" sz="2800" dirty="0"/>
           </a:p>
@@ -19350,7 +19569,7 @@
                 <a:ea typeface="Calibri" pitchFamily="34" charset="-122"/>
                 <a:cs typeface="Calibri" pitchFamily="34" charset="-120"/>
               </a:rPr>
-              <a:t>Word Labs  •  wordlabs.app  •  Root: 'phone' = sound, voice</a:t>
+              <a:t>Word Labs  •  wordlabs.app  •  Root: 'phone' = sound; a device for talking to someone</a:t>
             </a:r>
             <a:endParaRPr lang="en-US" sz="800" dirty="0"/>
           </a:p>
@@ -19489,7 +19708,7 @@
                 <a:ea typeface="Trebuchet MS" pitchFamily="34" charset="-122"/>
                 <a:cs typeface="Trebuchet MS" pitchFamily="34" charset="-120"/>
               </a:rPr>
-              <a:t>xylophone</a:t>
+              <a:t>phonology</a:t>
             </a:r>
             <a:endParaRPr lang="en-US" sz="2800" dirty="0"/>
           </a:p>
@@ -19578,11 +19797,11 @@
             </a:avLst>
           </a:prstGeom>
           <a:solidFill>
-            <a:srgbClr val="DDD6FE"/>
+            <a:srgbClr val="CCFBF1"/>
           </a:solidFill>
           <a:ln w="19050">
             <a:solidFill>
-              <a:srgbClr val="7C3AED"/>
+              <a:srgbClr val="0D9488"/>
             </a:solidFill>
             <a:prstDash val="solid"/>
           </a:ln>
@@ -19622,13 +19841,13 @@
             <a:r>
               <a:rPr lang="en-US" sz="1300" b="1" dirty="0">
                 <a:solidFill>
-                  <a:srgbClr val="4C1D95"/>
+                  <a:srgbClr val="0F766E"/>
                 </a:solidFill>
                 <a:latin typeface="Trebuchet MS" pitchFamily="34" charset="0"/>
                 <a:ea typeface="Trebuchet MS" pitchFamily="34" charset="-122"/>
                 <a:cs typeface="Trebuchet MS" pitchFamily="34" charset="-120"/>
               </a:rPr>
-              <a:t>xylo</a:t>
+              <a:t>phone</a:t>
             </a:r>
             <a:endParaRPr lang="en-US" sz="1300" dirty="0"/>
           </a:p>
@@ -19667,7 +19886,7 @@
                 <a:ea typeface="Calibri" pitchFamily="34" charset="-122"/>
                 <a:cs typeface="Calibri" pitchFamily="34" charset="-120"/>
               </a:rPr>
-              <a:t>wood</a:t>
+              <a:t>sound; a device for talking to someone</a:t>
             </a:r>
             <a:endParaRPr lang="en-US" sz="850" dirty="0"/>
           </a:p>
@@ -19690,11 +19909,11 @@
             </a:avLst>
           </a:prstGeom>
           <a:solidFill>
-            <a:srgbClr val="CCFBF1"/>
+            <a:srgbClr val="FCE7F3"/>
           </a:solidFill>
           <a:ln w="19050">
             <a:solidFill>
-              <a:srgbClr val="0D9488"/>
+              <a:srgbClr val="DB2777"/>
             </a:solidFill>
             <a:prstDash val="solid"/>
           </a:ln>
@@ -19734,13 +19953,13 @@
             <a:r>
               <a:rPr lang="en-US" sz="1300" b="1" dirty="0">
                 <a:solidFill>
-                  <a:srgbClr val="0F766E"/>
+                  <a:srgbClr val="9D174D"/>
                 </a:solidFill>
                 <a:latin typeface="Trebuchet MS" pitchFamily="34" charset="0"/>
                 <a:ea typeface="Trebuchet MS" pitchFamily="34" charset="-122"/>
                 <a:cs typeface="Trebuchet MS" pitchFamily="34" charset="-120"/>
               </a:rPr>
-              <a:t>phone</a:t>
+              <a:t>ology</a:t>
             </a:r>
             <a:endParaRPr lang="en-US" sz="1300" dirty="0"/>
           </a:p>
@@ -19779,7 +19998,7 @@
                 <a:ea typeface="Calibri" pitchFamily="34" charset="-122"/>
                 <a:cs typeface="Calibri" pitchFamily="34" charset="-120"/>
               </a:rPr>
-              <a:t>sound, voice</a:t>
+              <a:t>study of</a:t>
             </a:r>
             <a:endParaRPr lang="en-US" sz="850" dirty="0"/>
           </a:p>
@@ -20335,7 +20554,7 @@
                 <a:ea typeface="Calibri" pitchFamily="34" charset="-122"/>
                 <a:cs typeface="Calibri" pitchFamily="34" charset="-120"/>
               </a:rPr>
-              <a:t>Word Labs  •  wordlabs.app  •  Root: 'phone' = sound, voice</a:t>
+              <a:t>Word Labs  •  wordlabs.app  •  Root: 'phone' = sound; a device for talking to someone</a:t>
             </a:r>
             <a:endParaRPr lang="en-US" sz="800" dirty="0"/>
           </a:p>
@@ -20474,7 +20693,7 @@
                 <a:ea typeface="Trebuchet MS" pitchFamily="34" charset="-122"/>
                 <a:cs typeface="Trebuchet MS" pitchFamily="34" charset="-120"/>
               </a:rPr>
-              <a:t>xylophone</a:t>
+              <a:t>phonology</a:t>
             </a:r>
             <a:endParaRPr lang="en-US" sz="2800" dirty="0"/>
           </a:p>
@@ -20563,11 +20782,11 @@
             </a:avLst>
           </a:prstGeom>
           <a:solidFill>
-            <a:srgbClr val="DDD6FE"/>
+            <a:srgbClr val="CCFBF1"/>
           </a:solidFill>
           <a:ln w="19050">
             <a:solidFill>
-              <a:srgbClr val="7C3AED"/>
+              <a:srgbClr val="0D9488"/>
             </a:solidFill>
             <a:prstDash val="solid"/>
           </a:ln>
@@ -20607,13 +20826,13 @@
             <a:r>
               <a:rPr lang="en-US" sz="1300" b="1" dirty="0">
                 <a:solidFill>
-                  <a:srgbClr val="4C1D95"/>
+                  <a:srgbClr val="0F766E"/>
                 </a:solidFill>
                 <a:latin typeface="Trebuchet MS" pitchFamily="34" charset="0"/>
                 <a:ea typeface="Trebuchet MS" pitchFamily="34" charset="-122"/>
                 <a:cs typeface="Trebuchet MS" pitchFamily="34" charset="-120"/>
               </a:rPr>
-              <a:t>xylo</a:t>
+              <a:t>phone</a:t>
             </a:r>
             <a:endParaRPr lang="en-US" sz="1300" dirty="0"/>
           </a:p>
@@ -20652,7 +20871,7 @@
                 <a:ea typeface="Calibri" pitchFamily="34" charset="-122"/>
                 <a:cs typeface="Calibri" pitchFamily="34" charset="-120"/>
               </a:rPr>
-              <a:t>wood</a:t>
+              <a:t>sound; a device for talking to someone</a:t>
             </a:r>
             <a:endParaRPr lang="en-US" sz="850" dirty="0"/>
           </a:p>
@@ -20675,11 +20894,11 @@
             </a:avLst>
           </a:prstGeom>
           <a:solidFill>
-            <a:srgbClr val="CCFBF1"/>
+            <a:srgbClr val="FCE7F3"/>
           </a:solidFill>
           <a:ln w="19050">
             <a:solidFill>
-              <a:srgbClr val="0D9488"/>
+              <a:srgbClr val="DB2777"/>
             </a:solidFill>
             <a:prstDash val="solid"/>
           </a:ln>
@@ -20719,13 +20938,13 @@
             <a:r>
               <a:rPr lang="en-US" sz="1300" b="1" dirty="0">
                 <a:solidFill>
-                  <a:srgbClr val="0F766E"/>
+                  <a:srgbClr val="9D174D"/>
                 </a:solidFill>
                 <a:latin typeface="Trebuchet MS" pitchFamily="34" charset="0"/>
                 <a:ea typeface="Trebuchet MS" pitchFamily="34" charset="-122"/>
                 <a:cs typeface="Trebuchet MS" pitchFamily="34" charset="-120"/>
               </a:rPr>
-              <a:t>phone</a:t>
+              <a:t>ology</a:t>
             </a:r>
             <a:endParaRPr lang="en-US" sz="1300" dirty="0"/>
           </a:p>
@@ -20764,7 +20983,7 @@
                 <a:ea typeface="Calibri" pitchFamily="34" charset="-122"/>
                 <a:cs typeface="Calibri" pitchFamily="34" charset="-120"/>
               </a:rPr>
-              <a:t>sound, voice</a:t>
+              <a:t>study of</a:t>
             </a:r>
             <a:endParaRPr lang="en-US" sz="850" dirty="0"/>
           </a:p>
@@ -20871,8 +21090,8 @@
         </p:nvSpPr>
         <p:spPr>
           <a:xfrm>
-            <a:off x="2313432" y="3364992"/>
-            <a:ext cx="1645920" cy="475488"/>
+            <a:off x="1975104" y="3364992"/>
+            <a:ext cx="1554480" cy="475488"/>
           </a:xfrm>
           <a:prstGeom prst="rect">
             <a:avLst>
@@ -20898,8 +21117,8 @@
         </p:nvSpPr>
         <p:spPr>
           <a:xfrm>
-            <a:off x="2313432" y="3364992"/>
-            <a:ext cx="1645920" cy="475488"/>
+            <a:off x="1975104" y="3364992"/>
+            <a:ext cx="1554480" cy="475488"/>
           </a:xfrm>
           <a:prstGeom prst="rect">
             <a:avLst/>
@@ -20923,7 +21142,7 @@
                 <a:ea typeface="Trebuchet MS" pitchFamily="34" charset="-122"/>
                 <a:cs typeface="Trebuchet MS" pitchFamily="34" charset="-120"/>
               </a:rPr>
-              <a:t>xy</a:t>
+              <a:t>pho</a:t>
             </a:r>
             <a:endParaRPr lang="en-US" sz="1400" dirty="0"/>
           </a:p>
@@ -20937,8 +21156,8 @@
         </p:nvSpPr>
         <p:spPr>
           <a:xfrm>
-            <a:off x="3959352" y="3364992"/>
-            <a:ext cx="411480" cy="475488"/>
+            <a:off x="3529584" y="3364992"/>
+            <a:ext cx="73152" cy="475488"/>
           </a:xfrm>
           <a:prstGeom prst="rect">
             <a:avLst/>
@@ -20976,8 +21195,8 @@
         </p:nvSpPr>
         <p:spPr>
           <a:xfrm>
-            <a:off x="4370832" y="3364992"/>
-            <a:ext cx="1645920" cy="475488"/>
+            <a:off x="3602736" y="3364992"/>
+            <a:ext cx="1554480" cy="475488"/>
           </a:xfrm>
           <a:prstGeom prst="rect">
             <a:avLst>
@@ -21003,8 +21222,8 @@
         </p:nvSpPr>
         <p:spPr>
           <a:xfrm>
-            <a:off x="4370832" y="3364992"/>
-            <a:ext cx="1645920" cy="475488"/>
+            <a:off x="3602736" y="3364992"/>
+            <a:ext cx="1554480" cy="475488"/>
           </a:xfrm>
           <a:prstGeom prst="rect">
             <a:avLst/>
@@ -21028,7 +21247,7 @@
                 <a:ea typeface="Trebuchet MS" pitchFamily="34" charset="-122"/>
                 <a:cs typeface="Trebuchet MS" pitchFamily="34" charset="-120"/>
               </a:rPr>
-              <a:t>lo</a:t>
+              <a:t>nol</a:t>
             </a:r>
             <a:endParaRPr lang="en-US" sz="1400" dirty="0"/>
           </a:p>
@@ -21042,8 +21261,8 @@
         </p:nvSpPr>
         <p:spPr>
           <a:xfrm>
-            <a:off x="6016752" y="3364992"/>
-            <a:ext cx="411480" cy="475488"/>
+            <a:off x="5157216" y="3364992"/>
+            <a:ext cx="73152" cy="475488"/>
           </a:xfrm>
           <a:prstGeom prst="rect">
             <a:avLst/>
@@ -21081,8 +21300,8 @@
         </p:nvSpPr>
         <p:spPr>
           <a:xfrm>
-            <a:off x="6428232" y="3364992"/>
-            <a:ext cx="1645920" cy="475488"/>
+            <a:off x="5230368" y="3364992"/>
+            <a:ext cx="1554480" cy="475488"/>
           </a:xfrm>
           <a:prstGeom prst="rect">
             <a:avLst>
@@ -21108,8 +21327,8 @@
         </p:nvSpPr>
         <p:spPr>
           <a:xfrm>
-            <a:off x="6428232" y="3364992"/>
-            <a:ext cx="1645920" cy="475488"/>
+            <a:off x="5230368" y="3364992"/>
+            <a:ext cx="1554480" cy="475488"/>
           </a:xfrm>
           <a:prstGeom prst="rect">
             <a:avLst/>
@@ -21133,7 +21352,7 @@
                 <a:ea typeface="Trebuchet MS" pitchFamily="34" charset="-122"/>
                 <a:cs typeface="Trebuchet MS" pitchFamily="34" charset="-120"/>
               </a:rPr>
-              <a:t>phone</a:t>
+              <a:t>o</a:t>
             </a:r>
             <a:endParaRPr lang="en-US" sz="1400" dirty="0"/>
           </a:p>
@@ -21141,7 +21360,112 @@
       </p:sp>
       <p:sp>
         <p:nvSpPr>
-          <p:cNvPr id="33" name="Shape 31"/>
+          <p:cNvPr id="33" name="Text 31"/>
+          <p:cNvSpPr/>
+          <p:nvPr/>
+        </p:nvSpPr>
+        <p:spPr>
+          <a:xfrm>
+            <a:off x="6784848" y="3364992"/>
+            <a:ext cx="73152" cy="475488"/>
+          </a:xfrm>
+          <a:prstGeom prst="rect">
+            <a:avLst/>
+          </a:prstGeom>
+          <a:noFill/>
+          <a:ln/>
+        </p:spPr>
+        <p:txBody>
+          <a:bodyPr wrap="square" lIns="0" tIns="0" rIns="0" bIns="0" rtlCol="0" anchor="ctr"/>
+          <a:lstStyle/>
+          <a:p>
+            <a:pPr algn="ctr" indent="0" marL="0">
+              <a:buNone/>
+            </a:pPr>
+            <a:r>
+              <a:rPr lang="en-US" sz="1600" b="1" dirty="0">
+                <a:solidFill>
+                  <a:srgbClr val="0D9488"/>
+                </a:solidFill>
+                <a:latin typeface="Trebuchet MS" pitchFamily="34" charset="0"/>
+                <a:ea typeface="Trebuchet MS" pitchFamily="34" charset="-122"/>
+                <a:cs typeface="Trebuchet MS" pitchFamily="34" charset="-120"/>
+              </a:rPr>
+              <a:t>·</a:t>
+            </a:r>
+            <a:endParaRPr lang="en-US" sz="1600" dirty="0"/>
+          </a:p>
+        </p:txBody>
+      </p:sp>
+      <p:sp>
+        <p:nvSpPr>
+          <p:cNvPr id="34" name="Shape 32"/>
+          <p:cNvSpPr/>
+          <p:nvPr/>
+        </p:nvSpPr>
+        <p:spPr>
+          <a:xfrm>
+            <a:off x="6858000" y="3364992"/>
+            <a:ext cx="1554480" cy="475488"/>
+          </a:xfrm>
+          <a:prstGeom prst="rect">
+            <a:avLst>
+              <a:gd name="adj" fmla="val 9615"/>
+            </a:avLst>
+          </a:prstGeom>
+          <a:solidFill>
+            <a:srgbClr val="FFFFFF"/>
+          </a:solidFill>
+          <a:ln w="12700">
+            <a:solidFill>
+              <a:srgbClr val="0D9488"/>
+            </a:solidFill>
+            <a:prstDash val="solid"/>
+          </a:ln>
+        </p:spPr>
+      </p:sp>
+      <p:sp>
+        <p:nvSpPr>
+          <p:cNvPr id="35" name="Text 33"/>
+          <p:cNvSpPr/>
+          <p:nvPr/>
+        </p:nvSpPr>
+        <p:spPr>
+          <a:xfrm>
+            <a:off x="6858000" y="3364992"/>
+            <a:ext cx="1554480" cy="475488"/>
+          </a:xfrm>
+          <a:prstGeom prst="rect">
+            <a:avLst/>
+          </a:prstGeom>
+          <a:noFill/>
+          <a:ln/>
+        </p:spPr>
+        <p:txBody>
+          <a:bodyPr wrap="square" lIns="0" tIns="0" rIns="0" bIns="0" rtlCol="0" anchor="ctr"/>
+          <a:lstStyle/>
+          <a:p>
+            <a:pPr algn="ctr" indent="0" marL="0">
+              <a:buNone/>
+            </a:pPr>
+            <a:r>
+              <a:rPr lang="en-US" sz="1400" b="1" dirty="0">
+                <a:solidFill>
+                  <a:srgbClr val="0D9488"/>
+                </a:solidFill>
+                <a:latin typeface="Trebuchet MS" pitchFamily="34" charset="0"/>
+                <a:ea typeface="Trebuchet MS" pitchFamily="34" charset="-122"/>
+                <a:cs typeface="Trebuchet MS" pitchFamily="34" charset="-120"/>
+              </a:rPr>
+              <a:t>gy</a:t>
+            </a:r>
+            <a:endParaRPr lang="en-US" sz="1400" dirty="0"/>
+          </a:p>
+        </p:txBody>
+      </p:sp>
+      <p:sp>
+        <p:nvSpPr>
+          <p:cNvPr id="36" name="Shape 34"/>
           <p:cNvSpPr/>
           <p:nvPr/>
         </p:nvSpPr>
@@ -21168,7 +21492,7 @@
       </p:sp>
       <p:sp>
         <p:nvSpPr>
-          <p:cNvPr id="34" name="Text 32"/>
+          <p:cNvPr id="37" name="Text 35"/>
           <p:cNvSpPr/>
           <p:nvPr/>
         </p:nvSpPr>
@@ -21207,7 +21531,7 @@
       </p:sp>
       <p:sp>
         <p:nvSpPr>
-          <p:cNvPr id="35" name="Shape 33"/>
+          <p:cNvPr id="38" name="Shape 36"/>
           <p:cNvSpPr/>
           <p:nvPr/>
         </p:nvSpPr>
@@ -21234,7 +21558,7 @@
       </p:sp>
       <p:sp>
         <p:nvSpPr>
-          <p:cNvPr id="36" name="Text 34"/>
+          <p:cNvPr id="39" name="Text 37"/>
           <p:cNvSpPr/>
           <p:nvPr/>
         </p:nvSpPr>
@@ -21557,7 +21881,7 @@
                 <a:ea typeface="Calibri" pitchFamily="34" charset="-122"/>
                 <a:cs typeface="Calibri" pitchFamily="34" charset="-120"/>
               </a:rPr>
-              <a:t>Word Labs  •  wordlabs.app  •  Root: 'phone' = sound, voice</a:t>
+              <a:t>Word Labs  •  wordlabs.app  •  Root: 'phone' = sound; a device for talking to someone</a:t>
             </a:r>
             <a:endParaRPr lang="en-US" sz="800" dirty="0"/>
           </a:p>
@@ -21696,7 +22020,7 @@
                 <a:ea typeface="Trebuchet MS" pitchFamily="34" charset="-122"/>
                 <a:cs typeface="Trebuchet MS" pitchFamily="34" charset="-120"/>
               </a:rPr>
-              <a:t>xylophone</a:t>
+              <a:t>phonology</a:t>
             </a:r>
             <a:endParaRPr lang="en-US" sz="2800" dirty="0"/>
           </a:p>
@@ -21785,11 +22109,11 @@
             </a:avLst>
           </a:prstGeom>
           <a:solidFill>
-            <a:srgbClr val="DDD6FE"/>
+            <a:srgbClr val="CCFBF1"/>
           </a:solidFill>
           <a:ln w="19050">
             <a:solidFill>
-              <a:srgbClr val="7C3AED"/>
+              <a:srgbClr val="0D9488"/>
             </a:solidFill>
             <a:prstDash val="solid"/>
           </a:ln>
@@ -21829,13 +22153,13 @@
             <a:r>
               <a:rPr lang="en-US" sz="1300" b="1" dirty="0">
                 <a:solidFill>
-                  <a:srgbClr val="4C1D95"/>
+                  <a:srgbClr val="0F766E"/>
                 </a:solidFill>
                 <a:latin typeface="Trebuchet MS" pitchFamily="34" charset="0"/>
                 <a:ea typeface="Trebuchet MS" pitchFamily="34" charset="-122"/>
                 <a:cs typeface="Trebuchet MS" pitchFamily="34" charset="-120"/>
               </a:rPr>
-              <a:t>xylo</a:t>
+              <a:t>phone</a:t>
             </a:r>
             <a:endParaRPr lang="en-US" sz="1300" dirty="0"/>
           </a:p>
@@ -21874,7 +22198,7 @@
                 <a:ea typeface="Calibri" pitchFamily="34" charset="-122"/>
                 <a:cs typeface="Calibri" pitchFamily="34" charset="-120"/>
               </a:rPr>
-              <a:t>wood</a:t>
+              <a:t>sound; a device for talking to someone</a:t>
             </a:r>
             <a:endParaRPr lang="en-US" sz="850" dirty="0"/>
           </a:p>
@@ -21897,11 +22221,11 @@
             </a:avLst>
           </a:prstGeom>
           <a:solidFill>
-            <a:srgbClr val="CCFBF1"/>
+            <a:srgbClr val="FCE7F3"/>
           </a:solidFill>
           <a:ln w="19050">
             <a:solidFill>
-              <a:srgbClr val="0D9488"/>
+              <a:srgbClr val="DB2777"/>
             </a:solidFill>
             <a:prstDash val="solid"/>
           </a:ln>
@@ -21941,13 +22265,13 @@
             <a:r>
               <a:rPr lang="en-US" sz="1300" b="1" dirty="0">
                 <a:solidFill>
-                  <a:srgbClr val="0F766E"/>
+                  <a:srgbClr val="9D174D"/>
                 </a:solidFill>
                 <a:latin typeface="Trebuchet MS" pitchFamily="34" charset="0"/>
                 <a:ea typeface="Trebuchet MS" pitchFamily="34" charset="-122"/>
                 <a:cs typeface="Trebuchet MS" pitchFamily="34" charset="-120"/>
               </a:rPr>
-              <a:t>phone</a:t>
+              <a:t>ology</a:t>
             </a:r>
             <a:endParaRPr lang="en-US" sz="1300" dirty="0"/>
           </a:p>
@@ -21986,7 +22310,7 @@
                 <a:ea typeface="Calibri" pitchFamily="34" charset="-122"/>
                 <a:cs typeface="Calibri" pitchFamily="34" charset="-120"/>
               </a:rPr>
-              <a:t>sound, voice</a:t>
+              <a:t>study of</a:t>
             </a:r>
             <a:endParaRPr lang="en-US" sz="850" dirty="0"/>
           </a:p>
@@ -22093,8 +22417,8 @@
         </p:nvSpPr>
         <p:spPr>
           <a:xfrm>
-            <a:off x="2313432" y="3364992"/>
-            <a:ext cx="1645920" cy="475488"/>
+            <a:off x="1975104" y="3364992"/>
+            <a:ext cx="1554480" cy="475488"/>
           </a:xfrm>
           <a:prstGeom prst="rect">
             <a:avLst>
@@ -22120,8 +22444,8 @@
         </p:nvSpPr>
         <p:spPr>
           <a:xfrm>
-            <a:off x="2313432" y="3364992"/>
-            <a:ext cx="1645920" cy="475488"/>
+            <a:off x="1975104" y="3364992"/>
+            <a:ext cx="1554480" cy="475488"/>
           </a:xfrm>
           <a:prstGeom prst="rect">
             <a:avLst/>
@@ -22145,7 +22469,7 @@
                 <a:ea typeface="Trebuchet MS" pitchFamily="34" charset="-122"/>
                 <a:cs typeface="Trebuchet MS" pitchFamily="34" charset="-120"/>
               </a:rPr>
-              <a:t>xy</a:t>
+              <a:t>pho</a:t>
             </a:r>
             <a:endParaRPr lang="en-US" sz="1400" dirty="0"/>
           </a:p>
@@ -22159,8 +22483,8 @@
         </p:nvSpPr>
         <p:spPr>
           <a:xfrm>
-            <a:off x="3959352" y="3364992"/>
-            <a:ext cx="411480" cy="475488"/>
+            <a:off x="3529584" y="3364992"/>
+            <a:ext cx="73152" cy="475488"/>
           </a:xfrm>
           <a:prstGeom prst="rect">
             <a:avLst/>
@@ -22198,8 +22522,8 @@
         </p:nvSpPr>
         <p:spPr>
           <a:xfrm>
-            <a:off x="4370832" y="3364992"/>
-            <a:ext cx="1645920" cy="475488"/>
+            <a:off x="3602736" y="3364992"/>
+            <a:ext cx="1554480" cy="475488"/>
           </a:xfrm>
           <a:prstGeom prst="rect">
             <a:avLst>
@@ -22225,8 +22549,8 @@
         </p:nvSpPr>
         <p:spPr>
           <a:xfrm>
-            <a:off x="4370832" y="3364992"/>
-            <a:ext cx="1645920" cy="475488"/>
+            <a:off x="3602736" y="3364992"/>
+            <a:ext cx="1554480" cy="475488"/>
           </a:xfrm>
           <a:prstGeom prst="rect">
             <a:avLst/>
@@ -22250,7 +22574,7 @@
                 <a:ea typeface="Trebuchet MS" pitchFamily="34" charset="-122"/>
                 <a:cs typeface="Trebuchet MS" pitchFamily="34" charset="-120"/>
               </a:rPr>
-              <a:t>lo</a:t>
+              <a:t>nol</a:t>
             </a:r>
             <a:endParaRPr lang="en-US" sz="1400" dirty="0"/>
           </a:p>
@@ -22264,8 +22588,8 @@
         </p:nvSpPr>
         <p:spPr>
           <a:xfrm>
-            <a:off x="6016752" y="3364992"/>
-            <a:ext cx="411480" cy="475488"/>
+            <a:off x="5157216" y="3364992"/>
+            <a:ext cx="73152" cy="475488"/>
           </a:xfrm>
           <a:prstGeom prst="rect">
             <a:avLst/>
@@ -22303,8 +22627,8 @@
         </p:nvSpPr>
         <p:spPr>
           <a:xfrm>
-            <a:off x="6428232" y="3364992"/>
-            <a:ext cx="1645920" cy="475488"/>
+            <a:off x="5230368" y="3364992"/>
+            <a:ext cx="1554480" cy="475488"/>
           </a:xfrm>
           <a:prstGeom prst="rect">
             <a:avLst>
@@ -22330,8 +22654,8 @@
         </p:nvSpPr>
         <p:spPr>
           <a:xfrm>
-            <a:off x="6428232" y="3364992"/>
-            <a:ext cx="1645920" cy="475488"/>
+            <a:off x="5230368" y="3364992"/>
+            <a:ext cx="1554480" cy="475488"/>
           </a:xfrm>
           <a:prstGeom prst="rect">
             <a:avLst/>
@@ -22355,7 +22679,7 @@
                 <a:ea typeface="Trebuchet MS" pitchFamily="34" charset="-122"/>
                 <a:cs typeface="Trebuchet MS" pitchFamily="34" charset="-120"/>
               </a:rPr>
-              <a:t>phone</a:t>
+              <a:t>o</a:t>
             </a:r>
             <a:endParaRPr lang="en-US" sz="1400" dirty="0"/>
           </a:p>
@@ -22363,7 +22687,112 @@
       </p:sp>
       <p:sp>
         <p:nvSpPr>
-          <p:cNvPr id="33" name="Shape 31"/>
+          <p:cNvPr id="33" name="Text 31"/>
+          <p:cNvSpPr/>
+          <p:nvPr/>
+        </p:nvSpPr>
+        <p:spPr>
+          <a:xfrm>
+            <a:off x="6784848" y="3364992"/>
+            <a:ext cx="73152" cy="475488"/>
+          </a:xfrm>
+          <a:prstGeom prst="rect">
+            <a:avLst/>
+          </a:prstGeom>
+          <a:noFill/>
+          <a:ln/>
+        </p:spPr>
+        <p:txBody>
+          <a:bodyPr wrap="square" lIns="0" tIns="0" rIns="0" bIns="0" rtlCol="0" anchor="ctr"/>
+          <a:lstStyle/>
+          <a:p>
+            <a:pPr algn="ctr" indent="0" marL="0">
+              <a:buNone/>
+            </a:pPr>
+            <a:r>
+              <a:rPr lang="en-US" sz="1600" b="1" dirty="0">
+                <a:solidFill>
+                  <a:srgbClr val="0D9488"/>
+                </a:solidFill>
+                <a:latin typeface="Trebuchet MS" pitchFamily="34" charset="0"/>
+                <a:ea typeface="Trebuchet MS" pitchFamily="34" charset="-122"/>
+                <a:cs typeface="Trebuchet MS" pitchFamily="34" charset="-120"/>
+              </a:rPr>
+              <a:t>·</a:t>
+            </a:r>
+            <a:endParaRPr lang="en-US" sz="1600" dirty="0"/>
+          </a:p>
+        </p:txBody>
+      </p:sp>
+      <p:sp>
+        <p:nvSpPr>
+          <p:cNvPr id="34" name="Shape 32"/>
+          <p:cNvSpPr/>
+          <p:nvPr/>
+        </p:nvSpPr>
+        <p:spPr>
+          <a:xfrm>
+            <a:off x="6858000" y="3364992"/>
+            <a:ext cx="1554480" cy="475488"/>
+          </a:xfrm>
+          <a:prstGeom prst="rect">
+            <a:avLst>
+              <a:gd name="adj" fmla="val 9615"/>
+            </a:avLst>
+          </a:prstGeom>
+          <a:solidFill>
+            <a:srgbClr val="FFFFFF"/>
+          </a:solidFill>
+          <a:ln w="12700">
+            <a:solidFill>
+              <a:srgbClr val="0D9488"/>
+            </a:solidFill>
+            <a:prstDash val="solid"/>
+          </a:ln>
+        </p:spPr>
+      </p:sp>
+      <p:sp>
+        <p:nvSpPr>
+          <p:cNvPr id="35" name="Text 33"/>
+          <p:cNvSpPr/>
+          <p:nvPr/>
+        </p:nvSpPr>
+        <p:spPr>
+          <a:xfrm>
+            <a:off x="6858000" y="3364992"/>
+            <a:ext cx="1554480" cy="475488"/>
+          </a:xfrm>
+          <a:prstGeom prst="rect">
+            <a:avLst/>
+          </a:prstGeom>
+          <a:noFill/>
+          <a:ln/>
+        </p:spPr>
+        <p:txBody>
+          <a:bodyPr wrap="square" lIns="0" tIns="0" rIns="0" bIns="0" rtlCol="0" anchor="ctr"/>
+          <a:lstStyle/>
+          <a:p>
+            <a:pPr algn="ctr" indent="0" marL="0">
+              <a:buNone/>
+            </a:pPr>
+            <a:r>
+              <a:rPr lang="en-US" sz="1400" b="1" dirty="0">
+                <a:solidFill>
+                  <a:srgbClr val="0D9488"/>
+                </a:solidFill>
+                <a:latin typeface="Trebuchet MS" pitchFamily="34" charset="0"/>
+                <a:ea typeface="Trebuchet MS" pitchFamily="34" charset="-122"/>
+                <a:cs typeface="Trebuchet MS" pitchFamily="34" charset="-120"/>
+              </a:rPr>
+              <a:t>gy</a:t>
+            </a:r>
+            <a:endParaRPr lang="en-US" sz="1400" dirty="0"/>
+          </a:p>
+        </p:txBody>
+      </p:sp>
+      <p:sp>
+        <p:nvSpPr>
+          <p:cNvPr id="36" name="Shape 34"/>
           <p:cNvSpPr/>
           <p:nvPr/>
         </p:nvSpPr>
@@ -22390,7 +22819,7 @@
       </p:sp>
       <p:sp>
         <p:nvSpPr>
-          <p:cNvPr id="34" name="Text 32"/>
+          <p:cNvPr id="37" name="Text 35"/>
           <p:cNvSpPr/>
           <p:nvPr/>
         </p:nvSpPr>
@@ -22429,18 +22858,18 @@
       </p:sp>
       <p:sp>
         <p:nvSpPr>
-          <p:cNvPr id="35" name="Shape 33"/>
+          <p:cNvPr id="38" name="Shape 36"/>
           <p:cNvSpPr/>
           <p:nvPr/>
         </p:nvSpPr>
         <p:spPr>
           <a:xfrm>
             <a:off x="1874520" y="4096512"/>
-            <a:ext cx="6903720" cy="804672"/>
+            <a:ext cx="6903720" cy="658368"/>
           </a:xfrm>
           <a:prstGeom prst="rect">
             <a:avLst>
-              <a:gd name="adj" fmla="val 6818"/>
+              <a:gd name="adj" fmla="val 8333"/>
             </a:avLst>
           </a:prstGeom>
           <a:solidFill>
@@ -22456,18 +22885,18 @@
       </p:sp>
       <p:sp>
         <p:nvSpPr>
-          <p:cNvPr id="36" name="Shape 34"/>
-          <p:cNvSpPr/>
-          <p:nvPr/>
-        </p:nvSpPr>
-        <p:spPr>
-          <a:xfrm>
-            <a:off x="2023872" y="4169664"/>
-            <a:ext cx="685800" cy="384048"/>
+          <p:cNvPr id="39" name="Shape 37"/>
+          <p:cNvSpPr/>
+          <p:nvPr/>
+        </p:nvSpPr>
+        <p:spPr>
+          <a:xfrm>
+            <a:off x="2124837" y="4169664"/>
+            <a:ext cx="685800" cy="475488"/>
           </a:xfrm>
           <a:prstGeom prst="rect">
             <a:avLst>
-              <a:gd name="adj" fmla="val 9524"/>
+              <a:gd name="adj" fmla="val 7692"/>
             </a:avLst>
           </a:prstGeom>
           <a:solidFill>
@@ -22483,14 +22912,14 @@
       </p:sp>
       <p:sp>
         <p:nvSpPr>
-          <p:cNvPr id="37" name="Text 35"/>
-          <p:cNvSpPr/>
-          <p:nvPr/>
-        </p:nvSpPr>
-        <p:spPr>
-          <a:xfrm>
-            <a:off x="2023872" y="4169664"/>
-            <a:ext cx="685800" cy="384048"/>
+          <p:cNvPr id="40" name="Text 38"/>
+          <p:cNvSpPr/>
+          <p:nvPr/>
+        </p:nvSpPr>
+        <p:spPr>
+          <a:xfrm>
+            <a:off x="2124837" y="4169664"/>
+            <a:ext cx="685800" cy="475488"/>
           </a:xfrm>
           <a:prstGeom prst="rect">
             <a:avLst/>
@@ -22514,7 +22943,7 @@
                 <a:ea typeface="Trebuchet MS" pitchFamily="34" charset="-122"/>
                 <a:cs typeface="Trebuchet MS" pitchFamily="34" charset="-120"/>
               </a:rPr>
-              <a:t>x</a:t>
+              <a:t>ph</a:t>
             </a:r>
             <a:endParaRPr lang="en-US" sz="900" dirty="0"/>
           </a:p>
@@ -22522,57 +22951,18 @@
       </p:sp>
       <p:sp>
         <p:nvSpPr>
-          <p:cNvPr id="38" name="Text 36"/>
-          <p:cNvSpPr/>
-          <p:nvPr/>
-        </p:nvSpPr>
-        <p:spPr>
-          <a:xfrm>
-            <a:off x="2023872" y="4572000"/>
-            <a:ext cx="685800" cy="219456"/>
-          </a:xfrm>
-          <a:prstGeom prst="rect">
-            <a:avLst/>
-          </a:prstGeom>
-          <a:noFill/>
-          <a:ln/>
-        </p:spPr>
-        <p:txBody>
-          <a:bodyPr wrap="square" lIns="0" tIns="0" rIns="0" bIns="0" rtlCol="0" anchor="t"/>
-          <a:lstStyle/>
-          <a:p>
-            <a:pPr algn="ctr" indent="0" marL="0">
-              <a:buNone/>
-            </a:pPr>
-            <a:r>
-              <a:rPr lang="en-US" sz="750" i="1" dirty="0">
-                <a:solidFill>
-                  <a:srgbClr val="94A3B8"/>
-                </a:solidFill>
-                <a:latin typeface="Calibri" pitchFamily="34" charset="0"/>
-                <a:ea typeface="Calibri" pitchFamily="34" charset="-122"/>
-                <a:cs typeface="Calibri" pitchFamily="34" charset="-120"/>
-              </a:rPr>
-              <a:t>/z/</a:t>
-            </a:r>
-            <a:endParaRPr lang="en-US" sz="750" dirty="0"/>
-          </a:p>
-        </p:txBody>
-      </p:sp>
-      <p:sp>
-        <p:nvSpPr>
-          <p:cNvPr id="39" name="Shape 37"/>
-          <p:cNvSpPr/>
-          <p:nvPr/>
-        </p:nvSpPr>
-        <p:spPr>
-          <a:xfrm>
-            <a:off x="2831592" y="4169664"/>
-            <a:ext cx="685800" cy="384048"/>
+          <p:cNvPr id="41" name="Shape 39"/>
+          <p:cNvSpPr/>
+          <p:nvPr/>
+        </p:nvSpPr>
+        <p:spPr>
+          <a:xfrm>
+            <a:off x="3033522" y="4169664"/>
+            <a:ext cx="685800" cy="475488"/>
           </a:xfrm>
           <a:prstGeom prst="rect">
             <a:avLst>
-              <a:gd name="adj" fmla="val 9524"/>
+              <a:gd name="adj" fmla="val 7692"/>
             </a:avLst>
           </a:prstGeom>
           <a:solidFill>
@@ -22588,14 +22978,14 @@
       </p:sp>
       <p:sp>
         <p:nvSpPr>
-          <p:cNvPr id="40" name="Text 38"/>
-          <p:cNvSpPr/>
-          <p:nvPr/>
-        </p:nvSpPr>
-        <p:spPr>
-          <a:xfrm>
-            <a:off x="2831592" y="4169664"/>
-            <a:ext cx="685800" cy="384048"/>
+          <p:cNvPr id="42" name="Text 40"/>
+          <p:cNvSpPr/>
+          <p:nvPr/>
+        </p:nvSpPr>
+        <p:spPr>
+          <a:xfrm>
+            <a:off x="3033522" y="4169664"/>
+            <a:ext cx="685800" cy="475488"/>
           </a:xfrm>
           <a:prstGeom prst="rect">
             <a:avLst/>
@@ -22619,7 +23009,7 @@
                 <a:ea typeface="Trebuchet MS" pitchFamily="34" charset="-122"/>
                 <a:cs typeface="Trebuchet MS" pitchFamily="34" charset="-120"/>
               </a:rPr>
-              <a:t>y</a:t>
+              <a:t>o</a:t>
             </a:r>
             <a:endParaRPr lang="en-US" sz="900" dirty="0"/>
           </a:p>
@@ -22627,18 +23017,18 @@
       </p:sp>
       <p:sp>
         <p:nvSpPr>
-          <p:cNvPr id="41" name="Shape 39"/>
-          <p:cNvSpPr/>
-          <p:nvPr/>
-        </p:nvSpPr>
-        <p:spPr>
-          <a:xfrm>
-            <a:off x="3639312" y="4169664"/>
-            <a:ext cx="685800" cy="384048"/>
+          <p:cNvPr id="43" name="Shape 41"/>
+          <p:cNvSpPr/>
+          <p:nvPr/>
+        </p:nvSpPr>
+        <p:spPr>
+          <a:xfrm>
+            <a:off x="3942207" y="4169664"/>
+            <a:ext cx="685800" cy="475488"/>
           </a:xfrm>
           <a:prstGeom prst="rect">
             <a:avLst>
-              <a:gd name="adj" fmla="val 9524"/>
+              <a:gd name="adj" fmla="val 7692"/>
             </a:avLst>
           </a:prstGeom>
           <a:solidFill>
@@ -22654,14 +23044,14 @@
       </p:sp>
       <p:sp>
         <p:nvSpPr>
-          <p:cNvPr id="42" name="Text 40"/>
-          <p:cNvSpPr/>
-          <p:nvPr/>
-        </p:nvSpPr>
-        <p:spPr>
-          <a:xfrm>
-            <a:off x="3639312" y="4169664"/>
-            <a:ext cx="685800" cy="384048"/>
+          <p:cNvPr id="44" name="Text 42"/>
+          <p:cNvSpPr/>
+          <p:nvPr/>
+        </p:nvSpPr>
+        <p:spPr>
+          <a:xfrm>
+            <a:off x="3942207" y="4169664"/>
+            <a:ext cx="685800" cy="475488"/>
           </a:xfrm>
           <a:prstGeom prst="rect">
             <a:avLst/>
@@ -22685,7 +23075,7 @@
                 <a:ea typeface="Trebuchet MS" pitchFamily="34" charset="-122"/>
                 <a:cs typeface="Trebuchet MS" pitchFamily="34" charset="-120"/>
               </a:rPr>
-              <a:t>l</a:t>
+              <a:t>n</a:t>
             </a:r>
             <a:endParaRPr lang="en-US" sz="900" dirty="0"/>
           </a:p>
@@ -22693,18 +23083,18 @@
       </p:sp>
       <p:sp>
         <p:nvSpPr>
-          <p:cNvPr id="43" name="Shape 41"/>
-          <p:cNvSpPr/>
-          <p:nvPr/>
-        </p:nvSpPr>
-        <p:spPr>
-          <a:xfrm>
-            <a:off x="4447032" y="4169664"/>
-            <a:ext cx="685800" cy="384048"/>
+          <p:cNvPr id="45" name="Shape 43"/>
+          <p:cNvSpPr/>
+          <p:nvPr/>
+        </p:nvSpPr>
+        <p:spPr>
+          <a:xfrm>
+            <a:off x="4850892" y="4169664"/>
+            <a:ext cx="685800" cy="475488"/>
           </a:xfrm>
           <a:prstGeom prst="rect">
             <a:avLst>
-              <a:gd name="adj" fmla="val 9524"/>
+              <a:gd name="adj" fmla="val 7692"/>
             </a:avLst>
           </a:prstGeom>
           <a:solidFill>
@@ -22720,14 +23110,14 @@
       </p:sp>
       <p:sp>
         <p:nvSpPr>
-          <p:cNvPr id="44" name="Text 42"/>
-          <p:cNvSpPr/>
-          <p:nvPr/>
-        </p:nvSpPr>
-        <p:spPr>
-          <a:xfrm>
-            <a:off x="4447032" y="4169664"/>
-            <a:ext cx="685800" cy="384048"/>
+          <p:cNvPr id="46" name="Text 44"/>
+          <p:cNvSpPr/>
+          <p:nvPr/>
+        </p:nvSpPr>
+        <p:spPr>
+          <a:xfrm>
+            <a:off x="4850892" y="4169664"/>
+            <a:ext cx="685800" cy="475488"/>
           </a:xfrm>
           <a:prstGeom prst="rect">
             <a:avLst/>
@@ -22759,18 +23149,18 @@
       </p:sp>
       <p:sp>
         <p:nvSpPr>
-          <p:cNvPr id="45" name="Shape 43"/>
-          <p:cNvSpPr/>
-          <p:nvPr/>
-        </p:nvSpPr>
-        <p:spPr>
-          <a:xfrm>
-            <a:off x="5254752" y="4169664"/>
-            <a:ext cx="685800" cy="384048"/>
+          <p:cNvPr id="47" name="Shape 45"/>
+          <p:cNvSpPr/>
+          <p:nvPr/>
+        </p:nvSpPr>
+        <p:spPr>
+          <a:xfrm>
+            <a:off x="5759577" y="4169664"/>
+            <a:ext cx="685800" cy="475488"/>
           </a:xfrm>
           <a:prstGeom prst="rect">
             <a:avLst>
-              <a:gd name="adj" fmla="val 9524"/>
+              <a:gd name="adj" fmla="val 7692"/>
             </a:avLst>
           </a:prstGeom>
           <a:solidFill>
@@ -22786,14 +23176,14 @@
       </p:sp>
       <p:sp>
         <p:nvSpPr>
-          <p:cNvPr id="46" name="Text 44"/>
-          <p:cNvSpPr/>
-          <p:nvPr/>
-        </p:nvSpPr>
-        <p:spPr>
-          <a:xfrm>
-            <a:off x="5254752" y="4169664"/>
-            <a:ext cx="685800" cy="384048"/>
+          <p:cNvPr id="48" name="Text 46"/>
+          <p:cNvSpPr/>
+          <p:nvPr/>
+        </p:nvSpPr>
+        <p:spPr>
+          <a:xfrm>
+            <a:off x="5759577" y="4169664"/>
+            <a:ext cx="685800" cy="475488"/>
           </a:xfrm>
           <a:prstGeom prst="rect">
             <a:avLst/>
@@ -22817,7 +23207,7 @@
                 <a:ea typeface="Trebuchet MS" pitchFamily="34" charset="-122"/>
                 <a:cs typeface="Trebuchet MS" pitchFamily="34" charset="-120"/>
               </a:rPr>
-              <a:t>ph</a:t>
+              <a:t>l</a:t>
             </a:r>
             <a:endParaRPr lang="en-US" sz="900" dirty="0"/>
           </a:p>
@@ -22825,57 +23215,18 @@
       </p:sp>
       <p:sp>
         <p:nvSpPr>
-          <p:cNvPr id="47" name="Text 45"/>
-          <p:cNvSpPr/>
-          <p:nvPr/>
-        </p:nvSpPr>
-        <p:spPr>
-          <a:xfrm>
-            <a:off x="5254752" y="4572000"/>
-            <a:ext cx="685800" cy="219456"/>
-          </a:xfrm>
-          <a:prstGeom prst="rect">
-            <a:avLst/>
-          </a:prstGeom>
-          <a:noFill/>
-          <a:ln/>
-        </p:spPr>
-        <p:txBody>
-          <a:bodyPr wrap="square" lIns="0" tIns="0" rIns="0" bIns="0" rtlCol="0" anchor="t"/>
-          <a:lstStyle/>
-          <a:p>
-            <a:pPr algn="ctr" indent="0" marL="0">
-              <a:buNone/>
-            </a:pPr>
-            <a:r>
-              <a:rPr lang="en-US" sz="750" i="1" dirty="0">
-                <a:solidFill>
-                  <a:srgbClr val="94A3B8"/>
-                </a:solidFill>
-                <a:latin typeface="Calibri" pitchFamily="34" charset="0"/>
-                <a:ea typeface="Calibri" pitchFamily="34" charset="-122"/>
-                <a:cs typeface="Calibri" pitchFamily="34" charset="-120"/>
-              </a:rPr>
-              <a:t>/f/</a:t>
-            </a:r>
-            <a:endParaRPr lang="en-US" sz="750" dirty="0"/>
-          </a:p>
-        </p:txBody>
-      </p:sp>
-      <p:sp>
-        <p:nvSpPr>
-          <p:cNvPr id="48" name="Shape 46"/>
-          <p:cNvSpPr/>
-          <p:nvPr/>
-        </p:nvSpPr>
-        <p:spPr>
-          <a:xfrm>
-            <a:off x="6062472" y="4169664"/>
-            <a:ext cx="685800" cy="384048"/>
+          <p:cNvPr id="49" name="Shape 47"/>
+          <p:cNvSpPr/>
+          <p:nvPr/>
+        </p:nvSpPr>
+        <p:spPr>
+          <a:xfrm>
+            <a:off x="6668262" y="4169664"/>
+            <a:ext cx="685800" cy="475488"/>
           </a:xfrm>
           <a:prstGeom prst="rect">
             <a:avLst>
-              <a:gd name="adj" fmla="val 9524"/>
+              <a:gd name="adj" fmla="val 7692"/>
             </a:avLst>
           </a:prstGeom>
           <a:solidFill>
@@ -22891,14 +23242,14 @@
       </p:sp>
       <p:sp>
         <p:nvSpPr>
-          <p:cNvPr id="49" name="Text 47"/>
-          <p:cNvSpPr/>
-          <p:nvPr/>
-        </p:nvSpPr>
-        <p:spPr>
-          <a:xfrm>
-            <a:off x="6062472" y="4169664"/>
-            <a:ext cx="685800" cy="384048"/>
+          <p:cNvPr id="50" name="Text 48"/>
+          <p:cNvSpPr/>
+          <p:nvPr/>
+        </p:nvSpPr>
+        <p:spPr>
+          <a:xfrm>
+            <a:off x="6668262" y="4169664"/>
+            <a:ext cx="685800" cy="475488"/>
           </a:xfrm>
           <a:prstGeom prst="rect">
             <a:avLst/>
@@ -22930,18 +23281,18 @@
       </p:sp>
       <p:sp>
         <p:nvSpPr>
-          <p:cNvPr id="50" name="Shape 48"/>
-          <p:cNvSpPr/>
-          <p:nvPr/>
-        </p:nvSpPr>
-        <p:spPr>
-          <a:xfrm>
-            <a:off x="6870192" y="4169664"/>
-            <a:ext cx="685800" cy="384048"/>
+          <p:cNvPr id="51" name="Shape 49"/>
+          <p:cNvSpPr/>
+          <p:nvPr/>
+        </p:nvSpPr>
+        <p:spPr>
+          <a:xfrm>
+            <a:off x="7576947" y="4169664"/>
+            <a:ext cx="685800" cy="475488"/>
           </a:xfrm>
           <a:prstGeom prst="rect">
             <a:avLst>
-              <a:gd name="adj" fmla="val 9524"/>
+              <a:gd name="adj" fmla="val 7692"/>
             </a:avLst>
           </a:prstGeom>
           <a:solidFill>
@@ -22957,14 +23308,14 @@
       </p:sp>
       <p:sp>
         <p:nvSpPr>
-          <p:cNvPr id="51" name="Text 49"/>
-          <p:cNvSpPr/>
-          <p:nvPr/>
-        </p:nvSpPr>
-        <p:spPr>
-          <a:xfrm>
-            <a:off x="6870192" y="4169664"/>
-            <a:ext cx="685800" cy="384048"/>
+          <p:cNvPr id="52" name="Text 50"/>
+          <p:cNvSpPr/>
+          <p:nvPr/>
+        </p:nvSpPr>
+        <p:spPr>
+          <a:xfrm>
+            <a:off x="7576947" y="4169664"/>
+            <a:ext cx="685800" cy="475488"/>
           </a:xfrm>
           <a:prstGeom prst="rect">
             <a:avLst/>
@@ -22988,73 +23339,7 @@
                 <a:ea typeface="Trebuchet MS" pitchFamily="34" charset="-122"/>
                 <a:cs typeface="Trebuchet MS" pitchFamily="34" charset="-120"/>
               </a:rPr>
-              <a:t>n</a:t>
-            </a:r>
-            <a:endParaRPr lang="en-US" sz="900" dirty="0"/>
-          </a:p>
-        </p:txBody>
-      </p:sp>
-      <p:sp>
-        <p:nvSpPr>
-          <p:cNvPr id="52" name="Shape 50"/>
-          <p:cNvSpPr/>
-          <p:nvPr/>
-        </p:nvSpPr>
-        <p:spPr>
-          <a:xfrm>
-            <a:off x="7677912" y="4169664"/>
-            <a:ext cx="685800" cy="384048"/>
-          </a:xfrm>
-          <a:prstGeom prst="rect">
-            <a:avLst>
-              <a:gd name="adj" fmla="val 9524"/>
-            </a:avLst>
-          </a:prstGeom>
-          <a:solidFill>
-            <a:srgbClr val="FFFFFF"/>
-          </a:solidFill>
-          <a:ln w="12700">
-            <a:solidFill>
-              <a:srgbClr val="DB2777"/>
-            </a:solidFill>
-            <a:prstDash val="solid"/>
-          </a:ln>
-        </p:spPr>
-      </p:sp>
-      <p:sp>
-        <p:nvSpPr>
-          <p:cNvPr id="53" name="Text 51"/>
-          <p:cNvSpPr/>
-          <p:nvPr/>
-        </p:nvSpPr>
-        <p:spPr>
-          <a:xfrm>
-            <a:off x="7677912" y="4169664"/>
-            <a:ext cx="685800" cy="384048"/>
-          </a:xfrm>
-          <a:prstGeom prst="rect">
-            <a:avLst/>
-          </a:prstGeom>
-          <a:noFill/>
-          <a:ln/>
-        </p:spPr>
-        <p:txBody>
-          <a:bodyPr wrap="square" lIns="0" tIns="0" rIns="0" bIns="0" rtlCol="0" anchor="ctr"/>
-          <a:lstStyle/>
-          <a:p>
-            <a:pPr algn="ctr" indent="0" marL="0">
-              <a:buNone/>
-            </a:pPr>
-            <a:r>
-              <a:rPr lang="en-US" sz="900" b="1" dirty="0">
-                <a:solidFill>
-                  <a:srgbClr val="9D174D"/>
-                </a:solidFill>
-                <a:latin typeface="Trebuchet MS" pitchFamily="34" charset="0"/>
-                <a:ea typeface="Trebuchet MS" pitchFamily="34" charset="-122"/>
-                <a:cs typeface="Trebuchet MS" pitchFamily="34" charset="-120"/>
-              </a:rPr>
-              <a:t>e</a:t>
+              <a:t>gy</a:t>
             </a:r>
             <a:endParaRPr lang="en-US" sz="900" dirty="0"/>
           </a:p>
@@ -23346,7 +23631,7 @@
                 <a:ea typeface="Calibri" pitchFamily="34" charset="-122"/>
                 <a:cs typeface="Calibri" pitchFamily="34" charset="-120"/>
               </a:rPr>
-              <a:t>Word Labs  •  wordlabs.app  •  Root: 'phone' = sound, voice</a:t>
+              <a:t>Word Labs  •  wordlabs.app  •  Root: 'phone' = sound; a device for talking to someone</a:t>
             </a:r>
             <a:endParaRPr lang="en-US" sz="800" dirty="0"/>
           </a:p>
@@ -23485,7 +23770,7 @@
                 <a:ea typeface="Trebuchet MS" pitchFamily="34" charset="-122"/>
                 <a:cs typeface="Trebuchet MS" pitchFamily="34" charset="-120"/>
               </a:rPr>
-              <a:t>megaphone</a:t>
+              <a:t>monophonic</a:t>
             </a:r>
             <a:endParaRPr lang="en-US" sz="2800" dirty="0"/>
           </a:p>
@@ -24173,7 +24458,7 @@
                 <a:ea typeface="Calibri" pitchFamily="34" charset="-122"/>
                 <a:cs typeface="Calibri" pitchFamily="34" charset="-120"/>
               </a:rPr>
-              <a:t>Word Labs  •  wordlabs.app  •  Root: 'phone' = sound, voice</a:t>
+              <a:t>Word Labs  •  wordlabs.app  •  Root: 'phone' = sound; a device for talking to someone</a:t>
             </a:r>
             <a:endParaRPr lang="en-US" sz="800" dirty="0"/>
           </a:p>
@@ -24312,7 +24597,7 @@
                 <a:ea typeface="Trebuchet MS" pitchFamily="34" charset="-122"/>
                 <a:cs typeface="Trebuchet MS" pitchFamily="34" charset="-120"/>
               </a:rPr>
-              <a:t>megaphone</a:t>
+              <a:t>monophonic</a:t>
             </a:r>
             <a:endParaRPr lang="en-US" sz="2800" dirty="0"/>
           </a:p>
@@ -24392,7 +24677,7 @@
         </p:nvSpPr>
         <p:spPr>
           <a:xfrm>
-            <a:off x="2938272" y="2258568"/>
+            <a:off x="2221992" y="2258568"/>
             <a:ext cx="1828800" cy="292608"/>
           </a:xfrm>
           <a:prstGeom prst="rect">
@@ -24426,7 +24711,7 @@
         </p:nvSpPr>
         <p:spPr>
           <a:xfrm>
-            <a:off x="2938272" y="2258568"/>
+            <a:off x="2221992" y="2258568"/>
             <a:ext cx="1828800" cy="292608"/>
           </a:xfrm>
           <a:prstGeom prst="rect">
@@ -24451,7 +24736,7 @@
                 <a:ea typeface="Trebuchet MS" pitchFamily="34" charset="-122"/>
                 <a:cs typeface="Trebuchet MS" pitchFamily="34" charset="-120"/>
               </a:rPr>
-              <a:t>mega</a:t>
+              <a:t>mono</a:t>
             </a:r>
             <a:endParaRPr lang="en-US" sz="1300" dirty="0"/>
           </a:p>
@@ -24465,7 +24750,7 @@
         </p:nvSpPr>
         <p:spPr>
           <a:xfrm>
-            <a:off x="2938272" y="2569464"/>
+            <a:off x="2221992" y="2569464"/>
             <a:ext cx="1828800" cy="201168"/>
           </a:xfrm>
           <a:prstGeom prst="rect">
@@ -24490,7 +24775,7 @@
                 <a:ea typeface="Calibri" pitchFamily="34" charset="-122"/>
                 <a:cs typeface="Calibri" pitchFamily="34" charset="-120"/>
               </a:rPr>
-              <a:t>large, great</a:t>
+              <a:t>one; single</a:t>
             </a:r>
             <a:endParaRPr lang="en-US" sz="850" dirty="0"/>
           </a:p>
@@ -24504,7 +24789,7 @@
         </p:nvSpPr>
         <p:spPr>
           <a:xfrm>
-            <a:off x="5803392" y="2258568"/>
+            <a:off x="4370832" y="2258568"/>
             <a:ext cx="1828800" cy="292608"/>
           </a:xfrm>
           <a:prstGeom prst="rect">
@@ -24538,7 +24823,7 @@
         </p:nvSpPr>
         <p:spPr>
           <a:xfrm>
-            <a:off x="5803392" y="2258568"/>
+            <a:off x="4370832" y="2258568"/>
             <a:ext cx="1828800" cy="292608"/>
           </a:xfrm>
           <a:prstGeom prst="rect">
@@ -24577,7 +24862,7 @@
         </p:nvSpPr>
         <p:spPr>
           <a:xfrm>
-            <a:off x="5803392" y="2569464"/>
+            <a:off x="4370832" y="2569464"/>
             <a:ext cx="1828800" cy="201168"/>
           </a:xfrm>
           <a:prstGeom prst="rect">
@@ -24602,7 +24887,7 @@
                 <a:ea typeface="Calibri" pitchFamily="34" charset="-122"/>
                 <a:cs typeface="Calibri" pitchFamily="34" charset="-120"/>
               </a:rPr>
-              <a:t>sound, voice</a:t>
+              <a:t>sound; a device for talking to someone</a:t>
             </a:r>
             <a:endParaRPr lang="en-US" sz="850" dirty="0"/>
           </a:p>
@@ -24611,6 +24896,118 @@
       <p:sp>
         <p:nvSpPr>
           <p:cNvPr id="22" name="Shape 20"/>
+          <p:cNvSpPr/>
+          <p:nvPr/>
+        </p:nvSpPr>
+        <p:spPr>
+          <a:xfrm>
+            <a:off x="6519672" y="2258568"/>
+            <a:ext cx="1828800" cy="292608"/>
+          </a:xfrm>
+          <a:prstGeom prst="rect">
+            <a:avLst>
+              <a:gd name="adj" fmla="val 25000"/>
+            </a:avLst>
+          </a:prstGeom>
+          <a:solidFill>
+            <a:srgbClr val="FCE7F3"/>
+          </a:solidFill>
+          <a:ln w="19050">
+            <a:solidFill>
+              <a:srgbClr val="DB2777"/>
+            </a:solidFill>
+            <a:prstDash val="solid"/>
+          </a:ln>
+          <a:effectLst>
+            <a:outerShdw sx="100000" sy="100000" kx="0" ky="0" algn="bl" rotWithShape="0" blurRad="101600" dist="38100" dir="8100000">
+              <a:srgbClr val="000000">
+                <a:alpha val="12000"/>
+              </a:srgbClr>
+            </a:outerShdw>
+          </a:effectLst>
+        </p:spPr>
+      </p:sp>
+      <p:sp>
+        <p:nvSpPr>
+          <p:cNvPr id="23" name="Text 21"/>
+          <p:cNvSpPr/>
+          <p:nvPr/>
+        </p:nvSpPr>
+        <p:spPr>
+          <a:xfrm>
+            <a:off x="6519672" y="2258568"/>
+            <a:ext cx="1828800" cy="292608"/>
+          </a:xfrm>
+          <a:prstGeom prst="rect">
+            <a:avLst/>
+          </a:prstGeom>
+          <a:noFill/>
+          <a:ln/>
+        </p:spPr>
+        <p:txBody>
+          <a:bodyPr wrap="square" lIns="0" tIns="0" rIns="0" bIns="0" rtlCol="0" anchor="ctr"/>
+          <a:lstStyle/>
+          <a:p>
+            <a:pPr algn="ctr" indent="0" marL="0">
+              <a:buNone/>
+            </a:pPr>
+            <a:r>
+              <a:rPr lang="en-US" sz="1300" b="1" dirty="0">
+                <a:solidFill>
+                  <a:srgbClr val="9D174D"/>
+                </a:solidFill>
+                <a:latin typeface="Trebuchet MS" pitchFamily="34" charset="0"/>
+                <a:ea typeface="Trebuchet MS" pitchFamily="34" charset="-122"/>
+                <a:cs typeface="Trebuchet MS" pitchFamily="34" charset="-120"/>
+              </a:rPr>
+              <a:t>ic</a:t>
+            </a:r>
+            <a:endParaRPr lang="en-US" sz="1300" dirty="0"/>
+          </a:p>
+        </p:txBody>
+      </p:sp>
+      <p:sp>
+        <p:nvSpPr>
+          <p:cNvPr id="24" name="Text 22"/>
+          <p:cNvSpPr/>
+          <p:nvPr/>
+        </p:nvSpPr>
+        <p:spPr>
+          <a:xfrm>
+            <a:off x="6519672" y="2569464"/>
+            <a:ext cx="1828800" cy="201168"/>
+          </a:xfrm>
+          <a:prstGeom prst="rect">
+            <a:avLst/>
+          </a:prstGeom>
+          <a:noFill/>
+          <a:ln/>
+        </p:spPr>
+        <p:txBody>
+          <a:bodyPr wrap="square" lIns="0" tIns="0" rIns="0" bIns="0" rtlCol="0" anchor="t"/>
+          <a:lstStyle/>
+          <a:p>
+            <a:pPr algn="ctr" indent="0" marL="0">
+              <a:buNone/>
+            </a:pPr>
+            <a:r>
+              <a:rPr lang="en-US" sz="850" dirty="0">
+                <a:solidFill>
+                  <a:srgbClr val="475569"/>
+                </a:solidFill>
+                <a:latin typeface="Calibri" pitchFamily="34" charset="0"/>
+                <a:ea typeface="Calibri" pitchFamily="34" charset="-122"/>
+                <a:cs typeface="Calibri" pitchFamily="34" charset="-120"/>
+              </a:rPr>
+              <a:t>related to</a:t>
+            </a:r>
+            <a:endParaRPr lang="en-US" sz="850" dirty="0"/>
+          </a:p>
+        </p:txBody>
+      </p:sp>
+      <p:sp>
+        <p:nvSpPr>
+          <p:cNvPr id="25" name="Shape 23"/>
           <p:cNvSpPr/>
           <p:nvPr/>
         </p:nvSpPr>
@@ -24637,7 +25034,7 @@
       </p:sp>
       <p:sp>
         <p:nvSpPr>
-          <p:cNvPr id="23" name="Text 21"/>
+          <p:cNvPr id="26" name="Text 24"/>
           <p:cNvSpPr/>
           <p:nvPr/>
         </p:nvSpPr>
@@ -24676,7 +25073,7 @@
       </p:sp>
       <p:sp>
         <p:nvSpPr>
-          <p:cNvPr id="24" name="Shape 22"/>
+          <p:cNvPr id="27" name="Shape 25"/>
           <p:cNvSpPr/>
           <p:nvPr/>
         </p:nvSpPr>
@@ -24703,7 +25100,7 @@
       </p:sp>
       <p:sp>
         <p:nvSpPr>
-          <p:cNvPr id="25" name="Text 23"/>
+          <p:cNvPr id="28" name="Text 26"/>
           <p:cNvSpPr/>
           <p:nvPr/>
         </p:nvSpPr>
@@ -24742,7 +25139,7 @@
       </p:sp>
       <p:sp>
         <p:nvSpPr>
-          <p:cNvPr id="26" name="Shape 24"/>
+          <p:cNvPr id="29" name="Shape 27"/>
           <p:cNvSpPr/>
           <p:nvPr/>
         </p:nvSpPr>
@@ -24769,7 +25166,7 @@
       </p:sp>
       <p:sp>
         <p:nvSpPr>
-          <p:cNvPr id="27" name="Text 25"/>
+          <p:cNvPr id="30" name="Text 28"/>
           <p:cNvSpPr/>
           <p:nvPr/>
         </p:nvSpPr>
@@ -24808,7 +25205,7 @@
       </p:sp>
       <p:sp>
         <p:nvSpPr>
-          <p:cNvPr id="28" name="Shape 26"/>
+          <p:cNvPr id="31" name="Shape 29"/>
           <p:cNvSpPr/>
           <p:nvPr/>
         </p:nvSpPr>
@@ -24835,7 +25232,7 @@
       </p:sp>
       <p:sp>
         <p:nvSpPr>
-          <p:cNvPr id="29" name="Text 27"/>
+          <p:cNvPr id="32" name="Text 30"/>
           <p:cNvSpPr/>
           <p:nvPr/>
         </p:nvSpPr>
@@ -25158,7 +25555,7 @@
                 <a:ea typeface="Calibri" pitchFamily="34" charset="-122"/>
                 <a:cs typeface="Calibri" pitchFamily="34" charset="-120"/>
               </a:rPr>
-              <a:t>Word Labs  •  wordlabs.app  •  Root: 'phone' = sound, voice</a:t>
+              <a:t>Word Labs  •  wordlabs.app  •  Root: 'phone' = sound; a device for talking to someone</a:t>
             </a:r>
             <a:endParaRPr lang="en-US" sz="800" dirty="0"/>
           </a:p>
@@ -25231,7 +25628,7 @@
                 <a:ea typeface="Trebuchet MS" pitchFamily="34" charset="-122"/>
                 <a:cs typeface="Trebuchet MS" pitchFamily="34" charset="-120"/>
               </a:rPr>
-              <a:t>We are learning that the root 'phone' means 'sound, voice'.</a:t>
+              <a:t>We are learning that the root 'phone' means 'sound; a device for talking to someone'.</a:t>
             </a:r>
             <a:endParaRPr lang="en-US" sz="2000" dirty="0"/>
           </a:p>
@@ -25877,7 +26274,7 @@
                 <a:ea typeface="Calibri" pitchFamily="34" charset="-122"/>
                 <a:cs typeface="Calibri" pitchFamily="34" charset="-120"/>
               </a:rPr>
-              <a:t>Word Labs  •  wordlabs.app  •  Root: 'phone' = sound, voice</a:t>
+              <a:t>Word Labs  •  wordlabs.app  •  Root: 'phone' = sound; a device for talking to someone</a:t>
             </a:r>
             <a:endParaRPr lang="en-US" sz="800" dirty="0"/>
           </a:p>
@@ -26016,7 +26413,7 @@
                 <a:ea typeface="Trebuchet MS" pitchFamily="34" charset="-122"/>
                 <a:cs typeface="Trebuchet MS" pitchFamily="34" charset="-120"/>
               </a:rPr>
-              <a:t>megaphone</a:t>
+              <a:t>monophonic</a:t>
             </a:r>
             <a:endParaRPr lang="en-US" sz="2800" dirty="0"/>
           </a:p>
@@ -26096,7 +26493,7 @@
         </p:nvSpPr>
         <p:spPr>
           <a:xfrm>
-            <a:off x="2938272" y="2258568"/>
+            <a:off x="2221992" y="2258568"/>
             <a:ext cx="1828800" cy="292608"/>
           </a:xfrm>
           <a:prstGeom prst="rect">
@@ -26130,7 +26527,7 @@
         </p:nvSpPr>
         <p:spPr>
           <a:xfrm>
-            <a:off x="2938272" y="2258568"/>
+            <a:off x="2221992" y="2258568"/>
             <a:ext cx="1828800" cy="292608"/>
           </a:xfrm>
           <a:prstGeom prst="rect">
@@ -26155,7 +26552,7 @@
                 <a:ea typeface="Trebuchet MS" pitchFamily="34" charset="-122"/>
                 <a:cs typeface="Trebuchet MS" pitchFamily="34" charset="-120"/>
               </a:rPr>
-              <a:t>mega</a:t>
+              <a:t>mono</a:t>
             </a:r>
             <a:endParaRPr lang="en-US" sz="1300" dirty="0"/>
           </a:p>
@@ -26169,7 +26566,7 @@
         </p:nvSpPr>
         <p:spPr>
           <a:xfrm>
-            <a:off x="2938272" y="2569464"/>
+            <a:off x="2221992" y="2569464"/>
             <a:ext cx="1828800" cy="201168"/>
           </a:xfrm>
           <a:prstGeom prst="rect">
@@ -26194,7 +26591,7 @@
                 <a:ea typeface="Calibri" pitchFamily="34" charset="-122"/>
                 <a:cs typeface="Calibri" pitchFamily="34" charset="-120"/>
               </a:rPr>
-              <a:t>large, great</a:t>
+              <a:t>one; single</a:t>
             </a:r>
             <a:endParaRPr lang="en-US" sz="850" dirty="0"/>
           </a:p>
@@ -26208,7 +26605,7 @@
         </p:nvSpPr>
         <p:spPr>
           <a:xfrm>
-            <a:off x="5803392" y="2258568"/>
+            <a:off x="4370832" y="2258568"/>
             <a:ext cx="1828800" cy="292608"/>
           </a:xfrm>
           <a:prstGeom prst="rect">
@@ -26242,7 +26639,7 @@
         </p:nvSpPr>
         <p:spPr>
           <a:xfrm>
-            <a:off x="5803392" y="2258568"/>
+            <a:off x="4370832" y="2258568"/>
             <a:ext cx="1828800" cy="292608"/>
           </a:xfrm>
           <a:prstGeom prst="rect">
@@ -26281,7 +26678,7 @@
         </p:nvSpPr>
         <p:spPr>
           <a:xfrm>
-            <a:off x="5803392" y="2569464"/>
+            <a:off x="4370832" y="2569464"/>
             <a:ext cx="1828800" cy="201168"/>
           </a:xfrm>
           <a:prstGeom prst="rect">
@@ -26306,7 +26703,7 @@
                 <a:ea typeface="Calibri" pitchFamily="34" charset="-122"/>
                 <a:cs typeface="Calibri" pitchFamily="34" charset="-120"/>
               </a:rPr>
-              <a:t>sound, voice</a:t>
+              <a:t>sound; a device for talking to someone</a:t>
             </a:r>
             <a:endParaRPr lang="en-US" sz="850" dirty="0"/>
           </a:p>
@@ -26315,6 +26712,118 @@
       <p:sp>
         <p:nvSpPr>
           <p:cNvPr id="22" name="Shape 20"/>
+          <p:cNvSpPr/>
+          <p:nvPr/>
+        </p:nvSpPr>
+        <p:spPr>
+          <a:xfrm>
+            <a:off x="6519672" y="2258568"/>
+            <a:ext cx="1828800" cy="292608"/>
+          </a:xfrm>
+          <a:prstGeom prst="rect">
+            <a:avLst>
+              <a:gd name="adj" fmla="val 25000"/>
+            </a:avLst>
+          </a:prstGeom>
+          <a:solidFill>
+            <a:srgbClr val="FCE7F3"/>
+          </a:solidFill>
+          <a:ln w="19050">
+            <a:solidFill>
+              <a:srgbClr val="DB2777"/>
+            </a:solidFill>
+            <a:prstDash val="solid"/>
+          </a:ln>
+          <a:effectLst>
+            <a:outerShdw sx="100000" sy="100000" kx="0" ky="0" algn="bl" rotWithShape="0" blurRad="101600" dist="38100" dir="8100000">
+              <a:srgbClr val="000000">
+                <a:alpha val="12000"/>
+              </a:srgbClr>
+            </a:outerShdw>
+          </a:effectLst>
+        </p:spPr>
+      </p:sp>
+      <p:sp>
+        <p:nvSpPr>
+          <p:cNvPr id="23" name="Text 21"/>
+          <p:cNvSpPr/>
+          <p:nvPr/>
+        </p:nvSpPr>
+        <p:spPr>
+          <a:xfrm>
+            <a:off x="6519672" y="2258568"/>
+            <a:ext cx="1828800" cy="292608"/>
+          </a:xfrm>
+          <a:prstGeom prst="rect">
+            <a:avLst/>
+          </a:prstGeom>
+          <a:noFill/>
+          <a:ln/>
+        </p:spPr>
+        <p:txBody>
+          <a:bodyPr wrap="square" lIns="0" tIns="0" rIns="0" bIns="0" rtlCol="0" anchor="ctr"/>
+          <a:lstStyle/>
+          <a:p>
+            <a:pPr algn="ctr" indent="0" marL="0">
+              <a:buNone/>
+            </a:pPr>
+            <a:r>
+              <a:rPr lang="en-US" sz="1300" b="1" dirty="0">
+                <a:solidFill>
+                  <a:srgbClr val="9D174D"/>
+                </a:solidFill>
+                <a:latin typeface="Trebuchet MS" pitchFamily="34" charset="0"/>
+                <a:ea typeface="Trebuchet MS" pitchFamily="34" charset="-122"/>
+                <a:cs typeface="Trebuchet MS" pitchFamily="34" charset="-120"/>
+              </a:rPr>
+              <a:t>ic</a:t>
+            </a:r>
+            <a:endParaRPr lang="en-US" sz="1300" dirty="0"/>
+          </a:p>
+        </p:txBody>
+      </p:sp>
+      <p:sp>
+        <p:nvSpPr>
+          <p:cNvPr id="24" name="Text 22"/>
+          <p:cNvSpPr/>
+          <p:nvPr/>
+        </p:nvSpPr>
+        <p:spPr>
+          <a:xfrm>
+            <a:off x="6519672" y="2569464"/>
+            <a:ext cx="1828800" cy="201168"/>
+          </a:xfrm>
+          <a:prstGeom prst="rect">
+            <a:avLst/>
+          </a:prstGeom>
+          <a:noFill/>
+          <a:ln/>
+        </p:spPr>
+        <p:txBody>
+          <a:bodyPr wrap="square" lIns="0" tIns="0" rIns="0" bIns="0" rtlCol="0" anchor="t"/>
+          <a:lstStyle/>
+          <a:p>
+            <a:pPr algn="ctr" indent="0" marL="0">
+              <a:buNone/>
+            </a:pPr>
+            <a:r>
+              <a:rPr lang="en-US" sz="850" dirty="0">
+                <a:solidFill>
+                  <a:srgbClr val="475569"/>
+                </a:solidFill>
+                <a:latin typeface="Calibri" pitchFamily="34" charset="0"/>
+                <a:ea typeface="Calibri" pitchFamily="34" charset="-122"/>
+                <a:cs typeface="Calibri" pitchFamily="34" charset="-120"/>
+              </a:rPr>
+              <a:t>related to</a:t>
+            </a:r>
+            <a:endParaRPr lang="en-US" sz="850" dirty="0"/>
+          </a:p>
+        </p:txBody>
+      </p:sp>
+      <p:sp>
+        <p:nvSpPr>
+          <p:cNvPr id="25" name="Shape 23"/>
           <p:cNvSpPr/>
           <p:nvPr/>
         </p:nvSpPr>
@@ -26341,7 +26850,7 @@
       </p:sp>
       <p:sp>
         <p:nvSpPr>
-          <p:cNvPr id="23" name="Text 21"/>
+          <p:cNvPr id="26" name="Text 24"/>
           <p:cNvSpPr/>
           <p:nvPr/>
         </p:nvSpPr>
@@ -26380,7 +26889,7 @@
       </p:sp>
       <p:sp>
         <p:nvSpPr>
-          <p:cNvPr id="24" name="Shape 22"/>
+          <p:cNvPr id="27" name="Shape 25"/>
           <p:cNvSpPr/>
           <p:nvPr/>
         </p:nvSpPr>
@@ -26407,14 +26916,14 @@
       </p:sp>
       <p:sp>
         <p:nvSpPr>
-          <p:cNvPr id="25" name="Shape 23"/>
-          <p:cNvSpPr/>
-          <p:nvPr/>
-        </p:nvSpPr>
-        <p:spPr>
-          <a:xfrm>
-            <a:off x="2313432" y="3364992"/>
-            <a:ext cx="1645920" cy="475488"/>
+          <p:cNvPr id="28" name="Shape 26"/>
+          <p:cNvSpPr/>
+          <p:nvPr/>
+        </p:nvSpPr>
+        <p:spPr>
+          <a:xfrm>
+            <a:off x="1975104" y="3364992"/>
+            <a:ext cx="1554480" cy="475488"/>
           </a:xfrm>
           <a:prstGeom prst="rect">
             <a:avLst>
@@ -26434,14 +26943,14 @@
       </p:sp>
       <p:sp>
         <p:nvSpPr>
-          <p:cNvPr id="26" name="Text 24"/>
-          <p:cNvSpPr/>
-          <p:nvPr/>
-        </p:nvSpPr>
-        <p:spPr>
-          <a:xfrm>
-            <a:off x="2313432" y="3364992"/>
-            <a:ext cx="1645920" cy="475488"/>
+          <p:cNvPr id="29" name="Text 27"/>
+          <p:cNvSpPr/>
+          <p:nvPr/>
+        </p:nvSpPr>
+        <p:spPr>
+          <a:xfrm>
+            <a:off x="1975104" y="3364992"/>
+            <a:ext cx="1554480" cy="475488"/>
           </a:xfrm>
           <a:prstGeom prst="rect">
             <a:avLst/>
@@ -26465,7 +26974,7 @@
                 <a:ea typeface="Trebuchet MS" pitchFamily="34" charset="-122"/>
                 <a:cs typeface="Trebuchet MS" pitchFamily="34" charset="-120"/>
               </a:rPr>
-              <a:t>meg</a:t>
+              <a:t>mon</a:t>
             </a:r>
             <a:endParaRPr lang="en-US" sz="1400" dirty="0"/>
           </a:p>
@@ -26473,14 +26982,14 @@
       </p:sp>
       <p:sp>
         <p:nvSpPr>
-          <p:cNvPr id="27" name="Text 25"/>
-          <p:cNvSpPr/>
-          <p:nvPr/>
-        </p:nvSpPr>
-        <p:spPr>
-          <a:xfrm>
-            <a:off x="3959352" y="3364992"/>
-            <a:ext cx="411480" cy="475488"/>
+          <p:cNvPr id="30" name="Text 28"/>
+          <p:cNvSpPr/>
+          <p:nvPr/>
+        </p:nvSpPr>
+        <p:spPr>
+          <a:xfrm>
+            <a:off x="3529584" y="3364992"/>
+            <a:ext cx="73152" cy="475488"/>
           </a:xfrm>
           <a:prstGeom prst="rect">
             <a:avLst/>
@@ -26512,14 +27021,14 @@
       </p:sp>
       <p:sp>
         <p:nvSpPr>
-          <p:cNvPr id="28" name="Shape 26"/>
-          <p:cNvSpPr/>
-          <p:nvPr/>
-        </p:nvSpPr>
-        <p:spPr>
-          <a:xfrm>
-            <a:off x="4370832" y="3364992"/>
-            <a:ext cx="1645920" cy="475488"/>
+          <p:cNvPr id="31" name="Shape 29"/>
+          <p:cNvSpPr/>
+          <p:nvPr/>
+        </p:nvSpPr>
+        <p:spPr>
+          <a:xfrm>
+            <a:off x="3602736" y="3364992"/>
+            <a:ext cx="1554480" cy="475488"/>
           </a:xfrm>
           <a:prstGeom prst="rect">
             <a:avLst>
@@ -26539,14 +27048,14 @@
       </p:sp>
       <p:sp>
         <p:nvSpPr>
-          <p:cNvPr id="29" name="Text 27"/>
-          <p:cNvSpPr/>
-          <p:nvPr/>
-        </p:nvSpPr>
-        <p:spPr>
-          <a:xfrm>
-            <a:off x="4370832" y="3364992"/>
-            <a:ext cx="1645920" cy="475488"/>
+          <p:cNvPr id="32" name="Text 30"/>
+          <p:cNvSpPr/>
+          <p:nvPr/>
+        </p:nvSpPr>
+        <p:spPr>
+          <a:xfrm>
+            <a:off x="3602736" y="3364992"/>
+            <a:ext cx="1554480" cy="475488"/>
           </a:xfrm>
           <a:prstGeom prst="rect">
             <a:avLst/>
@@ -26570,7 +27079,7 @@
                 <a:ea typeface="Trebuchet MS" pitchFamily="34" charset="-122"/>
                 <a:cs typeface="Trebuchet MS" pitchFamily="34" charset="-120"/>
               </a:rPr>
-              <a:t>a</a:t>
+              <a:t>o</a:t>
             </a:r>
             <a:endParaRPr lang="en-US" sz="1400" dirty="0"/>
           </a:p>
@@ -26578,14 +27087,14 @@
       </p:sp>
       <p:sp>
         <p:nvSpPr>
-          <p:cNvPr id="30" name="Text 28"/>
-          <p:cNvSpPr/>
-          <p:nvPr/>
-        </p:nvSpPr>
-        <p:spPr>
-          <a:xfrm>
-            <a:off x="6016752" y="3364992"/>
-            <a:ext cx="411480" cy="475488"/>
+          <p:cNvPr id="33" name="Text 31"/>
+          <p:cNvSpPr/>
+          <p:nvPr/>
+        </p:nvSpPr>
+        <p:spPr>
+          <a:xfrm>
+            <a:off x="5157216" y="3364992"/>
+            <a:ext cx="73152" cy="475488"/>
           </a:xfrm>
           <a:prstGeom prst="rect">
             <a:avLst/>
@@ -26617,14 +27126,14 @@
       </p:sp>
       <p:sp>
         <p:nvSpPr>
-          <p:cNvPr id="31" name="Shape 29"/>
-          <p:cNvSpPr/>
-          <p:nvPr/>
-        </p:nvSpPr>
-        <p:spPr>
-          <a:xfrm>
-            <a:off x="6428232" y="3364992"/>
-            <a:ext cx="1645920" cy="475488"/>
+          <p:cNvPr id="34" name="Shape 32"/>
+          <p:cNvSpPr/>
+          <p:nvPr/>
+        </p:nvSpPr>
+        <p:spPr>
+          <a:xfrm>
+            <a:off x="5230368" y="3364992"/>
+            <a:ext cx="1554480" cy="475488"/>
           </a:xfrm>
           <a:prstGeom prst="rect">
             <a:avLst>
@@ -26644,14 +27153,14 @@
       </p:sp>
       <p:sp>
         <p:nvSpPr>
-          <p:cNvPr id="32" name="Text 30"/>
-          <p:cNvSpPr/>
-          <p:nvPr/>
-        </p:nvSpPr>
-        <p:spPr>
-          <a:xfrm>
-            <a:off x="6428232" y="3364992"/>
-            <a:ext cx="1645920" cy="475488"/>
+          <p:cNvPr id="35" name="Text 33"/>
+          <p:cNvSpPr/>
+          <p:nvPr/>
+        </p:nvSpPr>
+        <p:spPr>
+          <a:xfrm>
+            <a:off x="5230368" y="3364992"/>
+            <a:ext cx="1554480" cy="475488"/>
           </a:xfrm>
           <a:prstGeom prst="rect">
             <a:avLst/>
@@ -26675,7 +27184,7 @@
                 <a:ea typeface="Trebuchet MS" pitchFamily="34" charset="-122"/>
                 <a:cs typeface="Trebuchet MS" pitchFamily="34" charset="-120"/>
               </a:rPr>
-              <a:t>phone</a:t>
+              <a:t>phon</a:t>
             </a:r>
             <a:endParaRPr lang="en-US" sz="1400" dirty="0"/>
           </a:p>
@@ -26683,7 +27192,112 @@
       </p:sp>
       <p:sp>
         <p:nvSpPr>
-          <p:cNvPr id="33" name="Shape 31"/>
+          <p:cNvPr id="36" name="Text 34"/>
+          <p:cNvSpPr/>
+          <p:nvPr/>
+        </p:nvSpPr>
+        <p:spPr>
+          <a:xfrm>
+            <a:off x="6784848" y="3364992"/>
+            <a:ext cx="73152" cy="475488"/>
+          </a:xfrm>
+          <a:prstGeom prst="rect">
+            <a:avLst/>
+          </a:prstGeom>
+          <a:noFill/>
+          <a:ln/>
+        </p:spPr>
+        <p:txBody>
+          <a:bodyPr wrap="square" lIns="0" tIns="0" rIns="0" bIns="0" rtlCol="0" anchor="ctr"/>
+          <a:lstStyle/>
+          <a:p>
+            <a:pPr algn="ctr" indent="0" marL="0">
+              <a:buNone/>
+            </a:pPr>
+            <a:r>
+              <a:rPr lang="en-US" sz="1600" b="1" dirty="0">
+                <a:solidFill>
+                  <a:srgbClr val="0D9488"/>
+                </a:solidFill>
+                <a:latin typeface="Trebuchet MS" pitchFamily="34" charset="0"/>
+                <a:ea typeface="Trebuchet MS" pitchFamily="34" charset="-122"/>
+                <a:cs typeface="Trebuchet MS" pitchFamily="34" charset="-120"/>
+              </a:rPr>
+              <a:t>·</a:t>
+            </a:r>
+            <a:endParaRPr lang="en-US" sz="1600" dirty="0"/>
+          </a:p>
+        </p:txBody>
+      </p:sp>
+      <p:sp>
+        <p:nvSpPr>
+          <p:cNvPr id="37" name="Shape 35"/>
+          <p:cNvSpPr/>
+          <p:nvPr/>
+        </p:nvSpPr>
+        <p:spPr>
+          <a:xfrm>
+            <a:off x="6858000" y="3364992"/>
+            <a:ext cx="1554480" cy="475488"/>
+          </a:xfrm>
+          <a:prstGeom prst="rect">
+            <a:avLst>
+              <a:gd name="adj" fmla="val 9615"/>
+            </a:avLst>
+          </a:prstGeom>
+          <a:solidFill>
+            <a:srgbClr val="FFFFFF"/>
+          </a:solidFill>
+          <a:ln w="12700">
+            <a:solidFill>
+              <a:srgbClr val="0D9488"/>
+            </a:solidFill>
+            <a:prstDash val="solid"/>
+          </a:ln>
+        </p:spPr>
+      </p:sp>
+      <p:sp>
+        <p:nvSpPr>
+          <p:cNvPr id="38" name="Text 36"/>
+          <p:cNvSpPr/>
+          <p:nvPr/>
+        </p:nvSpPr>
+        <p:spPr>
+          <a:xfrm>
+            <a:off x="6858000" y="3364992"/>
+            <a:ext cx="1554480" cy="475488"/>
+          </a:xfrm>
+          <a:prstGeom prst="rect">
+            <a:avLst/>
+          </a:prstGeom>
+          <a:noFill/>
+          <a:ln/>
+        </p:spPr>
+        <p:txBody>
+          <a:bodyPr wrap="square" lIns="0" tIns="0" rIns="0" bIns="0" rtlCol="0" anchor="ctr"/>
+          <a:lstStyle/>
+          <a:p>
+            <a:pPr algn="ctr" indent="0" marL="0">
+              <a:buNone/>
+            </a:pPr>
+            <a:r>
+              <a:rPr lang="en-US" sz="1400" b="1" dirty="0">
+                <a:solidFill>
+                  <a:srgbClr val="0D9488"/>
+                </a:solidFill>
+                <a:latin typeface="Trebuchet MS" pitchFamily="34" charset="0"/>
+                <a:ea typeface="Trebuchet MS" pitchFamily="34" charset="-122"/>
+                <a:cs typeface="Trebuchet MS" pitchFamily="34" charset="-120"/>
+              </a:rPr>
+              <a:t>ic</a:t>
+            </a:r>
+            <a:endParaRPr lang="en-US" sz="1400" dirty="0"/>
+          </a:p>
+        </p:txBody>
+      </p:sp>
+      <p:sp>
+        <p:nvSpPr>
+          <p:cNvPr id="39" name="Shape 37"/>
           <p:cNvSpPr/>
           <p:nvPr/>
         </p:nvSpPr>
@@ -26710,7 +27324,7 @@
       </p:sp>
       <p:sp>
         <p:nvSpPr>
-          <p:cNvPr id="34" name="Text 32"/>
+          <p:cNvPr id="40" name="Text 38"/>
           <p:cNvSpPr/>
           <p:nvPr/>
         </p:nvSpPr>
@@ -26749,7 +27363,7 @@
       </p:sp>
       <p:sp>
         <p:nvSpPr>
-          <p:cNvPr id="35" name="Shape 33"/>
+          <p:cNvPr id="41" name="Shape 39"/>
           <p:cNvSpPr/>
           <p:nvPr/>
         </p:nvSpPr>
@@ -26776,7 +27390,7 @@
       </p:sp>
       <p:sp>
         <p:nvSpPr>
-          <p:cNvPr id="36" name="Text 34"/>
+          <p:cNvPr id="42" name="Text 40"/>
           <p:cNvSpPr/>
           <p:nvPr/>
         </p:nvSpPr>
@@ -27099,7 +27713,7 @@
                 <a:ea typeface="Calibri" pitchFamily="34" charset="-122"/>
                 <a:cs typeface="Calibri" pitchFamily="34" charset="-120"/>
               </a:rPr>
-              <a:t>Word Labs  •  wordlabs.app  •  Root: 'phone' = sound, voice</a:t>
+              <a:t>Word Labs  •  wordlabs.app  •  Root: 'phone' = sound; a device for talking to someone</a:t>
             </a:r>
             <a:endParaRPr lang="en-US" sz="800" dirty="0"/>
           </a:p>
@@ -27238,7 +27852,7 @@
                 <a:ea typeface="Trebuchet MS" pitchFamily="34" charset="-122"/>
                 <a:cs typeface="Trebuchet MS" pitchFamily="34" charset="-120"/>
               </a:rPr>
-              <a:t>megaphone</a:t>
+              <a:t>monophonic</a:t>
             </a:r>
             <a:endParaRPr lang="en-US" sz="2800" dirty="0"/>
           </a:p>
@@ -27318,7 +27932,7 @@
         </p:nvSpPr>
         <p:spPr>
           <a:xfrm>
-            <a:off x="2938272" y="2258568"/>
+            <a:off x="2221992" y="2258568"/>
             <a:ext cx="1828800" cy="292608"/>
           </a:xfrm>
           <a:prstGeom prst="rect">
@@ -27352,7 +27966,7 @@
         </p:nvSpPr>
         <p:spPr>
           <a:xfrm>
-            <a:off x="2938272" y="2258568"/>
+            <a:off x="2221992" y="2258568"/>
             <a:ext cx="1828800" cy="292608"/>
           </a:xfrm>
           <a:prstGeom prst="rect">
@@ -27377,7 +27991,7 @@
                 <a:ea typeface="Trebuchet MS" pitchFamily="34" charset="-122"/>
                 <a:cs typeface="Trebuchet MS" pitchFamily="34" charset="-120"/>
               </a:rPr>
-              <a:t>mega</a:t>
+              <a:t>mono</a:t>
             </a:r>
             <a:endParaRPr lang="en-US" sz="1300" dirty="0"/>
           </a:p>
@@ -27391,7 +28005,7 @@
         </p:nvSpPr>
         <p:spPr>
           <a:xfrm>
-            <a:off x="2938272" y="2569464"/>
+            <a:off x="2221992" y="2569464"/>
             <a:ext cx="1828800" cy="201168"/>
           </a:xfrm>
           <a:prstGeom prst="rect">
@@ -27416,7 +28030,7 @@
                 <a:ea typeface="Calibri" pitchFamily="34" charset="-122"/>
                 <a:cs typeface="Calibri" pitchFamily="34" charset="-120"/>
               </a:rPr>
-              <a:t>large, great</a:t>
+              <a:t>one; single</a:t>
             </a:r>
             <a:endParaRPr lang="en-US" sz="850" dirty="0"/>
           </a:p>
@@ -27430,7 +28044,7 @@
         </p:nvSpPr>
         <p:spPr>
           <a:xfrm>
-            <a:off x="5803392" y="2258568"/>
+            <a:off x="4370832" y="2258568"/>
             <a:ext cx="1828800" cy="292608"/>
           </a:xfrm>
           <a:prstGeom prst="rect">
@@ -27464,7 +28078,7 @@
         </p:nvSpPr>
         <p:spPr>
           <a:xfrm>
-            <a:off x="5803392" y="2258568"/>
+            <a:off x="4370832" y="2258568"/>
             <a:ext cx="1828800" cy="292608"/>
           </a:xfrm>
           <a:prstGeom prst="rect">
@@ -27503,7 +28117,7 @@
         </p:nvSpPr>
         <p:spPr>
           <a:xfrm>
-            <a:off x="5803392" y="2569464"/>
+            <a:off x="4370832" y="2569464"/>
             <a:ext cx="1828800" cy="201168"/>
           </a:xfrm>
           <a:prstGeom prst="rect">
@@ -27528,7 +28142,7 @@
                 <a:ea typeface="Calibri" pitchFamily="34" charset="-122"/>
                 <a:cs typeface="Calibri" pitchFamily="34" charset="-120"/>
               </a:rPr>
-              <a:t>sound, voice</a:t>
+              <a:t>sound; a device for talking to someone</a:t>
             </a:r>
             <a:endParaRPr lang="en-US" sz="850" dirty="0"/>
           </a:p>
@@ -27537,6 +28151,118 @@
       <p:sp>
         <p:nvSpPr>
           <p:cNvPr id="22" name="Shape 20"/>
+          <p:cNvSpPr/>
+          <p:nvPr/>
+        </p:nvSpPr>
+        <p:spPr>
+          <a:xfrm>
+            <a:off x="6519672" y="2258568"/>
+            <a:ext cx="1828800" cy="292608"/>
+          </a:xfrm>
+          <a:prstGeom prst="rect">
+            <a:avLst>
+              <a:gd name="adj" fmla="val 25000"/>
+            </a:avLst>
+          </a:prstGeom>
+          <a:solidFill>
+            <a:srgbClr val="FCE7F3"/>
+          </a:solidFill>
+          <a:ln w="19050">
+            <a:solidFill>
+              <a:srgbClr val="DB2777"/>
+            </a:solidFill>
+            <a:prstDash val="solid"/>
+          </a:ln>
+          <a:effectLst>
+            <a:outerShdw sx="100000" sy="100000" kx="0" ky="0" algn="bl" rotWithShape="0" blurRad="101600" dist="38100" dir="8100000">
+              <a:srgbClr val="000000">
+                <a:alpha val="12000"/>
+              </a:srgbClr>
+            </a:outerShdw>
+          </a:effectLst>
+        </p:spPr>
+      </p:sp>
+      <p:sp>
+        <p:nvSpPr>
+          <p:cNvPr id="23" name="Text 21"/>
+          <p:cNvSpPr/>
+          <p:nvPr/>
+        </p:nvSpPr>
+        <p:spPr>
+          <a:xfrm>
+            <a:off x="6519672" y="2258568"/>
+            <a:ext cx="1828800" cy="292608"/>
+          </a:xfrm>
+          <a:prstGeom prst="rect">
+            <a:avLst/>
+          </a:prstGeom>
+          <a:noFill/>
+          <a:ln/>
+        </p:spPr>
+        <p:txBody>
+          <a:bodyPr wrap="square" lIns="0" tIns="0" rIns="0" bIns="0" rtlCol="0" anchor="ctr"/>
+          <a:lstStyle/>
+          <a:p>
+            <a:pPr algn="ctr" indent="0" marL="0">
+              <a:buNone/>
+            </a:pPr>
+            <a:r>
+              <a:rPr lang="en-US" sz="1300" b="1" dirty="0">
+                <a:solidFill>
+                  <a:srgbClr val="9D174D"/>
+                </a:solidFill>
+                <a:latin typeface="Trebuchet MS" pitchFamily="34" charset="0"/>
+                <a:ea typeface="Trebuchet MS" pitchFamily="34" charset="-122"/>
+                <a:cs typeface="Trebuchet MS" pitchFamily="34" charset="-120"/>
+              </a:rPr>
+              <a:t>ic</a:t>
+            </a:r>
+            <a:endParaRPr lang="en-US" sz="1300" dirty="0"/>
+          </a:p>
+        </p:txBody>
+      </p:sp>
+      <p:sp>
+        <p:nvSpPr>
+          <p:cNvPr id="24" name="Text 22"/>
+          <p:cNvSpPr/>
+          <p:nvPr/>
+        </p:nvSpPr>
+        <p:spPr>
+          <a:xfrm>
+            <a:off x="6519672" y="2569464"/>
+            <a:ext cx="1828800" cy="201168"/>
+          </a:xfrm>
+          <a:prstGeom prst="rect">
+            <a:avLst/>
+          </a:prstGeom>
+          <a:noFill/>
+          <a:ln/>
+        </p:spPr>
+        <p:txBody>
+          <a:bodyPr wrap="square" lIns="0" tIns="0" rIns="0" bIns="0" rtlCol="0" anchor="t"/>
+          <a:lstStyle/>
+          <a:p>
+            <a:pPr algn="ctr" indent="0" marL="0">
+              <a:buNone/>
+            </a:pPr>
+            <a:r>
+              <a:rPr lang="en-US" sz="850" dirty="0">
+                <a:solidFill>
+                  <a:srgbClr val="475569"/>
+                </a:solidFill>
+                <a:latin typeface="Calibri" pitchFamily="34" charset="0"/>
+                <a:ea typeface="Calibri" pitchFamily="34" charset="-122"/>
+                <a:cs typeface="Calibri" pitchFamily="34" charset="-120"/>
+              </a:rPr>
+              <a:t>related to</a:t>
+            </a:r>
+            <a:endParaRPr lang="en-US" sz="850" dirty="0"/>
+          </a:p>
+        </p:txBody>
+      </p:sp>
+      <p:sp>
+        <p:nvSpPr>
+          <p:cNvPr id="25" name="Shape 23"/>
           <p:cNvSpPr/>
           <p:nvPr/>
         </p:nvSpPr>
@@ -27563,7 +28289,7 @@
       </p:sp>
       <p:sp>
         <p:nvSpPr>
-          <p:cNvPr id="23" name="Text 21"/>
+          <p:cNvPr id="26" name="Text 24"/>
           <p:cNvSpPr/>
           <p:nvPr/>
         </p:nvSpPr>
@@ -27602,7 +28328,7 @@
       </p:sp>
       <p:sp>
         <p:nvSpPr>
-          <p:cNvPr id="24" name="Shape 22"/>
+          <p:cNvPr id="27" name="Shape 25"/>
           <p:cNvSpPr/>
           <p:nvPr/>
         </p:nvSpPr>
@@ -27629,14 +28355,14 @@
       </p:sp>
       <p:sp>
         <p:nvSpPr>
-          <p:cNvPr id="25" name="Shape 23"/>
-          <p:cNvSpPr/>
-          <p:nvPr/>
-        </p:nvSpPr>
-        <p:spPr>
-          <a:xfrm>
-            <a:off x="2313432" y="3364992"/>
-            <a:ext cx="1645920" cy="475488"/>
+          <p:cNvPr id="28" name="Shape 26"/>
+          <p:cNvSpPr/>
+          <p:nvPr/>
+        </p:nvSpPr>
+        <p:spPr>
+          <a:xfrm>
+            <a:off x="1975104" y="3364992"/>
+            <a:ext cx="1554480" cy="475488"/>
           </a:xfrm>
           <a:prstGeom prst="rect">
             <a:avLst>
@@ -27656,14 +28382,14 @@
       </p:sp>
       <p:sp>
         <p:nvSpPr>
-          <p:cNvPr id="26" name="Text 24"/>
-          <p:cNvSpPr/>
-          <p:nvPr/>
-        </p:nvSpPr>
-        <p:spPr>
-          <a:xfrm>
-            <a:off x="2313432" y="3364992"/>
-            <a:ext cx="1645920" cy="475488"/>
+          <p:cNvPr id="29" name="Text 27"/>
+          <p:cNvSpPr/>
+          <p:nvPr/>
+        </p:nvSpPr>
+        <p:spPr>
+          <a:xfrm>
+            <a:off x="1975104" y="3364992"/>
+            <a:ext cx="1554480" cy="475488"/>
           </a:xfrm>
           <a:prstGeom prst="rect">
             <a:avLst/>
@@ -27687,7 +28413,7 @@
                 <a:ea typeface="Trebuchet MS" pitchFamily="34" charset="-122"/>
                 <a:cs typeface="Trebuchet MS" pitchFamily="34" charset="-120"/>
               </a:rPr>
-              <a:t>meg</a:t>
+              <a:t>mon</a:t>
             </a:r>
             <a:endParaRPr lang="en-US" sz="1400" dirty="0"/>
           </a:p>
@@ -27695,14 +28421,14 @@
       </p:sp>
       <p:sp>
         <p:nvSpPr>
-          <p:cNvPr id="27" name="Text 25"/>
-          <p:cNvSpPr/>
-          <p:nvPr/>
-        </p:nvSpPr>
-        <p:spPr>
-          <a:xfrm>
-            <a:off x="3959352" y="3364992"/>
-            <a:ext cx="411480" cy="475488"/>
+          <p:cNvPr id="30" name="Text 28"/>
+          <p:cNvSpPr/>
+          <p:nvPr/>
+        </p:nvSpPr>
+        <p:spPr>
+          <a:xfrm>
+            <a:off x="3529584" y="3364992"/>
+            <a:ext cx="73152" cy="475488"/>
           </a:xfrm>
           <a:prstGeom prst="rect">
             <a:avLst/>
@@ -27734,14 +28460,14 @@
       </p:sp>
       <p:sp>
         <p:nvSpPr>
-          <p:cNvPr id="28" name="Shape 26"/>
-          <p:cNvSpPr/>
-          <p:nvPr/>
-        </p:nvSpPr>
-        <p:spPr>
-          <a:xfrm>
-            <a:off x="4370832" y="3364992"/>
-            <a:ext cx="1645920" cy="475488"/>
+          <p:cNvPr id="31" name="Shape 29"/>
+          <p:cNvSpPr/>
+          <p:nvPr/>
+        </p:nvSpPr>
+        <p:spPr>
+          <a:xfrm>
+            <a:off x="3602736" y="3364992"/>
+            <a:ext cx="1554480" cy="475488"/>
           </a:xfrm>
           <a:prstGeom prst="rect">
             <a:avLst>
@@ -27761,14 +28487,14 @@
       </p:sp>
       <p:sp>
         <p:nvSpPr>
-          <p:cNvPr id="29" name="Text 27"/>
-          <p:cNvSpPr/>
-          <p:nvPr/>
-        </p:nvSpPr>
-        <p:spPr>
-          <a:xfrm>
-            <a:off x="4370832" y="3364992"/>
-            <a:ext cx="1645920" cy="475488"/>
+          <p:cNvPr id="32" name="Text 30"/>
+          <p:cNvSpPr/>
+          <p:nvPr/>
+        </p:nvSpPr>
+        <p:spPr>
+          <a:xfrm>
+            <a:off x="3602736" y="3364992"/>
+            <a:ext cx="1554480" cy="475488"/>
           </a:xfrm>
           <a:prstGeom prst="rect">
             <a:avLst/>
@@ -27792,7 +28518,7 @@
                 <a:ea typeface="Trebuchet MS" pitchFamily="34" charset="-122"/>
                 <a:cs typeface="Trebuchet MS" pitchFamily="34" charset="-120"/>
               </a:rPr>
-              <a:t>a</a:t>
+              <a:t>o</a:t>
             </a:r>
             <a:endParaRPr lang="en-US" sz="1400" dirty="0"/>
           </a:p>
@@ -27800,14 +28526,14 @@
       </p:sp>
       <p:sp>
         <p:nvSpPr>
-          <p:cNvPr id="30" name="Text 28"/>
-          <p:cNvSpPr/>
-          <p:nvPr/>
-        </p:nvSpPr>
-        <p:spPr>
-          <a:xfrm>
-            <a:off x="6016752" y="3364992"/>
-            <a:ext cx="411480" cy="475488"/>
+          <p:cNvPr id="33" name="Text 31"/>
+          <p:cNvSpPr/>
+          <p:nvPr/>
+        </p:nvSpPr>
+        <p:spPr>
+          <a:xfrm>
+            <a:off x="5157216" y="3364992"/>
+            <a:ext cx="73152" cy="475488"/>
           </a:xfrm>
           <a:prstGeom prst="rect">
             <a:avLst/>
@@ -27839,14 +28565,14 @@
       </p:sp>
       <p:sp>
         <p:nvSpPr>
-          <p:cNvPr id="31" name="Shape 29"/>
-          <p:cNvSpPr/>
-          <p:nvPr/>
-        </p:nvSpPr>
-        <p:spPr>
-          <a:xfrm>
-            <a:off x="6428232" y="3364992"/>
-            <a:ext cx="1645920" cy="475488"/>
+          <p:cNvPr id="34" name="Shape 32"/>
+          <p:cNvSpPr/>
+          <p:nvPr/>
+        </p:nvSpPr>
+        <p:spPr>
+          <a:xfrm>
+            <a:off x="5230368" y="3364992"/>
+            <a:ext cx="1554480" cy="475488"/>
           </a:xfrm>
           <a:prstGeom prst="rect">
             <a:avLst>
@@ -27866,14 +28592,14 @@
       </p:sp>
       <p:sp>
         <p:nvSpPr>
-          <p:cNvPr id="32" name="Text 30"/>
-          <p:cNvSpPr/>
-          <p:nvPr/>
-        </p:nvSpPr>
-        <p:spPr>
-          <a:xfrm>
-            <a:off x="6428232" y="3364992"/>
-            <a:ext cx="1645920" cy="475488"/>
+          <p:cNvPr id="35" name="Text 33"/>
+          <p:cNvSpPr/>
+          <p:nvPr/>
+        </p:nvSpPr>
+        <p:spPr>
+          <a:xfrm>
+            <a:off x="5230368" y="3364992"/>
+            <a:ext cx="1554480" cy="475488"/>
           </a:xfrm>
           <a:prstGeom prst="rect">
             <a:avLst/>
@@ -27897,7 +28623,7 @@
                 <a:ea typeface="Trebuchet MS" pitchFamily="34" charset="-122"/>
                 <a:cs typeface="Trebuchet MS" pitchFamily="34" charset="-120"/>
               </a:rPr>
-              <a:t>phone</a:t>
+              <a:t>phon</a:t>
             </a:r>
             <a:endParaRPr lang="en-US" sz="1400" dirty="0"/>
           </a:p>
@@ -27905,7 +28631,112 @@
       </p:sp>
       <p:sp>
         <p:nvSpPr>
-          <p:cNvPr id="33" name="Shape 31"/>
+          <p:cNvPr id="36" name="Text 34"/>
+          <p:cNvSpPr/>
+          <p:nvPr/>
+        </p:nvSpPr>
+        <p:spPr>
+          <a:xfrm>
+            <a:off x="6784848" y="3364992"/>
+            <a:ext cx="73152" cy="475488"/>
+          </a:xfrm>
+          <a:prstGeom prst="rect">
+            <a:avLst/>
+          </a:prstGeom>
+          <a:noFill/>
+          <a:ln/>
+        </p:spPr>
+        <p:txBody>
+          <a:bodyPr wrap="square" lIns="0" tIns="0" rIns="0" bIns="0" rtlCol="0" anchor="ctr"/>
+          <a:lstStyle/>
+          <a:p>
+            <a:pPr algn="ctr" indent="0" marL="0">
+              <a:buNone/>
+            </a:pPr>
+            <a:r>
+              <a:rPr lang="en-US" sz="1600" b="1" dirty="0">
+                <a:solidFill>
+                  <a:srgbClr val="0D9488"/>
+                </a:solidFill>
+                <a:latin typeface="Trebuchet MS" pitchFamily="34" charset="0"/>
+                <a:ea typeface="Trebuchet MS" pitchFamily="34" charset="-122"/>
+                <a:cs typeface="Trebuchet MS" pitchFamily="34" charset="-120"/>
+              </a:rPr>
+              <a:t>·</a:t>
+            </a:r>
+            <a:endParaRPr lang="en-US" sz="1600" dirty="0"/>
+          </a:p>
+        </p:txBody>
+      </p:sp>
+      <p:sp>
+        <p:nvSpPr>
+          <p:cNvPr id="37" name="Shape 35"/>
+          <p:cNvSpPr/>
+          <p:nvPr/>
+        </p:nvSpPr>
+        <p:spPr>
+          <a:xfrm>
+            <a:off x="6858000" y="3364992"/>
+            <a:ext cx="1554480" cy="475488"/>
+          </a:xfrm>
+          <a:prstGeom prst="rect">
+            <a:avLst>
+              <a:gd name="adj" fmla="val 9615"/>
+            </a:avLst>
+          </a:prstGeom>
+          <a:solidFill>
+            <a:srgbClr val="FFFFFF"/>
+          </a:solidFill>
+          <a:ln w="12700">
+            <a:solidFill>
+              <a:srgbClr val="0D9488"/>
+            </a:solidFill>
+            <a:prstDash val="solid"/>
+          </a:ln>
+        </p:spPr>
+      </p:sp>
+      <p:sp>
+        <p:nvSpPr>
+          <p:cNvPr id="38" name="Text 36"/>
+          <p:cNvSpPr/>
+          <p:nvPr/>
+        </p:nvSpPr>
+        <p:spPr>
+          <a:xfrm>
+            <a:off x="6858000" y="3364992"/>
+            <a:ext cx="1554480" cy="475488"/>
+          </a:xfrm>
+          <a:prstGeom prst="rect">
+            <a:avLst/>
+          </a:prstGeom>
+          <a:noFill/>
+          <a:ln/>
+        </p:spPr>
+        <p:txBody>
+          <a:bodyPr wrap="square" lIns="0" tIns="0" rIns="0" bIns="0" rtlCol="0" anchor="ctr"/>
+          <a:lstStyle/>
+          <a:p>
+            <a:pPr algn="ctr" indent="0" marL="0">
+              <a:buNone/>
+            </a:pPr>
+            <a:r>
+              <a:rPr lang="en-US" sz="1400" b="1" dirty="0">
+                <a:solidFill>
+                  <a:srgbClr val="0D9488"/>
+                </a:solidFill>
+                <a:latin typeface="Trebuchet MS" pitchFamily="34" charset="0"/>
+                <a:ea typeface="Trebuchet MS" pitchFamily="34" charset="-122"/>
+                <a:cs typeface="Trebuchet MS" pitchFamily="34" charset="-120"/>
+              </a:rPr>
+              <a:t>ic</a:t>
+            </a:r>
+            <a:endParaRPr lang="en-US" sz="1400" dirty="0"/>
+          </a:p>
+        </p:txBody>
+      </p:sp>
+      <p:sp>
+        <p:nvSpPr>
+          <p:cNvPr id="39" name="Shape 37"/>
           <p:cNvSpPr/>
           <p:nvPr/>
         </p:nvSpPr>
@@ -27932,7 +28763,7 @@
       </p:sp>
       <p:sp>
         <p:nvSpPr>
-          <p:cNvPr id="34" name="Text 32"/>
+          <p:cNvPr id="40" name="Text 38"/>
           <p:cNvSpPr/>
           <p:nvPr/>
         </p:nvSpPr>
@@ -27971,18 +28802,18 @@
       </p:sp>
       <p:sp>
         <p:nvSpPr>
-          <p:cNvPr id="35" name="Shape 33"/>
+          <p:cNvPr id="41" name="Shape 39"/>
           <p:cNvSpPr/>
           <p:nvPr/>
         </p:nvSpPr>
         <p:spPr>
           <a:xfrm>
             <a:off x="1874520" y="4096512"/>
-            <a:ext cx="6903720" cy="804672"/>
+            <a:ext cx="6903720" cy="658368"/>
           </a:xfrm>
           <a:prstGeom prst="rect">
             <a:avLst>
-              <a:gd name="adj" fmla="val 6818"/>
+              <a:gd name="adj" fmla="val 8333"/>
             </a:avLst>
           </a:prstGeom>
           <a:solidFill>
@@ -27998,18 +28829,18 @@
       </p:sp>
       <p:sp>
         <p:nvSpPr>
-          <p:cNvPr id="36" name="Shape 34"/>
-          <p:cNvSpPr/>
-          <p:nvPr/>
-        </p:nvSpPr>
-        <p:spPr>
-          <a:xfrm>
-            <a:off x="2023872" y="4169664"/>
-            <a:ext cx="685800" cy="384048"/>
+          <p:cNvPr id="42" name="Shape 40"/>
+          <p:cNvSpPr/>
+          <p:nvPr/>
+        </p:nvSpPr>
+        <p:spPr>
+          <a:xfrm>
+            <a:off x="1951330" y="4169664"/>
+            <a:ext cx="676656" cy="475488"/>
           </a:xfrm>
           <a:prstGeom prst="rect">
             <a:avLst>
-              <a:gd name="adj" fmla="val 9524"/>
+              <a:gd name="adj" fmla="val 7692"/>
             </a:avLst>
           </a:prstGeom>
           <a:solidFill>
@@ -28025,14 +28856,14 @@
       </p:sp>
       <p:sp>
         <p:nvSpPr>
-          <p:cNvPr id="37" name="Text 35"/>
-          <p:cNvSpPr/>
-          <p:nvPr/>
-        </p:nvSpPr>
-        <p:spPr>
-          <a:xfrm>
-            <a:off x="2023872" y="4169664"/>
-            <a:ext cx="685800" cy="384048"/>
+          <p:cNvPr id="43" name="Text 41"/>
+          <p:cNvSpPr/>
+          <p:nvPr/>
+        </p:nvSpPr>
+        <p:spPr>
+          <a:xfrm>
+            <a:off x="1951330" y="4169664"/>
+            <a:ext cx="676656" cy="475488"/>
           </a:xfrm>
           <a:prstGeom prst="rect">
             <a:avLst/>
@@ -28064,18 +28895,18 @@
       </p:sp>
       <p:sp>
         <p:nvSpPr>
-          <p:cNvPr id="38" name="Shape 36"/>
-          <p:cNvSpPr/>
-          <p:nvPr/>
-        </p:nvSpPr>
-        <p:spPr>
-          <a:xfrm>
-            <a:off x="2831592" y="4169664"/>
-            <a:ext cx="685800" cy="384048"/>
+          <p:cNvPr id="44" name="Shape 42"/>
+          <p:cNvSpPr/>
+          <p:nvPr/>
+        </p:nvSpPr>
+        <p:spPr>
+          <a:xfrm>
+            <a:off x="2677363" y="4169664"/>
+            <a:ext cx="676656" cy="475488"/>
           </a:xfrm>
           <a:prstGeom prst="rect">
             <a:avLst>
-              <a:gd name="adj" fmla="val 9524"/>
+              <a:gd name="adj" fmla="val 7692"/>
             </a:avLst>
           </a:prstGeom>
           <a:solidFill>
@@ -28091,14 +28922,14 @@
       </p:sp>
       <p:sp>
         <p:nvSpPr>
-          <p:cNvPr id="39" name="Text 37"/>
-          <p:cNvSpPr/>
-          <p:nvPr/>
-        </p:nvSpPr>
-        <p:spPr>
-          <a:xfrm>
-            <a:off x="2831592" y="4169664"/>
-            <a:ext cx="685800" cy="384048"/>
+          <p:cNvPr id="45" name="Text 43"/>
+          <p:cNvSpPr/>
+          <p:nvPr/>
+        </p:nvSpPr>
+        <p:spPr>
+          <a:xfrm>
+            <a:off x="2677363" y="4169664"/>
+            <a:ext cx="676656" cy="475488"/>
           </a:xfrm>
           <a:prstGeom prst="rect">
             <a:avLst/>
@@ -28122,7 +28953,7 @@
                 <a:ea typeface="Trebuchet MS" pitchFamily="34" charset="-122"/>
                 <a:cs typeface="Trebuchet MS" pitchFamily="34" charset="-120"/>
               </a:rPr>
-              <a:t>e</a:t>
+              <a:t>o</a:t>
             </a:r>
             <a:endParaRPr lang="en-US" sz="900" dirty="0"/>
           </a:p>
@@ -28130,18 +28961,18 @@
       </p:sp>
       <p:sp>
         <p:nvSpPr>
-          <p:cNvPr id="40" name="Shape 38"/>
-          <p:cNvSpPr/>
-          <p:nvPr/>
-        </p:nvSpPr>
-        <p:spPr>
-          <a:xfrm>
-            <a:off x="3639312" y="4169664"/>
-            <a:ext cx="685800" cy="384048"/>
+          <p:cNvPr id="46" name="Shape 44"/>
+          <p:cNvSpPr/>
+          <p:nvPr/>
+        </p:nvSpPr>
+        <p:spPr>
+          <a:xfrm>
+            <a:off x="3403397" y="4169664"/>
+            <a:ext cx="676656" cy="475488"/>
           </a:xfrm>
           <a:prstGeom prst="rect">
             <a:avLst>
-              <a:gd name="adj" fmla="val 9524"/>
+              <a:gd name="adj" fmla="val 7692"/>
             </a:avLst>
           </a:prstGeom>
           <a:solidFill>
@@ -28157,14 +28988,14 @@
       </p:sp>
       <p:sp>
         <p:nvSpPr>
-          <p:cNvPr id="41" name="Text 39"/>
-          <p:cNvSpPr/>
-          <p:nvPr/>
-        </p:nvSpPr>
-        <p:spPr>
-          <a:xfrm>
-            <a:off x="3639312" y="4169664"/>
-            <a:ext cx="685800" cy="384048"/>
+          <p:cNvPr id="47" name="Text 45"/>
+          <p:cNvSpPr/>
+          <p:nvPr/>
+        </p:nvSpPr>
+        <p:spPr>
+          <a:xfrm>
+            <a:off x="3403397" y="4169664"/>
+            <a:ext cx="676656" cy="475488"/>
           </a:xfrm>
           <a:prstGeom prst="rect">
             <a:avLst/>
@@ -28188,7 +29019,7 @@
                 <a:ea typeface="Trebuchet MS" pitchFamily="34" charset="-122"/>
                 <a:cs typeface="Trebuchet MS" pitchFamily="34" charset="-120"/>
               </a:rPr>
-              <a:t>g</a:t>
+              <a:t>n</a:t>
             </a:r>
             <a:endParaRPr lang="en-US" sz="900" dirty="0"/>
           </a:p>
@@ -28196,18 +29027,18 @@
       </p:sp>
       <p:sp>
         <p:nvSpPr>
-          <p:cNvPr id="42" name="Shape 40"/>
-          <p:cNvSpPr/>
-          <p:nvPr/>
-        </p:nvSpPr>
-        <p:spPr>
-          <a:xfrm>
-            <a:off x="4447032" y="4169664"/>
-            <a:ext cx="685800" cy="384048"/>
+          <p:cNvPr id="48" name="Shape 46"/>
+          <p:cNvSpPr/>
+          <p:nvPr/>
+        </p:nvSpPr>
+        <p:spPr>
+          <a:xfrm>
+            <a:off x="4129430" y="4169664"/>
+            <a:ext cx="676656" cy="475488"/>
           </a:xfrm>
           <a:prstGeom prst="rect">
             <a:avLst>
-              <a:gd name="adj" fmla="val 9524"/>
+              <a:gd name="adj" fmla="val 7692"/>
             </a:avLst>
           </a:prstGeom>
           <a:solidFill>
@@ -28223,14 +29054,14 @@
       </p:sp>
       <p:sp>
         <p:nvSpPr>
-          <p:cNvPr id="43" name="Text 41"/>
-          <p:cNvSpPr/>
-          <p:nvPr/>
-        </p:nvSpPr>
-        <p:spPr>
-          <a:xfrm>
-            <a:off x="4447032" y="4169664"/>
-            <a:ext cx="685800" cy="384048"/>
+          <p:cNvPr id="49" name="Text 47"/>
+          <p:cNvSpPr/>
+          <p:nvPr/>
+        </p:nvSpPr>
+        <p:spPr>
+          <a:xfrm>
+            <a:off x="4129430" y="4169664"/>
+            <a:ext cx="676656" cy="475488"/>
           </a:xfrm>
           <a:prstGeom prst="rect">
             <a:avLst/>
@@ -28254,7 +29085,7 @@
                 <a:ea typeface="Trebuchet MS" pitchFamily="34" charset="-122"/>
                 <a:cs typeface="Trebuchet MS" pitchFamily="34" charset="-120"/>
               </a:rPr>
-              <a:t>a</a:t>
+              <a:t>o</a:t>
             </a:r>
             <a:endParaRPr lang="en-US" sz="900" dirty="0"/>
           </a:p>
@@ -28262,18 +29093,18 @@
       </p:sp>
       <p:sp>
         <p:nvSpPr>
-          <p:cNvPr id="44" name="Shape 42"/>
-          <p:cNvSpPr/>
-          <p:nvPr/>
-        </p:nvSpPr>
-        <p:spPr>
-          <a:xfrm>
-            <a:off x="5254752" y="4169664"/>
-            <a:ext cx="685800" cy="384048"/>
+          <p:cNvPr id="50" name="Shape 48"/>
+          <p:cNvSpPr/>
+          <p:nvPr/>
+        </p:nvSpPr>
+        <p:spPr>
+          <a:xfrm>
+            <a:off x="4855464" y="4169664"/>
+            <a:ext cx="676656" cy="475488"/>
           </a:xfrm>
           <a:prstGeom prst="rect">
             <a:avLst>
-              <a:gd name="adj" fmla="val 9524"/>
+              <a:gd name="adj" fmla="val 7692"/>
             </a:avLst>
           </a:prstGeom>
           <a:solidFill>
@@ -28289,14 +29120,14 @@
       </p:sp>
       <p:sp>
         <p:nvSpPr>
-          <p:cNvPr id="45" name="Text 43"/>
-          <p:cNvSpPr/>
-          <p:nvPr/>
-        </p:nvSpPr>
-        <p:spPr>
-          <a:xfrm>
-            <a:off x="5254752" y="4169664"/>
-            <a:ext cx="685800" cy="384048"/>
+          <p:cNvPr id="51" name="Text 49"/>
+          <p:cNvSpPr/>
+          <p:nvPr/>
+        </p:nvSpPr>
+        <p:spPr>
+          <a:xfrm>
+            <a:off x="4855464" y="4169664"/>
+            <a:ext cx="676656" cy="475488"/>
           </a:xfrm>
           <a:prstGeom prst="rect">
             <a:avLst/>
@@ -28328,57 +29159,18 @@
       </p:sp>
       <p:sp>
         <p:nvSpPr>
-          <p:cNvPr id="46" name="Text 44"/>
-          <p:cNvSpPr/>
-          <p:nvPr/>
-        </p:nvSpPr>
-        <p:spPr>
-          <a:xfrm>
-            <a:off x="5254752" y="4572000"/>
-            <a:ext cx="685800" cy="219456"/>
-          </a:xfrm>
-          <a:prstGeom prst="rect">
-            <a:avLst/>
-          </a:prstGeom>
-          <a:noFill/>
-          <a:ln/>
-        </p:spPr>
-        <p:txBody>
-          <a:bodyPr wrap="square" lIns="0" tIns="0" rIns="0" bIns="0" rtlCol="0" anchor="t"/>
-          <a:lstStyle/>
-          <a:p>
-            <a:pPr algn="ctr" indent="0" marL="0">
-              <a:buNone/>
-            </a:pPr>
-            <a:r>
-              <a:rPr lang="en-US" sz="750" i="1" dirty="0">
-                <a:solidFill>
-                  <a:srgbClr val="94A3B8"/>
-                </a:solidFill>
-                <a:latin typeface="Calibri" pitchFamily="34" charset="0"/>
-                <a:ea typeface="Calibri" pitchFamily="34" charset="-122"/>
-                <a:cs typeface="Calibri" pitchFamily="34" charset="-120"/>
-              </a:rPr>
-              <a:t>/f/</a:t>
-            </a:r>
-            <a:endParaRPr lang="en-US" sz="750" dirty="0"/>
-          </a:p>
-        </p:txBody>
-      </p:sp>
-      <p:sp>
-        <p:nvSpPr>
-          <p:cNvPr id="47" name="Shape 45"/>
-          <p:cNvSpPr/>
-          <p:nvPr/>
-        </p:nvSpPr>
-        <p:spPr>
-          <a:xfrm>
-            <a:off x="6062472" y="4169664"/>
-            <a:ext cx="685800" cy="384048"/>
+          <p:cNvPr id="52" name="Shape 50"/>
+          <p:cNvSpPr/>
+          <p:nvPr/>
+        </p:nvSpPr>
+        <p:spPr>
+          <a:xfrm>
+            <a:off x="5581498" y="4169664"/>
+            <a:ext cx="676656" cy="475488"/>
           </a:xfrm>
           <a:prstGeom prst="rect">
             <a:avLst>
-              <a:gd name="adj" fmla="val 9524"/>
+              <a:gd name="adj" fmla="val 7692"/>
             </a:avLst>
           </a:prstGeom>
           <a:solidFill>
@@ -28394,14 +29186,14 @@
       </p:sp>
       <p:sp>
         <p:nvSpPr>
-          <p:cNvPr id="48" name="Text 46"/>
-          <p:cNvSpPr/>
-          <p:nvPr/>
-        </p:nvSpPr>
-        <p:spPr>
-          <a:xfrm>
-            <a:off x="6062472" y="4169664"/>
-            <a:ext cx="685800" cy="384048"/>
+          <p:cNvPr id="53" name="Text 51"/>
+          <p:cNvSpPr/>
+          <p:nvPr/>
+        </p:nvSpPr>
+        <p:spPr>
+          <a:xfrm>
+            <a:off x="5581498" y="4169664"/>
+            <a:ext cx="676656" cy="475488"/>
           </a:xfrm>
           <a:prstGeom prst="rect">
             <a:avLst/>
@@ -28433,18 +29225,18 @@
       </p:sp>
       <p:sp>
         <p:nvSpPr>
-          <p:cNvPr id="49" name="Shape 47"/>
-          <p:cNvSpPr/>
-          <p:nvPr/>
-        </p:nvSpPr>
-        <p:spPr>
-          <a:xfrm>
-            <a:off x="6870192" y="4169664"/>
-            <a:ext cx="685800" cy="384048"/>
+          <p:cNvPr id="54" name="Shape 52"/>
+          <p:cNvSpPr/>
+          <p:nvPr/>
+        </p:nvSpPr>
+        <p:spPr>
+          <a:xfrm>
+            <a:off x="6307531" y="4169664"/>
+            <a:ext cx="676656" cy="475488"/>
           </a:xfrm>
           <a:prstGeom prst="rect">
             <a:avLst>
-              <a:gd name="adj" fmla="val 9524"/>
+              <a:gd name="adj" fmla="val 7692"/>
             </a:avLst>
           </a:prstGeom>
           <a:solidFill>
@@ -28460,14 +29252,14 @@
       </p:sp>
       <p:sp>
         <p:nvSpPr>
-          <p:cNvPr id="50" name="Text 48"/>
-          <p:cNvSpPr/>
-          <p:nvPr/>
-        </p:nvSpPr>
-        <p:spPr>
-          <a:xfrm>
-            <a:off x="6870192" y="4169664"/>
-            <a:ext cx="685800" cy="384048"/>
+          <p:cNvPr id="55" name="Text 53"/>
+          <p:cNvSpPr/>
+          <p:nvPr/>
+        </p:nvSpPr>
+        <p:spPr>
+          <a:xfrm>
+            <a:off x="6307531" y="4169664"/>
+            <a:ext cx="676656" cy="475488"/>
           </a:xfrm>
           <a:prstGeom prst="rect">
             <a:avLst/>
@@ -28499,18 +29291,18 @@
       </p:sp>
       <p:sp>
         <p:nvSpPr>
-          <p:cNvPr id="51" name="Shape 49"/>
-          <p:cNvSpPr/>
-          <p:nvPr/>
-        </p:nvSpPr>
-        <p:spPr>
-          <a:xfrm>
-            <a:off x="7677912" y="4169664"/>
-            <a:ext cx="685800" cy="384048"/>
+          <p:cNvPr id="56" name="Shape 54"/>
+          <p:cNvSpPr/>
+          <p:nvPr/>
+        </p:nvSpPr>
+        <p:spPr>
+          <a:xfrm>
+            <a:off x="7033565" y="4169664"/>
+            <a:ext cx="676656" cy="475488"/>
           </a:xfrm>
           <a:prstGeom prst="rect">
             <a:avLst>
-              <a:gd name="adj" fmla="val 9524"/>
+              <a:gd name="adj" fmla="val 7692"/>
             </a:avLst>
           </a:prstGeom>
           <a:solidFill>
@@ -28526,14 +29318,14 @@
       </p:sp>
       <p:sp>
         <p:nvSpPr>
-          <p:cNvPr id="52" name="Text 50"/>
-          <p:cNvSpPr/>
-          <p:nvPr/>
-        </p:nvSpPr>
-        <p:spPr>
-          <a:xfrm>
-            <a:off x="7677912" y="4169664"/>
-            <a:ext cx="685800" cy="384048"/>
+          <p:cNvPr id="57" name="Text 55"/>
+          <p:cNvSpPr/>
+          <p:nvPr/>
+        </p:nvSpPr>
+        <p:spPr>
+          <a:xfrm>
+            <a:off x="7033565" y="4169664"/>
+            <a:ext cx="676656" cy="475488"/>
           </a:xfrm>
           <a:prstGeom prst="rect">
             <a:avLst/>
@@ -28557,7 +29349,73 @@
                 <a:ea typeface="Trebuchet MS" pitchFamily="34" charset="-122"/>
                 <a:cs typeface="Trebuchet MS" pitchFamily="34" charset="-120"/>
               </a:rPr>
-              <a:t>e</a:t>
+              <a:t>i</a:t>
+            </a:r>
+            <a:endParaRPr lang="en-US" sz="900" dirty="0"/>
+          </a:p>
+        </p:txBody>
+      </p:sp>
+      <p:sp>
+        <p:nvSpPr>
+          <p:cNvPr id="58" name="Shape 56"/>
+          <p:cNvSpPr/>
+          <p:nvPr/>
+        </p:nvSpPr>
+        <p:spPr>
+          <a:xfrm>
+            <a:off x="7759598" y="4169664"/>
+            <a:ext cx="676656" cy="475488"/>
+          </a:xfrm>
+          <a:prstGeom prst="rect">
+            <a:avLst>
+              <a:gd name="adj" fmla="val 7692"/>
+            </a:avLst>
+          </a:prstGeom>
+          <a:solidFill>
+            <a:srgbClr val="FFFFFF"/>
+          </a:solidFill>
+          <a:ln w="12700">
+            <a:solidFill>
+              <a:srgbClr val="DB2777"/>
+            </a:solidFill>
+            <a:prstDash val="solid"/>
+          </a:ln>
+        </p:spPr>
+      </p:sp>
+      <p:sp>
+        <p:nvSpPr>
+          <p:cNvPr id="59" name="Text 57"/>
+          <p:cNvSpPr/>
+          <p:nvPr/>
+        </p:nvSpPr>
+        <p:spPr>
+          <a:xfrm>
+            <a:off x="7759598" y="4169664"/>
+            <a:ext cx="676656" cy="475488"/>
+          </a:xfrm>
+          <a:prstGeom prst="rect">
+            <a:avLst/>
+          </a:prstGeom>
+          <a:noFill/>
+          <a:ln/>
+        </p:spPr>
+        <p:txBody>
+          <a:bodyPr wrap="square" lIns="0" tIns="0" rIns="0" bIns="0" rtlCol="0" anchor="ctr"/>
+          <a:lstStyle/>
+          <a:p>
+            <a:pPr algn="ctr" indent="0" marL="0">
+              <a:buNone/>
+            </a:pPr>
+            <a:r>
+              <a:rPr lang="en-US" sz="900" b="1" dirty="0">
+                <a:solidFill>
+                  <a:srgbClr val="9D174D"/>
+                </a:solidFill>
+                <a:latin typeface="Trebuchet MS" pitchFamily="34" charset="0"/>
+                <a:ea typeface="Trebuchet MS" pitchFamily="34" charset="-122"/>
+                <a:cs typeface="Trebuchet MS" pitchFamily="34" charset="-120"/>
+              </a:rPr>
+              <a:t>c</a:t>
             </a:r>
             <a:endParaRPr lang="en-US" sz="900" dirty="0"/>
           </a:p>
@@ -28849,7 +29707,7 @@
                 <a:ea typeface="Calibri" pitchFamily="34" charset="-122"/>
                 <a:cs typeface="Calibri" pitchFamily="34" charset="-120"/>
               </a:rPr>
-              <a:t>Word Labs  •  wordlabs.app  •  Root: 'phone' = sound, voice</a:t>
+              <a:t>Word Labs  •  wordlabs.app  •  Root: 'phone' = sound; a device for talking to someone</a:t>
             </a:r>
             <a:endParaRPr lang="en-US" sz="800" dirty="0"/>
           </a:p>
@@ -28988,7 +29846,7 @@
                 <a:ea typeface="Trebuchet MS" pitchFamily="34" charset="-122"/>
                 <a:cs typeface="Trebuchet MS" pitchFamily="34" charset="-120"/>
               </a:rPr>
-              <a:t>headphones</a:t>
+              <a:t>polyphonic</a:t>
             </a:r>
             <a:endParaRPr lang="en-US" sz="2800" dirty="0"/>
           </a:p>
@@ -29676,7 +30534,7 @@
                 <a:ea typeface="Calibri" pitchFamily="34" charset="-122"/>
                 <a:cs typeface="Calibri" pitchFamily="34" charset="-120"/>
               </a:rPr>
-              <a:t>Word Labs  •  wordlabs.app  •  Root: 'phone' = sound, voice</a:t>
+              <a:t>Word Labs  •  wordlabs.app  •  Root: 'phone' = sound; a device for talking to someone</a:t>
             </a:r>
             <a:endParaRPr lang="en-US" sz="800" dirty="0"/>
           </a:p>
@@ -29815,7 +30673,7 @@
                 <a:ea typeface="Trebuchet MS" pitchFamily="34" charset="-122"/>
                 <a:cs typeface="Trebuchet MS" pitchFamily="34" charset="-120"/>
               </a:rPr>
-              <a:t>headphones</a:t>
+              <a:t>polyphonic</a:t>
             </a:r>
             <a:endParaRPr lang="en-US" sz="2800" dirty="0"/>
           </a:p>
@@ -29954,7 +30812,7 @@
                 <a:ea typeface="Trebuchet MS" pitchFamily="34" charset="-122"/>
                 <a:cs typeface="Trebuchet MS" pitchFamily="34" charset="-120"/>
               </a:rPr>
-              <a:t>head</a:t>
+              <a:t>poly</a:t>
             </a:r>
             <a:endParaRPr lang="en-US" sz="1300" dirty="0"/>
           </a:p>
@@ -29993,7 +30851,7 @@
                 <a:ea typeface="Calibri" pitchFamily="34" charset="-122"/>
                 <a:cs typeface="Calibri" pitchFamily="34" charset="-120"/>
               </a:rPr>
-              <a:t>top of the body</a:t>
+              <a:t>many; much</a:t>
             </a:r>
             <a:endParaRPr lang="en-US" sz="850" dirty="0"/>
           </a:p>
@@ -30105,7 +30963,7 @@
                 <a:ea typeface="Calibri" pitchFamily="34" charset="-122"/>
                 <a:cs typeface="Calibri" pitchFamily="34" charset="-120"/>
               </a:rPr>
-              <a:t>sound, voice</a:t>
+              <a:t>sound; a device for talking to someone</a:t>
             </a:r>
             <a:endParaRPr lang="en-US" sz="850" dirty="0"/>
           </a:p>
@@ -30178,7 +31036,7 @@
                 <a:ea typeface="Trebuchet MS" pitchFamily="34" charset="-122"/>
                 <a:cs typeface="Trebuchet MS" pitchFamily="34" charset="-120"/>
               </a:rPr>
-              <a:t>s</a:t>
+              <a:t>ic</a:t>
             </a:r>
             <a:endParaRPr lang="en-US" sz="1300" dirty="0"/>
           </a:p>
@@ -30217,7 +31075,7 @@
                 <a:ea typeface="Calibri" pitchFamily="34" charset="-122"/>
                 <a:cs typeface="Calibri" pitchFamily="34" charset="-120"/>
               </a:rPr>
-              <a:t>more than one</a:t>
+              <a:t>related to</a:t>
             </a:r>
             <a:endParaRPr lang="en-US" sz="850" dirty="0"/>
           </a:p>
@@ -30773,7 +31631,7 @@
                 <a:ea typeface="Calibri" pitchFamily="34" charset="-122"/>
                 <a:cs typeface="Calibri" pitchFamily="34" charset="-120"/>
               </a:rPr>
-              <a:t>Word Labs  •  wordlabs.app  •  Root: 'phone' = sound, voice</a:t>
+              <a:t>Word Labs  •  wordlabs.app  •  Root: 'phone' = sound; a device for talking to someone</a:t>
             </a:r>
             <a:endParaRPr lang="en-US" sz="800" dirty="0"/>
           </a:p>
@@ -30912,7 +31770,7 @@
                 <a:ea typeface="Trebuchet MS" pitchFamily="34" charset="-122"/>
                 <a:cs typeface="Trebuchet MS" pitchFamily="34" charset="-120"/>
               </a:rPr>
-              <a:t>headphones</a:t>
+              <a:t>polyphonic</a:t>
             </a:r>
             <a:endParaRPr lang="en-US" sz="2800" dirty="0"/>
           </a:p>
@@ -31051,7 +31909,7 @@
                 <a:ea typeface="Trebuchet MS" pitchFamily="34" charset="-122"/>
                 <a:cs typeface="Trebuchet MS" pitchFamily="34" charset="-120"/>
               </a:rPr>
-              <a:t>head</a:t>
+              <a:t>poly</a:t>
             </a:r>
             <a:endParaRPr lang="en-US" sz="1300" dirty="0"/>
           </a:p>
@@ -31090,7 +31948,7 @@
                 <a:ea typeface="Calibri" pitchFamily="34" charset="-122"/>
                 <a:cs typeface="Calibri" pitchFamily="34" charset="-120"/>
               </a:rPr>
-              <a:t>top of the body</a:t>
+              <a:t>many; much</a:t>
             </a:r>
             <a:endParaRPr lang="en-US" sz="850" dirty="0"/>
           </a:p>
@@ -31202,7 +32060,7 @@
                 <a:ea typeface="Calibri" pitchFamily="34" charset="-122"/>
                 <a:cs typeface="Calibri" pitchFamily="34" charset="-120"/>
               </a:rPr>
-              <a:t>sound, voice</a:t>
+              <a:t>sound; a device for talking to someone</a:t>
             </a:r>
             <a:endParaRPr lang="en-US" sz="850" dirty="0"/>
           </a:p>
@@ -31275,7 +32133,7 @@
                 <a:ea typeface="Trebuchet MS" pitchFamily="34" charset="-122"/>
                 <a:cs typeface="Trebuchet MS" pitchFamily="34" charset="-120"/>
               </a:rPr>
-              <a:t>s</a:t>
+              <a:t>ic</a:t>
             </a:r>
             <a:endParaRPr lang="en-US" sz="1300" dirty="0"/>
           </a:p>
@@ -31314,7 +32172,7 @@
                 <a:ea typeface="Calibri" pitchFamily="34" charset="-122"/>
                 <a:cs typeface="Calibri" pitchFamily="34" charset="-120"/>
               </a:rPr>
-              <a:t>more than one</a:t>
+              <a:t>related to</a:t>
             </a:r>
             <a:endParaRPr lang="en-US" sz="850" dirty="0"/>
           </a:p>
@@ -31421,8 +32279,8 @@
         </p:nvSpPr>
         <p:spPr>
           <a:xfrm>
-            <a:off x="2999232" y="3364992"/>
-            <a:ext cx="1645920" cy="475488"/>
+            <a:off x="1975104" y="3364992"/>
+            <a:ext cx="1554480" cy="475488"/>
           </a:xfrm>
           <a:prstGeom prst="rect">
             <a:avLst>
@@ -31448,8 +32306,8 @@
         </p:nvSpPr>
         <p:spPr>
           <a:xfrm>
-            <a:off x="2999232" y="3364992"/>
-            <a:ext cx="1645920" cy="475488"/>
+            <a:off x="1975104" y="3364992"/>
+            <a:ext cx="1554480" cy="475488"/>
           </a:xfrm>
           <a:prstGeom prst="rect">
             <a:avLst/>
@@ -31473,7 +32331,7 @@
                 <a:ea typeface="Trebuchet MS" pitchFamily="34" charset="-122"/>
                 <a:cs typeface="Trebuchet MS" pitchFamily="34" charset="-120"/>
               </a:rPr>
-              <a:t>head</a:t>
+              <a:t>pol</a:t>
             </a:r>
             <a:endParaRPr lang="en-US" sz="1400" dirty="0"/>
           </a:p>
@@ -31487,8 +32345,8 @@
         </p:nvSpPr>
         <p:spPr>
           <a:xfrm>
-            <a:off x="4645152" y="3364992"/>
-            <a:ext cx="1097280" cy="475488"/>
+            <a:off x="3529584" y="3364992"/>
+            <a:ext cx="73152" cy="475488"/>
           </a:xfrm>
           <a:prstGeom prst="rect">
             <a:avLst/>
@@ -31526,8 +32384,8 @@
         </p:nvSpPr>
         <p:spPr>
           <a:xfrm>
-            <a:off x="5742432" y="3364992"/>
-            <a:ext cx="1645920" cy="475488"/>
+            <a:off x="3602736" y="3364992"/>
+            <a:ext cx="1554480" cy="475488"/>
           </a:xfrm>
           <a:prstGeom prst="rect">
             <a:avLst>
@@ -31553,8 +32411,8 @@
         </p:nvSpPr>
         <p:spPr>
           <a:xfrm>
-            <a:off x="5742432" y="3364992"/>
-            <a:ext cx="1645920" cy="475488"/>
+            <a:off x="3602736" y="3364992"/>
+            <a:ext cx="1554480" cy="475488"/>
           </a:xfrm>
           <a:prstGeom prst="rect">
             <a:avLst/>
@@ -31578,7 +32436,7 @@
                 <a:ea typeface="Trebuchet MS" pitchFamily="34" charset="-122"/>
                 <a:cs typeface="Trebuchet MS" pitchFamily="34" charset="-120"/>
               </a:rPr>
-              <a:t>phones</a:t>
+              <a:t>y</a:t>
             </a:r>
             <a:endParaRPr lang="en-US" sz="1400" dirty="0"/>
           </a:p>
@@ -31586,7 +32444,217 @@
       </p:sp>
       <p:sp>
         <p:nvSpPr>
-          <p:cNvPr id="33" name="Shape 31"/>
+          <p:cNvPr id="33" name="Text 31"/>
+          <p:cNvSpPr/>
+          <p:nvPr/>
+        </p:nvSpPr>
+        <p:spPr>
+          <a:xfrm>
+            <a:off x="5157216" y="3364992"/>
+            <a:ext cx="73152" cy="475488"/>
+          </a:xfrm>
+          <a:prstGeom prst="rect">
+            <a:avLst/>
+          </a:prstGeom>
+          <a:noFill/>
+          <a:ln/>
+        </p:spPr>
+        <p:txBody>
+          <a:bodyPr wrap="square" lIns="0" tIns="0" rIns="0" bIns="0" rtlCol="0" anchor="ctr"/>
+          <a:lstStyle/>
+          <a:p>
+            <a:pPr algn="ctr" indent="0" marL="0">
+              <a:buNone/>
+            </a:pPr>
+            <a:r>
+              <a:rPr lang="en-US" sz="1600" b="1" dirty="0">
+                <a:solidFill>
+                  <a:srgbClr val="0D9488"/>
+                </a:solidFill>
+                <a:latin typeface="Trebuchet MS" pitchFamily="34" charset="0"/>
+                <a:ea typeface="Trebuchet MS" pitchFamily="34" charset="-122"/>
+                <a:cs typeface="Trebuchet MS" pitchFamily="34" charset="-120"/>
+              </a:rPr>
+              <a:t>·</a:t>
+            </a:r>
+            <a:endParaRPr lang="en-US" sz="1600" dirty="0"/>
+          </a:p>
+        </p:txBody>
+      </p:sp>
+      <p:sp>
+        <p:nvSpPr>
+          <p:cNvPr id="34" name="Shape 32"/>
+          <p:cNvSpPr/>
+          <p:nvPr/>
+        </p:nvSpPr>
+        <p:spPr>
+          <a:xfrm>
+            <a:off x="5230368" y="3364992"/>
+            <a:ext cx="1554480" cy="475488"/>
+          </a:xfrm>
+          <a:prstGeom prst="rect">
+            <a:avLst>
+              <a:gd name="adj" fmla="val 9615"/>
+            </a:avLst>
+          </a:prstGeom>
+          <a:solidFill>
+            <a:srgbClr val="FFFFFF"/>
+          </a:solidFill>
+          <a:ln w="12700">
+            <a:solidFill>
+              <a:srgbClr val="0D9488"/>
+            </a:solidFill>
+            <a:prstDash val="solid"/>
+          </a:ln>
+        </p:spPr>
+      </p:sp>
+      <p:sp>
+        <p:nvSpPr>
+          <p:cNvPr id="35" name="Text 33"/>
+          <p:cNvSpPr/>
+          <p:nvPr/>
+        </p:nvSpPr>
+        <p:spPr>
+          <a:xfrm>
+            <a:off x="5230368" y="3364992"/>
+            <a:ext cx="1554480" cy="475488"/>
+          </a:xfrm>
+          <a:prstGeom prst="rect">
+            <a:avLst/>
+          </a:prstGeom>
+          <a:noFill/>
+          <a:ln/>
+        </p:spPr>
+        <p:txBody>
+          <a:bodyPr wrap="square" lIns="0" tIns="0" rIns="0" bIns="0" rtlCol="0" anchor="ctr"/>
+          <a:lstStyle/>
+          <a:p>
+            <a:pPr algn="ctr" indent="0" marL="0">
+              <a:buNone/>
+            </a:pPr>
+            <a:r>
+              <a:rPr lang="en-US" sz="1400" b="1" dirty="0">
+                <a:solidFill>
+                  <a:srgbClr val="0D9488"/>
+                </a:solidFill>
+                <a:latin typeface="Trebuchet MS" pitchFamily="34" charset="0"/>
+                <a:ea typeface="Trebuchet MS" pitchFamily="34" charset="-122"/>
+                <a:cs typeface="Trebuchet MS" pitchFamily="34" charset="-120"/>
+              </a:rPr>
+              <a:t>phon</a:t>
+            </a:r>
+            <a:endParaRPr lang="en-US" sz="1400" dirty="0"/>
+          </a:p>
+        </p:txBody>
+      </p:sp>
+      <p:sp>
+        <p:nvSpPr>
+          <p:cNvPr id="36" name="Text 34"/>
+          <p:cNvSpPr/>
+          <p:nvPr/>
+        </p:nvSpPr>
+        <p:spPr>
+          <a:xfrm>
+            <a:off x="6784848" y="3364992"/>
+            <a:ext cx="73152" cy="475488"/>
+          </a:xfrm>
+          <a:prstGeom prst="rect">
+            <a:avLst/>
+          </a:prstGeom>
+          <a:noFill/>
+          <a:ln/>
+        </p:spPr>
+        <p:txBody>
+          <a:bodyPr wrap="square" lIns="0" tIns="0" rIns="0" bIns="0" rtlCol="0" anchor="ctr"/>
+          <a:lstStyle/>
+          <a:p>
+            <a:pPr algn="ctr" indent="0" marL="0">
+              <a:buNone/>
+            </a:pPr>
+            <a:r>
+              <a:rPr lang="en-US" sz="1600" b="1" dirty="0">
+                <a:solidFill>
+                  <a:srgbClr val="0D9488"/>
+                </a:solidFill>
+                <a:latin typeface="Trebuchet MS" pitchFamily="34" charset="0"/>
+                <a:ea typeface="Trebuchet MS" pitchFamily="34" charset="-122"/>
+                <a:cs typeface="Trebuchet MS" pitchFamily="34" charset="-120"/>
+              </a:rPr>
+              <a:t>·</a:t>
+            </a:r>
+            <a:endParaRPr lang="en-US" sz="1600" dirty="0"/>
+          </a:p>
+        </p:txBody>
+      </p:sp>
+      <p:sp>
+        <p:nvSpPr>
+          <p:cNvPr id="37" name="Shape 35"/>
+          <p:cNvSpPr/>
+          <p:nvPr/>
+        </p:nvSpPr>
+        <p:spPr>
+          <a:xfrm>
+            <a:off x="6858000" y="3364992"/>
+            <a:ext cx="1554480" cy="475488"/>
+          </a:xfrm>
+          <a:prstGeom prst="rect">
+            <a:avLst>
+              <a:gd name="adj" fmla="val 9615"/>
+            </a:avLst>
+          </a:prstGeom>
+          <a:solidFill>
+            <a:srgbClr val="FFFFFF"/>
+          </a:solidFill>
+          <a:ln w="12700">
+            <a:solidFill>
+              <a:srgbClr val="0D9488"/>
+            </a:solidFill>
+            <a:prstDash val="solid"/>
+          </a:ln>
+        </p:spPr>
+      </p:sp>
+      <p:sp>
+        <p:nvSpPr>
+          <p:cNvPr id="38" name="Text 36"/>
+          <p:cNvSpPr/>
+          <p:nvPr/>
+        </p:nvSpPr>
+        <p:spPr>
+          <a:xfrm>
+            <a:off x="6858000" y="3364992"/>
+            <a:ext cx="1554480" cy="475488"/>
+          </a:xfrm>
+          <a:prstGeom prst="rect">
+            <a:avLst/>
+          </a:prstGeom>
+          <a:noFill/>
+          <a:ln/>
+        </p:spPr>
+        <p:txBody>
+          <a:bodyPr wrap="square" lIns="0" tIns="0" rIns="0" bIns="0" rtlCol="0" anchor="ctr"/>
+          <a:lstStyle/>
+          <a:p>
+            <a:pPr algn="ctr" indent="0" marL="0">
+              <a:buNone/>
+            </a:pPr>
+            <a:r>
+              <a:rPr lang="en-US" sz="1400" b="1" dirty="0">
+                <a:solidFill>
+                  <a:srgbClr val="0D9488"/>
+                </a:solidFill>
+                <a:latin typeface="Trebuchet MS" pitchFamily="34" charset="0"/>
+                <a:ea typeface="Trebuchet MS" pitchFamily="34" charset="-122"/>
+                <a:cs typeface="Trebuchet MS" pitchFamily="34" charset="-120"/>
+              </a:rPr>
+              <a:t>ic</a:t>
+            </a:r>
+            <a:endParaRPr lang="en-US" sz="1400" dirty="0"/>
+          </a:p>
+        </p:txBody>
+      </p:sp>
+      <p:sp>
+        <p:nvSpPr>
+          <p:cNvPr id="39" name="Shape 37"/>
           <p:cNvSpPr/>
           <p:nvPr/>
         </p:nvSpPr>
@@ -31613,7 +32681,7 @@
       </p:sp>
       <p:sp>
         <p:nvSpPr>
-          <p:cNvPr id="34" name="Text 32"/>
+          <p:cNvPr id="40" name="Text 38"/>
           <p:cNvSpPr/>
           <p:nvPr/>
         </p:nvSpPr>
@@ -31652,7 +32720,7 @@
       </p:sp>
       <p:sp>
         <p:nvSpPr>
-          <p:cNvPr id="35" name="Shape 33"/>
+          <p:cNvPr id="41" name="Shape 39"/>
           <p:cNvSpPr/>
           <p:nvPr/>
         </p:nvSpPr>
@@ -31679,7 +32747,7 @@
       </p:sp>
       <p:sp>
         <p:nvSpPr>
-          <p:cNvPr id="36" name="Text 34"/>
+          <p:cNvPr id="42" name="Text 40"/>
           <p:cNvSpPr/>
           <p:nvPr/>
         </p:nvSpPr>
@@ -32002,7 +33070,7 @@
                 <a:ea typeface="Calibri" pitchFamily="34" charset="-122"/>
                 <a:cs typeface="Calibri" pitchFamily="34" charset="-120"/>
               </a:rPr>
-              <a:t>Word Labs  •  wordlabs.app  •  Root: 'phone' = sound, voice</a:t>
+              <a:t>Word Labs  •  wordlabs.app  •  Root: 'phone' = sound; a device for talking to someone</a:t>
             </a:r>
             <a:endParaRPr lang="en-US" sz="800" dirty="0"/>
           </a:p>
@@ -32141,7 +33209,7 @@
                 <a:ea typeface="Trebuchet MS" pitchFamily="34" charset="-122"/>
                 <a:cs typeface="Trebuchet MS" pitchFamily="34" charset="-120"/>
               </a:rPr>
-              <a:t>headphones</a:t>
+              <a:t>polyphonic</a:t>
             </a:r>
             <a:endParaRPr lang="en-US" sz="2800" dirty="0"/>
           </a:p>
@@ -32280,7 +33348,7 @@
                 <a:ea typeface="Trebuchet MS" pitchFamily="34" charset="-122"/>
                 <a:cs typeface="Trebuchet MS" pitchFamily="34" charset="-120"/>
               </a:rPr>
-              <a:t>head</a:t>
+              <a:t>poly</a:t>
             </a:r>
             <a:endParaRPr lang="en-US" sz="1300" dirty="0"/>
           </a:p>
@@ -32319,7 +33387,7 @@
                 <a:ea typeface="Calibri" pitchFamily="34" charset="-122"/>
                 <a:cs typeface="Calibri" pitchFamily="34" charset="-120"/>
               </a:rPr>
-              <a:t>top of the body</a:t>
+              <a:t>many; much</a:t>
             </a:r>
             <a:endParaRPr lang="en-US" sz="850" dirty="0"/>
           </a:p>
@@ -32431,7 +33499,7 @@
                 <a:ea typeface="Calibri" pitchFamily="34" charset="-122"/>
                 <a:cs typeface="Calibri" pitchFamily="34" charset="-120"/>
               </a:rPr>
-              <a:t>sound, voice</a:t>
+              <a:t>sound; a device for talking to someone</a:t>
             </a:r>
             <a:endParaRPr lang="en-US" sz="850" dirty="0"/>
           </a:p>
@@ -32504,7 +33572,7 @@
                 <a:ea typeface="Trebuchet MS" pitchFamily="34" charset="-122"/>
                 <a:cs typeface="Trebuchet MS" pitchFamily="34" charset="-120"/>
               </a:rPr>
-              <a:t>s</a:t>
+              <a:t>ic</a:t>
             </a:r>
             <a:endParaRPr lang="en-US" sz="1300" dirty="0"/>
           </a:p>
@@ -32543,7 +33611,7 @@
                 <a:ea typeface="Calibri" pitchFamily="34" charset="-122"/>
                 <a:cs typeface="Calibri" pitchFamily="34" charset="-120"/>
               </a:rPr>
-              <a:t>more than one</a:t>
+              <a:t>related to</a:t>
             </a:r>
             <a:endParaRPr lang="en-US" sz="850" dirty="0"/>
           </a:p>
@@ -32650,8 +33718,8 @@
         </p:nvSpPr>
         <p:spPr>
           <a:xfrm>
-            <a:off x="2999232" y="3364992"/>
-            <a:ext cx="1645920" cy="475488"/>
+            <a:off x="1975104" y="3364992"/>
+            <a:ext cx="1554480" cy="475488"/>
           </a:xfrm>
           <a:prstGeom prst="rect">
             <a:avLst>
@@ -32677,8 +33745,8 @@
         </p:nvSpPr>
         <p:spPr>
           <a:xfrm>
-            <a:off x="2999232" y="3364992"/>
-            <a:ext cx="1645920" cy="475488"/>
+            <a:off x="1975104" y="3364992"/>
+            <a:ext cx="1554480" cy="475488"/>
           </a:xfrm>
           <a:prstGeom prst="rect">
             <a:avLst/>
@@ -32702,7 +33770,7 @@
                 <a:ea typeface="Trebuchet MS" pitchFamily="34" charset="-122"/>
                 <a:cs typeface="Trebuchet MS" pitchFamily="34" charset="-120"/>
               </a:rPr>
-              <a:t>head</a:t>
+              <a:t>pol</a:t>
             </a:r>
             <a:endParaRPr lang="en-US" sz="1400" dirty="0"/>
           </a:p>
@@ -32716,8 +33784,8 @@
         </p:nvSpPr>
         <p:spPr>
           <a:xfrm>
-            <a:off x="4645152" y="3364992"/>
-            <a:ext cx="1097280" cy="475488"/>
+            <a:off x="3529584" y="3364992"/>
+            <a:ext cx="73152" cy="475488"/>
           </a:xfrm>
           <a:prstGeom prst="rect">
             <a:avLst/>
@@ -32755,8 +33823,8 @@
         </p:nvSpPr>
         <p:spPr>
           <a:xfrm>
-            <a:off x="5742432" y="3364992"/>
-            <a:ext cx="1645920" cy="475488"/>
+            <a:off x="3602736" y="3364992"/>
+            <a:ext cx="1554480" cy="475488"/>
           </a:xfrm>
           <a:prstGeom prst="rect">
             <a:avLst>
@@ -32782,8 +33850,8 @@
         </p:nvSpPr>
         <p:spPr>
           <a:xfrm>
-            <a:off x="5742432" y="3364992"/>
-            <a:ext cx="1645920" cy="475488"/>
+            <a:off x="3602736" y="3364992"/>
+            <a:ext cx="1554480" cy="475488"/>
           </a:xfrm>
           <a:prstGeom prst="rect">
             <a:avLst/>
@@ -32807,7 +33875,7 @@
                 <a:ea typeface="Trebuchet MS" pitchFamily="34" charset="-122"/>
                 <a:cs typeface="Trebuchet MS" pitchFamily="34" charset="-120"/>
               </a:rPr>
-              <a:t>phones</a:t>
+              <a:t>y</a:t>
             </a:r>
             <a:endParaRPr lang="en-US" sz="1400" dirty="0"/>
           </a:p>
@@ -32815,7 +33883,217 @@
       </p:sp>
       <p:sp>
         <p:nvSpPr>
-          <p:cNvPr id="33" name="Shape 31"/>
+          <p:cNvPr id="33" name="Text 31"/>
+          <p:cNvSpPr/>
+          <p:nvPr/>
+        </p:nvSpPr>
+        <p:spPr>
+          <a:xfrm>
+            <a:off x="5157216" y="3364992"/>
+            <a:ext cx="73152" cy="475488"/>
+          </a:xfrm>
+          <a:prstGeom prst="rect">
+            <a:avLst/>
+          </a:prstGeom>
+          <a:noFill/>
+          <a:ln/>
+        </p:spPr>
+        <p:txBody>
+          <a:bodyPr wrap="square" lIns="0" tIns="0" rIns="0" bIns="0" rtlCol="0" anchor="ctr"/>
+          <a:lstStyle/>
+          <a:p>
+            <a:pPr algn="ctr" indent="0" marL="0">
+              <a:buNone/>
+            </a:pPr>
+            <a:r>
+              <a:rPr lang="en-US" sz="1600" b="1" dirty="0">
+                <a:solidFill>
+                  <a:srgbClr val="0D9488"/>
+                </a:solidFill>
+                <a:latin typeface="Trebuchet MS" pitchFamily="34" charset="0"/>
+                <a:ea typeface="Trebuchet MS" pitchFamily="34" charset="-122"/>
+                <a:cs typeface="Trebuchet MS" pitchFamily="34" charset="-120"/>
+              </a:rPr>
+              <a:t>·</a:t>
+            </a:r>
+            <a:endParaRPr lang="en-US" sz="1600" dirty="0"/>
+          </a:p>
+        </p:txBody>
+      </p:sp>
+      <p:sp>
+        <p:nvSpPr>
+          <p:cNvPr id="34" name="Shape 32"/>
+          <p:cNvSpPr/>
+          <p:nvPr/>
+        </p:nvSpPr>
+        <p:spPr>
+          <a:xfrm>
+            <a:off x="5230368" y="3364992"/>
+            <a:ext cx="1554480" cy="475488"/>
+          </a:xfrm>
+          <a:prstGeom prst="rect">
+            <a:avLst>
+              <a:gd name="adj" fmla="val 9615"/>
+            </a:avLst>
+          </a:prstGeom>
+          <a:solidFill>
+            <a:srgbClr val="FFFFFF"/>
+          </a:solidFill>
+          <a:ln w="12700">
+            <a:solidFill>
+              <a:srgbClr val="0D9488"/>
+            </a:solidFill>
+            <a:prstDash val="solid"/>
+          </a:ln>
+        </p:spPr>
+      </p:sp>
+      <p:sp>
+        <p:nvSpPr>
+          <p:cNvPr id="35" name="Text 33"/>
+          <p:cNvSpPr/>
+          <p:nvPr/>
+        </p:nvSpPr>
+        <p:spPr>
+          <a:xfrm>
+            <a:off x="5230368" y="3364992"/>
+            <a:ext cx="1554480" cy="475488"/>
+          </a:xfrm>
+          <a:prstGeom prst="rect">
+            <a:avLst/>
+          </a:prstGeom>
+          <a:noFill/>
+          <a:ln/>
+        </p:spPr>
+        <p:txBody>
+          <a:bodyPr wrap="square" lIns="0" tIns="0" rIns="0" bIns="0" rtlCol="0" anchor="ctr"/>
+          <a:lstStyle/>
+          <a:p>
+            <a:pPr algn="ctr" indent="0" marL="0">
+              <a:buNone/>
+            </a:pPr>
+            <a:r>
+              <a:rPr lang="en-US" sz="1400" b="1" dirty="0">
+                <a:solidFill>
+                  <a:srgbClr val="0D9488"/>
+                </a:solidFill>
+                <a:latin typeface="Trebuchet MS" pitchFamily="34" charset="0"/>
+                <a:ea typeface="Trebuchet MS" pitchFamily="34" charset="-122"/>
+                <a:cs typeface="Trebuchet MS" pitchFamily="34" charset="-120"/>
+              </a:rPr>
+              <a:t>phon</a:t>
+            </a:r>
+            <a:endParaRPr lang="en-US" sz="1400" dirty="0"/>
+          </a:p>
+        </p:txBody>
+      </p:sp>
+      <p:sp>
+        <p:nvSpPr>
+          <p:cNvPr id="36" name="Text 34"/>
+          <p:cNvSpPr/>
+          <p:nvPr/>
+        </p:nvSpPr>
+        <p:spPr>
+          <a:xfrm>
+            <a:off x="6784848" y="3364992"/>
+            <a:ext cx="73152" cy="475488"/>
+          </a:xfrm>
+          <a:prstGeom prst="rect">
+            <a:avLst/>
+          </a:prstGeom>
+          <a:noFill/>
+          <a:ln/>
+        </p:spPr>
+        <p:txBody>
+          <a:bodyPr wrap="square" lIns="0" tIns="0" rIns="0" bIns="0" rtlCol="0" anchor="ctr"/>
+          <a:lstStyle/>
+          <a:p>
+            <a:pPr algn="ctr" indent="0" marL="0">
+              <a:buNone/>
+            </a:pPr>
+            <a:r>
+              <a:rPr lang="en-US" sz="1600" b="1" dirty="0">
+                <a:solidFill>
+                  <a:srgbClr val="0D9488"/>
+                </a:solidFill>
+                <a:latin typeface="Trebuchet MS" pitchFamily="34" charset="0"/>
+                <a:ea typeface="Trebuchet MS" pitchFamily="34" charset="-122"/>
+                <a:cs typeface="Trebuchet MS" pitchFamily="34" charset="-120"/>
+              </a:rPr>
+              <a:t>·</a:t>
+            </a:r>
+            <a:endParaRPr lang="en-US" sz="1600" dirty="0"/>
+          </a:p>
+        </p:txBody>
+      </p:sp>
+      <p:sp>
+        <p:nvSpPr>
+          <p:cNvPr id="37" name="Shape 35"/>
+          <p:cNvSpPr/>
+          <p:nvPr/>
+        </p:nvSpPr>
+        <p:spPr>
+          <a:xfrm>
+            <a:off x="6858000" y="3364992"/>
+            <a:ext cx="1554480" cy="475488"/>
+          </a:xfrm>
+          <a:prstGeom prst="rect">
+            <a:avLst>
+              <a:gd name="adj" fmla="val 9615"/>
+            </a:avLst>
+          </a:prstGeom>
+          <a:solidFill>
+            <a:srgbClr val="FFFFFF"/>
+          </a:solidFill>
+          <a:ln w="12700">
+            <a:solidFill>
+              <a:srgbClr val="0D9488"/>
+            </a:solidFill>
+            <a:prstDash val="solid"/>
+          </a:ln>
+        </p:spPr>
+      </p:sp>
+      <p:sp>
+        <p:nvSpPr>
+          <p:cNvPr id="38" name="Text 36"/>
+          <p:cNvSpPr/>
+          <p:nvPr/>
+        </p:nvSpPr>
+        <p:spPr>
+          <a:xfrm>
+            <a:off x="6858000" y="3364992"/>
+            <a:ext cx="1554480" cy="475488"/>
+          </a:xfrm>
+          <a:prstGeom prst="rect">
+            <a:avLst/>
+          </a:prstGeom>
+          <a:noFill/>
+          <a:ln/>
+        </p:spPr>
+        <p:txBody>
+          <a:bodyPr wrap="square" lIns="0" tIns="0" rIns="0" bIns="0" rtlCol="0" anchor="ctr"/>
+          <a:lstStyle/>
+          <a:p>
+            <a:pPr algn="ctr" indent="0" marL="0">
+              <a:buNone/>
+            </a:pPr>
+            <a:r>
+              <a:rPr lang="en-US" sz="1400" b="1" dirty="0">
+                <a:solidFill>
+                  <a:srgbClr val="0D9488"/>
+                </a:solidFill>
+                <a:latin typeface="Trebuchet MS" pitchFamily="34" charset="0"/>
+                <a:ea typeface="Trebuchet MS" pitchFamily="34" charset="-122"/>
+                <a:cs typeface="Trebuchet MS" pitchFamily="34" charset="-120"/>
+              </a:rPr>
+              <a:t>ic</a:t>
+            </a:r>
+            <a:endParaRPr lang="en-US" sz="1400" dirty="0"/>
+          </a:p>
+        </p:txBody>
+      </p:sp>
+      <p:sp>
+        <p:nvSpPr>
+          <p:cNvPr id="39" name="Shape 37"/>
           <p:cNvSpPr/>
           <p:nvPr/>
         </p:nvSpPr>
@@ -32842,7 +34120,7 @@
       </p:sp>
       <p:sp>
         <p:nvSpPr>
-          <p:cNvPr id="34" name="Text 32"/>
+          <p:cNvPr id="40" name="Text 38"/>
           <p:cNvSpPr/>
           <p:nvPr/>
         </p:nvSpPr>
@@ -32881,18 +34159,18 @@
       </p:sp>
       <p:sp>
         <p:nvSpPr>
-          <p:cNvPr id="35" name="Shape 33"/>
+          <p:cNvPr id="41" name="Shape 39"/>
           <p:cNvSpPr/>
           <p:nvPr/>
         </p:nvSpPr>
         <p:spPr>
           <a:xfrm>
             <a:off x="1874520" y="4096512"/>
-            <a:ext cx="6903720" cy="804672"/>
+            <a:ext cx="6903720" cy="658368"/>
           </a:xfrm>
           <a:prstGeom prst="rect">
             <a:avLst>
-              <a:gd name="adj" fmla="val 6818"/>
+              <a:gd name="adj" fmla="val 8333"/>
             </a:avLst>
           </a:prstGeom>
           <a:solidFill>
@@ -32908,18 +34186,18 @@
       </p:sp>
       <p:sp>
         <p:nvSpPr>
-          <p:cNvPr id="36" name="Shape 34"/>
-          <p:cNvSpPr/>
-          <p:nvPr/>
-        </p:nvSpPr>
-        <p:spPr>
-          <a:xfrm>
-            <a:off x="2023872" y="4169664"/>
-            <a:ext cx="685800" cy="384048"/>
+          <p:cNvPr id="42" name="Shape 40"/>
+          <p:cNvSpPr/>
+          <p:nvPr/>
+        </p:nvSpPr>
+        <p:spPr>
+          <a:xfrm>
+            <a:off x="1951330" y="4169664"/>
+            <a:ext cx="676656" cy="475488"/>
           </a:xfrm>
           <a:prstGeom prst="rect">
             <a:avLst>
-              <a:gd name="adj" fmla="val 9524"/>
+              <a:gd name="adj" fmla="val 7692"/>
             </a:avLst>
           </a:prstGeom>
           <a:solidFill>
@@ -32935,14 +34213,14 @@
       </p:sp>
       <p:sp>
         <p:nvSpPr>
-          <p:cNvPr id="37" name="Text 35"/>
-          <p:cNvSpPr/>
-          <p:nvPr/>
-        </p:nvSpPr>
-        <p:spPr>
-          <a:xfrm>
-            <a:off x="2023872" y="4169664"/>
-            <a:ext cx="685800" cy="384048"/>
+          <p:cNvPr id="43" name="Text 41"/>
+          <p:cNvSpPr/>
+          <p:nvPr/>
+        </p:nvSpPr>
+        <p:spPr>
+          <a:xfrm>
+            <a:off x="1951330" y="4169664"/>
+            <a:ext cx="676656" cy="475488"/>
           </a:xfrm>
           <a:prstGeom prst="rect">
             <a:avLst/>
@@ -32966,7 +34244,7 @@
                 <a:ea typeface="Trebuchet MS" pitchFamily="34" charset="-122"/>
                 <a:cs typeface="Trebuchet MS" pitchFamily="34" charset="-120"/>
               </a:rPr>
-              <a:t>h</a:t>
+              <a:t>p</a:t>
             </a:r>
             <a:endParaRPr lang="en-US" sz="900" dirty="0"/>
           </a:p>
@@ -32974,18 +34252,18 @@
       </p:sp>
       <p:sp>
         <p:nvSpPr>
-          <p:cNvPr id="38" name="Shape 36"/>
-          <p:cNvSpPr/>
-          <p:nvPr/>
-        </p:nvSpPr>
-        <p:spPr>
-          <a:xfrm>
-            <a:off x="2831592" y="4169664"/>
-            <a:ext cx="685800" cy="384048"/>
+          <p:cNvPr id="44" name="Shape 42"/>
+          <p:cNvSpPr/>
+          <p:nvPr/>
+        </p:nvSpPr>
+        <p:spPr>
+          <a:xfrm>
+            <a:off x="2677363" y="4169664"/>
+            <a:ext cx="676656" cy="475488"/>
           </a:xfrm>
           <a:prstGeom prst="rect">
             <a:avLst>
-              <a:gd name="adj" fmla="val 9524"/>
+              <a:gd name="adj" fmla="val 7692"/>
             </a:avLst>
           </a:prstGeom>
           <a:solidFill>
@@ -33001,14 +34279,14 @@
       </p:sp>
       <p:sp>
         <p:nvSpPr>
-          <p:cNvPr id="39" name="Text 37"/>
-          <p:cNvSpPr/>
-          <p:nvPr/>
-        </p:nvSpPr>
-        <p:spPr>
-          <a:xfrm>
-            <a:off x="2831592" y="4169664"/>
-            <a:ext cx="685800" cy="384048"/>
+          <p:cNvPr id="45" name="Text 43"/>
+          <p:cNvSpPr/>
+          <p:nvPr/>
+        </p:nvSpPr>
+        <p:spPr>
+          <a:xfrm>
+            <a:off x="2677363" y="4169664"/>
+            <a:ext cx="676656" cy="475488"/>
           </a:xfrm>
           <a:prstGeom prst="rect">
             <a:avLst/>
@@ -33032,7 +34310,7 @@
                 <a:ea typeface="Trebuchet MS" pitchFamily="34" charset="-122"/>
                 <a:cs typeface="Trebuchet MS" pitchFamily="34" charset="-120"/>
               </a:rPr>
-              <a:t>ea</a:t>
+              <a:t>o</a:t>
             </a:r>
             <a:endParaRPr lang="en-US" sz="900" dirty="0"/>
           </a:p>
@@ -33040,18 +34318,18 @@
       </p:sp>
       <p:sp>
         <p:nvSpPr>
-          <p:cNvPr id="40" name="Shape 38"/>
-          <p:cNvSpPr/>
-          <p:nvPr/>
-        </p:nvSpPr>
-        <p:spPr>
-          <a:xfrm>
-            <a:off x="3639312" y="4169664"/>
-            <a:ext cx="685800" cy="384048"/>
+          <p:cNvPr id="46" name="Shape 44"/>
+          <p:cNvSpPr/>
+          <p:nvPr/>
+        </p:nvSpPr>
+        <p:spPr>
+          <a:xfrm>
+            <a:off x="3403397" y="4169664"/>
+            <a:ext cx="676656" cy="475488"/>
           </a:xfrm>
           <a:prstGeom prst="rect">
             <a:avLst>
-              <a:gd name="adj" fmla="val 9524"/>
+              <a:gd name="adj" fmla="val 7692"/>
             </a:avLst>
           </a:prstGeom>
           <a:solidFill>
@@ -33067,14 +34345,14 @@
       </p:sp>
       <p:sp>
         <p:nvSpPr>
-          <p:cNvPr id="41" name="Text 39"/>
-          <p:cNvSpPr/>
-          <p:nvPr/>
-        </p:nvSpPr>
-        <p:spPr>
-          <a:xfrm>
-            <a:off x="3639312" y="4169664"/>
-            <a:ext cx="685800" cy="384048"/>
+          <p:cNvPr id="47" name="Text 45"/>
+          <p:cNvSpPr/>
+          <p:nvPr/>
+        </p:nvSpPr>
+        <p:spPr>
+          <a:xfrm>
+            <a:off x="3403397" y="4169664"/>
+            <a:ext cx="676656" cy="475488"/>
           </a:xfrm>
           <a:prstGeom prst="rect">
             <a:avLst/>
@@ -33098,7 +34376,7 @@
                 <a:ea typeface="Trebuchet MS" pitchFamily="34" charset="-122"/>
                 <a:cs typeface="Trebuchet MS" pitchFamily="34" charset="-120"/>
               </a:rPr>
-              <a:t>d</a:t>
+              <a:t>l</a:t>
             </a:r>
             <a:endParaRPr lang="en-US" sz="900" dirty="0"/>
           </a:p>
@@ -33106,18 +34384,18 @@
       </p:sp>
       <p:sp>
         <p:nvSpPr>
-          <p:cNvPr id="42" name="Shape 40"/>
-          <p:cNvSpPr/>
-          <p:nvPr/>
-        </p:nvSpPr>
-        <p:spPr>
-          <a:xfrm>
-            <a:off x="4447032" y="4169664"/>
-            <a:ext cx="685800" cy="384048"/>
+          <p:cNvPr id="48" name="Shape 46"/>
+          <p:cNvSpPr/>
+          <p:nvPr/>
+        </p:nvSpPr>
+        <p:spPr>
+          <a:xfrm>
+            <a:off x="4129430" y="4169664"/>
+            <a:ext cx="676656" cy="475488"/>
           </a:xfrm>
           <a:prstGeom prst="rect">
             <a:avLst>
-              <a:gd name="adj" fmla="val 9524"/>
+              <a:gd name="adj" fmla="val 7692"/>
             </a:avLst>
           </a:prstGeom>
           <a:solidFill>
@@ -33133,14 +34411,14 @@
       </p:sp>
       <p:sp>
         <p:nvSpPr>
-          <p:cNvPr id="43" name="Text 41"/>
-          <p:cNvSpPr/>
-          <p:nvPr/>
-        </p:nvSpPr>
-        <p:spPr>
-          <a:xfrm>
-            <a:off x="4447032" y="4169664"/>
-            <a:ext cx="685800" cy="384048"/>
+          <p:cNvPr id="49" name="Text 47"/>
+          <p:cNvSpPr/>
+          <p:nvPr/>
+        </p:nvSpPr>
+        <p:spPr>
+          <a:xfrm>
+            <a:off x="4129430" y="4169664"/>
+            <a:ext cx="676656" cy="475488"/>
           </a:xfrm>
           <a:prstGeom prst="rect">
             <a:avLst/>
@@ -33164,7 +34442,7 @@
                 <a:ea typeface="Trebuchet MS" pitchFamily="34" charset="-122"/>
                 <a:cs typeface="Trebuchet MS" pitchFamily="34" charset="-120"/>
               </a:rPr>
-              <a:t>ph</a:t>
+              <a:t>y</a:t>
             </a:r>
             <a:endParaRPr lang="en-US" sz="900" dirty="0"/>
           </a:p>
@@ -33172,57 +34450,18 @@
       </p:sp>
       <p:sp>
         <p:nvSpPr>
-          <p:cNvPr id="44" name="Text 42"/>
-          <p:cNvSpPr/>
-          <p:nvPr/>
-        </p:nvSpPr>
-        <p:spPr>
-          <a:xfrm>
-            <a:off x="4447032" y="4572000"/>
-            <a:ext cx="685800" cy="219456"/>
-          </a:xfrm>
-          <a:prstGeom prst="rect">
-            <a:avLst/>
-          </a:prstGeom>
-          <a:noFill/>
-          <a:ln/>
-        </p:spPr>
-        <p:txBody>
-          <a:bodyPr wrap="square" lIns="0" tIns="0" rIns="0" bIns="0" rtlCol="0" anchor="t"/>
-          <a:lstStyle/>
-          <a:p>
-            <a:pPr algn="ctr" indent="0" marL="0">
-              <a:buNone/>
-            </a:pPr>
-            <a:r>
-              <a:rPr lang="en-US" sz="750" i="1" dirty="0">
-                <a:solidFill>
-                  <a:srgbClr val="94A3B8"/>
-                </a:solidFill>
-                <a:latin typeface="Calibri" pitchFamily="34" charset="0"/>
-                <a:ea typeface="Calibri" pitchFamily="34" charset="-122"/>
-                <a:cs typeface="Calibri" pitchFamily="34" charset="-120"/>
-              </a:rPr>
-              <a:t>/f/</a:t>
-            </a:r>
-            <a:endParaRPr lang="en-US" sz="750" dirty="0"/>
-          </a:p>
-        </p:txBody>
-      </p:sp>
-      <p:sp>
-        <p:nvSpPr>
-          <p:cNvPr id="45" name="Shape 43"/>
-          <p:cNvSpPr/>
-          <p:nvPr/>
-        </p:nvSpPr>
-        <p:spPr>
-          <a:xfrm>
-            <a:off x="5254752" y="4169664"/>
-            <a:ext cx="685800" cy="384048"/>
+          <p:cNvPr id="50" name="Shape 48"/>
+          <p:cNvSpPr/>
+          <p:nvPr/>
+        </p:nvSpPr>
+        <p:spPr>
+          <a:xfrm>
+            <a:off x="4855464" y="4169664"/>
+            <a:ext cx="676656" cy="475488"/>
           </a:xfrm>
           <a:prstGeom prst="rect">
             <a:avLst>
-              <a:gd name="adj" fmla="val 9524"/>
+              <a:gd name="adj" fmla="val 7692"/>
             </a:avLst>
           </a:prstGeom>
           <a:solidFill>
@@ -33238,14 +34477,14 @@
       </p:sp>
       <p:sp>
         <p:nvSpPr>
-          <p:cNvPr id="46" name="Text 44"/>
-          <p:cNvSpPr/>
-          <p:nvPr/>
-        </p:nvSpPr>
-        <p:spPr>
-          <a:xfrm>
-            <a:off x="5254752" y="4169664"/>
-            <a:ext cx="685800" cy="384048"/>
+          <p:cNvPr id="51" name="Text 49"/>
+          <p:cNvSpPr/>
+          <p:nvPr/>
+        </p:nvSpPr>
+        <p:spPr>
+          <a:xfrm>
+            <a:off x="4855464" y="4169664"/>
+            <a:ext cx="676656" cy="475488"/>
           </a:xfrm>
           <a:prstGeom prst="rect">
             <a:avLst/>
@@ -33269,7 +34508,7 @@
                 <a:ea typeface="Trebuchet MS" pitchFamily="34" charset="-122"/>
                 <a:cs typeface="Trebuchet MS" pitchFamily="34" charset="-120"/>
               </a:rPr>
-              <a:t>o</a:t>
+              <a:t>ph</a:t>
             </a:r>
             <a:endParaRPr lang="en-US" sz="900" dirty="0"/>
           </a:p>
@@ -33277,18 +34516,18 @@
       </p:sp>
       <p:sp>
         <p:nvSpPr>
-          <p:cNvPr id="47" name="Shape 45"/>
-          <p:cNvSpPr/>
-          <p:nvPr/>
-        </p:nvSpPr>
-        <p:spPr>
-          <a:xfrm>
-            <a:off x="6062472" y="4169664"/>
-            <a:ext cx="685800" cy="384048"/>
+          <p:cNvPr id="52" name="Shape 50"/>
+          <p:cNvSpPr/>
+          <p:nvPr/>
+        </p:nvSpPr>
+        <p:spPr>
+          <a:xfrm>
+            <a:off x="5581498" y="4169664"/>
+            <a:ext cx="676656" cy="475488"/>
           </a:xfrm>
           <a:prstGeom prst="rect">
             <a:avLst>
-              <a:gd name="adj" fmla="val 9524"/>
+              <a:gd name="adj" fmla="val 7692"/>
             </a:avLst>
           </a:prstGeom>
           <a:solidFill>
@@ -33304,14 +34543,14 @@
       </p:sp>
       <p:sp>
         <p:nvSpPr>
-          <p:cNvPr id="48" name="Text 46"/>
-          <p:cNvSpPr/>
-          <p:nvPr/>
-        </p:nvSpPr>
-        <p:spPr>
-          <a:xfrm>
-            <a:off x="6062472" y="4169664"/>
-            <a:ext cx="685800" cy="384048"/>
+          <p:cNvPr id="53" name="Text 51"/>
+          <p:cNvSpPr/>
+          <p:nvPr/>
+        </p:nvSpPr>
+        <p:spPr>
+          <a:xfrm>
+            <a:off x="5581498" y="4169664"/>
+            <a:ext cx="676656" cy="475488"/>
           </a:xfrm>
           <a:prstGeom prst="rect">
             <a:avLst/>
@@ -33335,7 +34574,7 @@
                 <a:ea typeface="Trebuchet MS" pitchFamily="34" charset="-122"/>
                 <a:cs typeface="Trebuchet MS" pitchFamily="34" charset="-120"/>
               </a:rPr>
-              <a:t>n</a:t>
+              <a:t>o</a:t>
             </a:r>
             <a:endParaRPr lang="en-US" sz="900" dirty="0"/>
           </a:p>
@@ -33343,18 +34582,18 @@
       </p:sp>
       <p:sp>
         <p:nvSpPr>
-          <p:cNvPr id="49" name="Shape 47"/>
-          <p:cNvSpPr/>
-          <p:nvPr/>
-        </p:nvSpPr>
-        <p:spPr>
-          <a:xfrm>
-            <a:off x="6870192" y="4169664"/>
-            <a:ext cx="685800" cy="384048"/>
+          <p:cNvPr id="54" name="Shape 52"/>
+          <p:cNvSpPr/>
+          <p:nvPr/>
+        </p:nvSpPr>
+        <p:spPr>
+          <a:xfrm>
+            <a:off x="6307531" y="4169664"/>
+            <a:ext cx="676656" cy="475488"/>
           </a:xfrm>
           <a:prstGeom prst="rect">
             <a:avLst>
-              <a:gd name="adj" fmla="val 9524"/>
+              <a:gd name="adj" fmla="val 7692"/>
             </a:avLst>
           </a:prstGeom>
           <a:solidFill>
@@ -33370,14 +34609,14 @@
       </p:sp>
       <p:sp>
         <p:nvSpPr>
-          <p:cNvPr id="50" name="Text 48"/>
-          <p:cNvSpPr/>
-          <p:nvPr/>
-        </p:nvSpPr>
-        <p:spPr>
-          <a:xfrm>
-            <a:off x="6870192" y="4169664"/>
-            <a:ext cx="685800" cy="384048"/>
+          <p:cNvPr id="55" name="Text 53"/>
+          <p:cNvSpPr/>
+          <p:nvPr/>
+        </p:nvSpPr>
+        <p:spPr>
+          <a:xfrm>
+            <a:off x="6307531" y="4169664"/>
+            <a:ext cx="676656" cy="475488"/>
           </a:xfrm>
           <a:prstGeom prst="rect">
             <a:avLst/>
@@ -33401,7 +34640,7 @@
                 <a:ea typeface="Trebuchet MS" pitchFamily="34" charset="-122"/>
                 <a:cs typeface="Trebuchet MS" pitchFamily="34" charset="-120"/>
               </a:rPr>
-              <a:t>e</a:t>
+              <a:t>n</a:t>
             </a:r>
             <a:endParaRPr lang="en-US" sz="900" dirty="0"/>
           </a:p>
@@ -33409,18 +34648,18 @@
       </p:sp>
       <p:sp>
         <p:nvSpPr>
-          <p:cNvPr id="51" name="Shape 49"/>
-          <p:cNvSpPr/>
-          <p:nvPr/>
-        </p:nvSpPr>
-        <p:spPr>
-          <a:xfrm>
-            <a:off x="7677912" y="4169664"/>
-            <a:ext cx="685800" cy="384048"/>
+          <p:cNvPr id="56" name="Shape 54"/>
+          <p:cNvSpPr/>
+          <p:nvPr/>
+        </p:nvSpPr>
+        <p:spPr>
+          <a:xfrm>
+            <a:off x="7033565" y="4169664"/>
+            <a:ext cx="676656" cy="475488"/>
           </a:xfrm>
           <a:prstGeom prst="rect">
             <a:avLst>
-              <a:gd name="adj" fmla="val 9524"/>
+              <a:gd name="adj" fmla="val 7692"/>
             </a:avLst>
           </a:prstGeom>
           <a:solidFill>
@@ -33436,14 +34675,14 @@
       </p:sp>
       <p:sp>
         <p:nvSpPr>
-          <p:cNvPr id="52" name="Text 50"/>
-          <p:cNvSpPr/>
-          <p:nvPr/>
-        </p:nvSpPr>
-        <p:spPr>
-          <a:xfrm>
-            <a:off x="7677912" y="4169664"/>
-            <a:ext cx="685800" cy="384048"/>
+          <p:cNvPr id="57" name="Text 55"/>
+          <p:cNvSpPr/>
+          <p:nvPr/>
+        </p:nvSpPr>
+        <p:spPr>
+          <a:xfrm>
+            <a:off x="7033565" y="4169664"/>
+            <a:ext cx="676656" cy="475488"/>
           </a:xfrm>
           <a:prstGeom prst="rect">
             <a:avLst/>
@@ -33467,7 +34706,73 @@
                 <a:ea typeface="Trebuchet MS" pitchFamily="34" charset="-122"/>
                 <a:cs typeface="Trebuchet MS" pitchFamily="34" charset="-120"/>
               </a:rPr>
-              <a:t>s</a:t>
+              <a:t>i</a:t>
+            </a:r>
+            <a:endParaRPr lang="en-US" sz="900" dirty="0"/>
+          </a:p>
+        </p:txBody>
+      </p:sp>
+      <p:sp>
+        <p:nvSpPr>
+          <p:cNvPr id="58" name="Shape 56"/>
+          <p:cNvSpPr/>
+          <p:nvPr/>
+        </p:nvSpPr>
+        <p:spPr>
+          <a:xfrm>
+            <a:off x="7759598" y="4169664"/>
+            <a:ext cx="676656" cy="475488"/>
+          </a:xfrm>
+          <a:prstGeom prst="rect">
+            <a:avLst>
+              <a:gd name="adj" fmla="val 7692"/>
+            </a:avLst>
+          </a:prstGeom>
+          <a:solidFill>
+            <a:srgbClr val="FFFFFF"/>
+          </a:solidFill>
+          <a:ln w="12700">
+            <a:solidFill>
+              <a:srgbClr val="DB2777"/>
+            </a:solidFill>
+            <a:prstDash val="solid"/>
+          </a:ln>
+        </p:spPr>
+      </p:sp>
+      <p:sp>
+        <p:nvSpPr>
+          <p:cNvPr id="59" name="Text 57"/>
+          <p:cNvSpPr/>
+          <p:nvPr/>
+        </p:nvSpPr>
+        <p:spPr>
+          <a:xfrm>
+            <a:off x="7759598" y="4169664"/>
+            <a:ext cx="676656" cy="475488"/>
+          </a:xfrm>
+          <a:prstGeom prst="rect">
+            <a:avLst/>
+          </a:prstGeom>
+          <a:noFill/>
+          <a:ln/>
+        </p:spPr>
+        <p:txBody>
+          <a:bodyPr wrap="square" lIns="0" tIns="0" rIns="0" bIns="0" rtlCol="0" anchor="ctr"/>
+          <a:lstStyle/>
+          <a:p>
+            <a:pPr algn="ctr" indent="0" marL="0">
+              <a:buNone/>
+            </a:pPr>
+            <a:r>
+              <a:rPr lang="en-US" sz="900" b="1" dirty="0">
+                <a:solidFill>
+                  <a:srgbClr val="9D174D"/>
+                </a:solidFill>
+                <a:latin typeface="Trebuchet MS" pitchFamily="34" charset="0"/>
+                <a:ea typeface="Trebuchet MS" pitchFamily="34" charset="-122"/>
+                <a:cs typeface="Trebuchet MS" pitchFamily="34" charset="-120"/>
+              </a:rPr>
+              <a:t>c</a:t>
             </a:r>
             <a:endParaRPr lang="en-US" sz="900" dirty="0"/>
           </a:p>
@@ -33759,7 +35064,7 @@
                 <a:ea typeface="Calibri" pitchFamily="34" charset="-122"/>
                 <a:cs typeface="Calibri" pitchFamily="34" charset="-120"/>
               </a:rPr>
-              <a:t>Word Labs  •  wordlabs.app  •  Root: 'phone' = sound, voice</a:t>
+              <a:t>Word Labs  •  wordlabs.app  •  Root: 'phone' = sound; a device for talking to someone</a:t>
             </a:r>
             <a:endParaRPr lang="en-US" sz="800" dirty="0"/>
           </a:p>
@@ -34928,7 +36233,7 @@
                 <a:ea typeface="Calibri" pitchFamily="34" charset="-122"/>
                 <a:cs typeface="Calibri" pitchFamily="34" charset="-120"/>
               </a:rPr>
-              <a:t>Word Labs  •  wordlabs.app  •  Root: 'phone' = sound, voice</a:t>
+              <a:t>Word Labs  •  wordlabs.app  •  Root: 'phone' = sound; a device for talking to someone</a:t>
             </a:r>
             <a:endParaRPr lang="en-US" sz="800" dirty="0"/>
           </a:p>
@@ -35229,7 +36534,7 @@
                 <a:ea typeface="Trebuchet MS" pitchFamily="34" charset="-122"/>
                 <a:cs typeface="Trebuchet MS" pitchFamily="34" charset="-120"/>
               </a:rPr>
-              <a:t>micro-</a:t>
+              <a:t>mega-</a:t>
             </a:r>
             <a:endParaRPr lang="en-US" sz="1300" dirty="0"/>
           </a:p>
@@ -35357,7 +36662,7 @@
                 <a:ea typeface="Trebuchet MS" pitchFamily="34" charset="-122"/>
                 <a:cs typeface="Trebuchet MS" pitchFamily="34" charset="-120"/>
               </a:rPr>
-              <a:t>-ics</a:t>
+              <a:t>-s</a:t>
             </a:r>
             <a:endParaRPr lang="en-US" sz="1300" dirty="0"/>
           </a:p>
@@ -35421,7 +36726,7 @@
                 <a:ea typeface="Trebuchet MS" pitchFamily="34" charset="-122"/>
                 <a:cs typeface="Trebuchet MS" pitchFamily="34" charset="-120"/>
               </a:rPr>
-              <a:t>tele-</a:t>
+              <a:t>micro-</a:t>
             </a:r>
             <a:endParaRPr lang="en-US" sz="1300" dirty="0"/>
           </a:p>
@@ -35510,7 +36815,7 @@
                 <a:ea typeface="Trebuchet MS" pitchFamily="34" charset="-122"/>
                 <a:cs typeface="Trebuchet MS" pitchFamily="34" charset="-120"/>
               </a:rPr>
-              <a:t>-etic</a:t>
+              <a:t>-ic</a:t>
             </a:r>
             <a:endParaRPr lang="en-US" sz="1300" dirty="0"/>
           </a:p>
@@ -35574,7 +36879,7 @@
                 <a:ea typeface="Trebuchet MS" pitchFamily="34" charset="-122"/>
                 <a:cs typeface="Trebuchet MS" pitchFamily="34" charset="-120"/>
               </a:rPr>
-              <a:t>mega-</a:t>
+              <a:t>mono-</a:t>
             </a:r>
             <a:endParaRPr lang="en-US" sz="1300" dirty="0"/>
           </a:p>
@@ -35727,7 +37032,7 @@
                 <a:ea typeface="Trebuchet MS" pitchFamily="34" charset="-122"/>
                 <a:cs typeface="Trebuchet MS" pitchFamily="34" charset="-120"/>
               </a:rPr>
-              <a:t>saxo-</a:t>
+              <a:t>poly-</a:t>
             </a:r>
             <a:endParaRPr lang="en-US" sz="1300" dirty="0"/>
           </a:p>
@@ -35816,7 +37121,7 @@
                 <a:ea typeface="Trebuchet MS" pitchFamily="34" charset="-122"/>
                 <a:cs typeface="Trebuchet MS" pitchFamily="34" charset="-120"/>
               </a:rPr>
-              <a:t>-eme</a:t>
+              <a:t>-ed</a:t>
             </a:r>
             <a:endParaRPr lang="en-US" sz="1300" dirty="0"/>
           </a:p>
@@ -35880,7 +37185,7 @@
                 <a:ea typeface="Trebuchet MS" pitchFamily="34" charset="-122"/>
                 <a:cs typeface="Trebuchet MS" pitchFamily="34" charset="-120"/>
               </a:rPr>
-              <a:t>xylo-</a:t>
+              <a:t>tele-</a:t>
             </a:r>
             <a:endParaRPr lang="en-US" sz="1300" dirty="0"/>
           </a:p>
@@ -35969,7 +37274,7 @@
                 <a:ea typeface="Trebuchet MS" pitchFamily="34" charset="-122"/>
                 <a:cs typeface="Trebuchet MS" pitchFamily="34" charset="-120"/>
               </a:rPr>
-              <a:t>-ic</a:t>
+              <a:t>-ing</a:t>
             </a:r>
             <a:endParaRPr lang="en-US" sz="1300" dirty="0"/>
           </a:p>
@@ -36074,7 +37379,7 @@
                 <a:ea typeface="Trebuchet MS" pitchFamily="34" charset="-122"/>
                 <a:cs typeface="Trebuchet MS" pitchFamily="34" charset="-120"/>
               </a:rPr>
-              <a:t>telephone</a:t>
+              <a:t>phone</a:t>
             </a:r>
             <a:endParaRPr lang="en-US" sz="1200" dirty="0"/>
           </a:p>
@@ -36140,7 +37445,7 @@
                 <a:ea typeface="Trebuchet MS" pitchFamily="34" charset="-122"/>
                 <a:cs typeface="Trebuchet MS" pitchFamily="34" charset="-120"/>
               </a:rPr>
-              <a:t>microphone</a:t>
+              <a:t>phones</a:t>
             </a:r>
             <a:endParaRPr lang="en-US" sz="1200" dirty="0"/>
           </a:p>
@@ -36206,7 +37511,7 @@
                 <a:ea typeface="Trebuchet MS" pitchFamily="34" charset="-122"/>
                 <a:cs typeface="Trebuchet MS" pitchFamily="34" charset="-120"/>
               </a:rPr>
-              <a:t>headphones</a:t>
+              <a:t>phonics</a:t>
             </a:r>
             <a:endParaRPr lang="en-US" sz="1200" dirty="0"/>
           </a:p>
@@ -36272,7 +37577,7 @@
                 <a:ea typeface="Trebuchet MS" pitchFamily="34" charset="-122"/>
                 <a:cs typeface="Trebuchet MS" pitchFamily="34" charset="-120"/>
               </a:rPr>
-              <a:t>saxophone</a:t>
+              <a:t>telephone</a:t>
             </a:r>
             <a:endParaRPr lang="en-US" sz="1200" dirty="0"/>
           </a:p>
@@ -36338,7 +37643,7 @@
                 <a:ea typeface="Trebuchet MS" pitchFamily="34" charset="-122"/>
                 <a:cs typeface="Trebuchet MS" pitchFamily="34" charset="-120"/>
               </a:rPr>
-              <a:t>xylophone</a:t>
+              <a:t>telephoned</a:t>
             </a:r>
             <a:endParaRPr lang="en-US" sz="1200" dirty="0"/>
           </a:p>
@@ -36404,7 +37709,7 @@
                 <a:ea typeface="Trebuchet MS" pitchFamily="34" charset="-122"/>
                 <a:cs typeface="Trebuchet MS" pitchFamily="34" charset="-120"/>
               </a:rPr>
-              <a:t>phonics</a:t>
+              <a:t>telephones</a:t>
             </a:r>
             <a:endParaRPr lang="en-US" sz="1200" dirty="0"/>
           </a:p>
@@ -36470,73 +37775,7 @@
                 <a:ea typeface="Trebuchet MS" pitchFamily="34" charset="-122"/>
                 <a:cs typeface="Trebuchet MS" pitchFamily="34" charset="-120"/>
               </a:rPr>
-              <a:t>megaphone</a:t>
-            </a:r>
-            <a:endParaRPr lang="en-US" sz="1200" dirty="0"/>
-          </a:p>
-        </p:txBody>
-      </p:sp>
-      <p:sp>
-        <p:nvSpPr>
-          <p:cNvPr id="58" name="Shape 56"/>
-          <p:cNvSpPr/>
-          <p:nvPr/>
-        </p:nvSpPr>
-        <p:spPr>
-          <a:xfrm>
-            <a:off x="6894576" y="4498848"/>
-            <a:ext cx="2011680" cy="402336"/>
-          </a:xfrm>
-          <a:prstGeom prst="rect">
-            <a:avLst>
-              <a:gd name="adj" fmla="val 13636"/>
-            </a:avLst>
-          </a:prstGeom>
-          <a:solidFill>
-            <a:srgbClr val="EEF2FF"/>
-          </a:solidFill>
-          <a:ln w="12700">
-            <a:solidFill>
-              <a:srgbClr val="6366F1"/>
-            </a:solidFill>
-            <a:prstDash val="solid"/>
-          </a:ln>
-        </p:spPr>
-      </p:sp>
-      <p:sp>
-        <p:nvSpPr>
-          <p:cNvPr id="59" name="Text 57"/>
-          <p:cNvSpPr/>
-          <p:nvPr/>
-        </p:nvSpPr>
-        <p:spPr>
-          <a:xfrm>
-            <a:off x="6894576" y="4498848"/>
-            <a:ext cx="2011680" cy="402336"/>
-          </a:xfrm>
-          <a:prstGeom prst="rect">
-            <a:avLst/>
-          </a:prstGeom>
-          <a:noFill/>
-          <a:ln/>
-        </p:spPr>
-        <p:txBody>
-          <a:bodyPr wrap="square" lIns="0" tIns="0" rIns="0" bIns="0" rtlCol="0" anchor="ctr"/>
-          <a:lstStyle/>
-          <a:p>
-            <a:pPr algn="ctr" indent="0" marL="0">
-              <a:buNone/>
-            </a:pPr>
-            <a:r>
-              <a:rPr lang="en-US" sz="1200" b="1" dirty="0">
-                <a:solidFill>
-                  <a:srgbClr val="4338CA"/>
-                </a:solidFill>
-                <a:latin typeface="Trebuchet MS" pitchFamily="34" charset="0"/>
-                <a:ea typeface="Trebuchet MS" pitchFamily="34" charset="-122"/>
-                <a:cs typeface="Trebuchet MS" pitchFamily="34" charset="-120"/>
-              </a:rPr>
-              <a:t>phoneme</a:t>
+              <a:t>telephoning</a:t>
             </a:r>
             <a:endParaRPr lang="en-US" sz="1200" dirty="0"/>
           </a:p>
@@ -36828,7 +38067,7 @@
                 <a:ea typeface="Calibri" pitchFamily="34" charset="-122"/>
                 <a:cs typeface="Calibri" pitchFamily="34" charset="-120"/>
               </a:rPr>
-              <a:t>Word Labs  •  wordlabs.app  •  Root: 'phone' = sound, voice</a:t>
+              <a:t>Word Labs  •  wordlabs.app  •  Root: 'phone' = sound; a device for talking to someone</a:t>
             </a:r>
             <a:endParaRPr lang="en-US" sz="800" dirty="0"/>
           </a:p>
@@ -36992,7 +38231,7 @@
                 <a:ea typeface="Calibri" pitchFamily="34" charset="-122"/>
                 <a:cs typeface="Calibri" pitchFamily="34" charset="-120"/>
               </a:rPr>
-              <a:t>The core part of a word carrying its basic meaning. For example, 'phone' means 'sound, voice'.</a:t>
+              <a:t>The core part of a word carrying its basic meaning. For example, 'phone' means 'sound; a device for talking to someone'.</a:t>
             </a:r>
             <a:endParaRPr lang="en-US" sz="1350" dirty="0"/>
           </a:p>
@@ -37612,7 +38851,7 @@
                 <a:ea typeface="Calibri" pitchFamily="34" charset="-122"/>
                 <a:cs typeface="Calibri" pitchFamily="34" charset="-120"/>
               </a:rPr>
-              <a:t>Word Labs  •  wordlabs.app  •  Root: 'phone' = sound, voice</a:t>
+              <a:t>Word Labs  •  wordlabs.app  •  Root: 'phone' = sound; a device for talking to someone</a:t>
             </a:r>
             <a:endParaRPr lang="en-US" sz="800" dirty="0"/>
           </a:p>
@@ -37724,7 +38963,7 @@
                 <a:ea typeface="Calibri" pitchFamily="34" charset="-122"/>
                 <a:cs typeface="Calibri" pitchFamily="34" charset="-120"/>
               </a:rPr>
-              <a:t>1.  The root 'phone' comes from Greek and relates to sound or voice.</a:t>
+              <a:t>1.  'phones' means 'devices used to talk to people far away (plural of phone)'.</a:t>
             </a:r>
             <a:endParaRPr lang="en-US" sz="1300" dirty="0"/>
           </a:p>
@@ -37863,7 +39102,7 @@
                 <a:ea typeface="Calibri" pitchFamily="34" charset="-122"/>
                 <a:cs typeface="Calibri" pitchFamily="34" charset="-120"/>
               </a:rPr>
-              <a:t>2.  A xylophone is a musical instrument that produces sound.</a:t>
+              <a:t>2.  'phone' means 'a device used to talk to someone who is far away'.</a:t>
             </a:r>
             <a:endParaRPr lang="en-US" sz="1300" dirty="0"/>
           </a:p>
@@ -38002,7 +39241,7 @@
                 <a:ea typeface="Calibri" pitchFamily="34" charset="-122"/>
                 <a:cs typeface="Calibri" pitchFamily="34" charset="-120"/>
               </a:rPr>
-              <a:t>3.  The prefix 'tele' in telephone means far away.</a:t>
+              <a:t>3.  'phone' means 'a type of musical instrument played by blowing'.</a:t>
             </a:r>
             <a:endParaRPr lang="en-US" sz="1300" dirty="0"/>
           </a:p>
@@ -38025,11 +39264,11 @@
             </a:avLst>
           </a:prstGeom>
           <a:solidFill>
-            <a:srgbClr val="DCFCE7"/>
-          </a:solidFill>
-          <a:ln w="12700">
-            <a:solidFill>
-              <a:srgbClr val="16A34A"/>
+            <a:srgbClr val="FEE2E2"/>
+          </a:solidFill>
+          <a:ln w="12700">
+            <a:solidFill>
+              <a:srgbClr val="DC2626"/>
             </a:solidFill>
             <a:prstDash val="solid"/>
           </a:ln>
@@ -38062,13 +39301,13 @@
             <a:r>
               <a:rPr lang="en-US" sz="1100" b="1" dirty="0">
                 <a:solidFill>
-                  <a:srgbClr val="16A34A"/>
+                  <a:srgbClr val="DC2626"/>
                 </a:solidFill>
                 <a:latin typeface="Trebuchet MS" pitchFamily="34" charset="0"/>
                 <a:ea typeface="Trebuchet MS" pitchFamily="34" charset="-122"/>
                 <a:cs typeface="Trebuchet MS" pitchFamily="34" charset="-120"/>
               </a:rPr>
-              <a:t>TRUE</a:t>
+              <a:t>FALSE</a:t>
             </a:r>
             <a:endParaRPr lang="en-US" sz="1100" dirty="0"/>
           </a:p>
@@ -38141,7 +39380,7 @@
                 <a:ea typeface="Calibri" pitchFamily="34" charset="-122"/>
                 <a:cs typeface="Calibri" pitchFamily="34" charset="-120"/>
               </a:rPr>
-              <a:t>4.  Phonics has nothing to do with sounds or letters.</a:t>
+              <a:t>4.  'phones' means 'small boats used for fishing'.</a:t>
             </a:r>
             <a:endParaRPr lang="en-US" sz="1300" dirty="0"/>
           </a:p>
@@ -38280,7 +39519,7 @@
                 <a:ea typeface="Calibri" pitchFamily="34" charset="-122"/>
                 <a:cs typeface="Calibri" pitchFamily="34" charset="-120"/>
               </a:rPr>
-              <a:t>5.  A microphone is used to make sounds quieter.</a:t>
+              <a:t>5.  'phone' means 'sound; a device for talking to someone'.</a:t>
             </a:r>
             <a:endParaRPr lang="en-US" sz="1300" dirty="0"/>
           </a:p>
@@ -38303,11 +39542,11 @@
             </a:avLst>
           </a:prstGeom>
           <a:solidFill>
-            <a:srgbClr val="FEE2E2"/>
-          </a:solidFill>
-          <a:ln w="12700">
-            <a:solidFill>
-              <a:srgbClr val="DC2626"/>
+            <a:srgbClr val="DCFCE7"/>
+          </a:solidFill>
+          <a:ln w="12700">
+            <a:solidFill>
+              <a:srgbClr val="16A34A"/>
             </a:solidFill>
             <a:prstDash val="solid"/>
           </a:ln>
@@ -38340,13 +39579,13 @@
             <a:r>
               <a:rPr lang="en-US" sz="1100" b="1" dirty="0">
                 <a:solidFill>
-                  <a:srgbClr val="DC2626"/>
+                  <a:srgbClr val="16A34A"/>
                 </a:solidFill>
                 <a:latin typeface="Trebuchet MS" pitchFamily="34" charset="0"/>
                 <a:ea typeface="Trebuchet MS" pitchFamily="34" charset="-122"/>
                 <a:cs typeface="Trebuchet MS" pitchFamily="34" charset="-120"/>
               </a:rPr>
-              <a:t>FALSE</a:t>
+              <a:t>TRUE</a:t>
             </a:r>
             <a:endParaRPr lang="en-US" sz="1100" dirty="0"/>
           </a:p>
@@ -38638,7 +39877,7 @@
                 <a:ea typeface="Calibri" pitchFamily="34" charset="-122"/>
                 <a:cs typeface="Calibri" pitchFamily="34" charset="-120"/>
               </a:rPr>
-              <a:t>Word Labs  •  wordlabs.app  •  Root: 'phone' = sound, voice</a:t>
+              <a:t>Word Labs  •  wordlabs.app  •  Root: 'phone' = sound; a device for talking to someone</a:t>
             </a:r>
             <a:endParaRPr lang="en-US" sz="800" dirty="0"/>
           </a:p>
@@ -38775,7 +40014,7 @@
                 <a:ea typeface="Trebuchet MS" pitchFamily="34" charset="-122"/>
                 <a:cs typeface="Trebuchet MS" pitchFamily="34" charset="-120"/>
               </a:rPr>
-              <a:t>sound, voice</a:t>
+              <a:t>sound; a device for talking to someone</a:t>
             </a:r>
             <a:endParaRPr lang="en-US" sz="2000" dirty="0"/>
           </a:p>
@@ -38814,7 +40053,7 @@
                 <a:ea typeface="Calibri" pitchFamily="34" charset="-122"/>
                 <a:cs typeface="Calibri" pitchFamily="34" charset="-120"/>
               </a:rPr>
-              <a:t>Origin: Greek: phōnē</a:t>
+              <a:t>Origin: Core English root</a:t>
             </a:r>
             <a:endParaRPr lang="en-US" sz="1100" dirty="0"/>
           </a:p>
@@ -38919,7 +40158,7 @@
                 <a:ea typeface="Trebuchet MS" pitchFamily="34" charset="-122"/>
                 <a:cs typeface="Trebuchet MS" pitchFamily="34" charset="-120"/>
               </a:rPr>
-              <a:t>telephone</a:t>
+              <a:t>phone</a:t>
             </a:r>
             <a:endParaRPr lang="en-US" sz="1300" dirty="0"/>
           </a:p>
@@ -38985,7 +40224,7 @@
                 <a:ea typeface="Trebuchet MS" pitchFamily="34" charset="-122"/>
                 <a:cs typeface="Trebuchet MS" pitchFamily="34" charset="-120"/>
               </a:rPr>
-              <a:t>microphone</a:t>
+              <a:t>phones</a:t>
             </a:r>
             <a:endParaRPr lang="en-US" sz="1300" dirty="0"/>
           </a:p>
@@ -39051,7 +40290,7 @@
                 <a:ea typeface="Trebuchet MS" pitchFamily="34" charset="-122"/>
                 <a:cs typeface="Trebuchet MS" pitchFamily="34" charset="-120"/>
               </a:rPr>
-              <a:t>headphones</a:t>
+              <a:t>phonics</a:t>
             </a:r>
             <a:endParaRPr lang="en-US" sz="1300" dirty="0"/>
           </a:p>
@@ -39117,7 +40356,7 @@
                 <a:ea typeface="Trebuchet MS" pitchFamily="34" charset="-122"/>
                 <a:cs typeface="Trebuchet MS" pitchFamily="34" charset="-120"/>
               </a:rPr>
-              <a:t>saxophone</a:t>
+              <a:t>telephone</a:t>
             </a:r>
             <a:endParaRPr lang="en-US" sz="1300" dirty="0"/>
           </a:p>
@@ -39183,7 +40422,7 @@
                 <a:ea typeface="Trebuchet MS" pitchFamily="34" charset="-122"/>
                 <a:cs typeface="Trebuchet MS" pitchFamily="34" charset="-120"/>
               </a:rPr>
-              <a:t>xylophone</a:t>
+              <a:t>telephoned</a:t>
             </a:r>
             <a:endParaRPr lang="en-US" sz="1300" dirty="0"/>
           </a:p>
@@ -39249,7 +40488,7 @@
                 <a:ea typeface="Trebuchet MS" pitchFamily="34" charset="-122"/>
                 <a:cs typeface="Trebuchet MS" pitchFamily="34" charset="-120"/>
               </a:rPr>
-              <a:t>phonics</a:t>
+              <a:t>telephones</a:t>
             </a:r>
             <a:endParaRPr lang="en-US" sz="1300" dirty="0"/>
           </a:p>
@@ -39315,7 +40554,7 @@
                 <a:ea typeface="Trebuchet MS" pitchFamily="34" charset="-122"/>
                 <a:cs typeface="Trebuchet MS" pitchFamily="34" charset="-120"/>
               </a:rPr>
-              <a:t>megaphone</a:t>
+              <a:t>telephoning</a:t>
             </a:r>
             <a:endParaRPr lang="en-US" sz="1300" dirty="0"/>
           </a:p>
@@ -39607,7 +40846,7 @@
                 <a:ea typeface="Calibri" pitchFamily="34" charset="-122"/>
                 <a:cs typeface="Calibri" pitchFamily="34" charset="-120"/>
               </a:rPr>
-              <a:t>Word Labs  •  wordlabs.app  •  Root: 'phone' = sound, voice</a:t>
+              <a:t>Word Labs  •  wordlabs.app  •  Root: 'phone' = sound; a device for talking to someone</a:t>
             </a:r>
             <a:endParaRPr lang="en-US" sz="800" dirty="0"/>
           </a:p>
@@ -39908,7 +41147,7 @@
                 <a:ea typeface="Trebuchet MS" pitchFamily="34" charset="-122"/>
                 <a:cs typeface="Trebuchet MS" pitchFamily="34" charset="-120"/>
               </a:rPr>
-              <a:t>micro-</a:t>
+              <a:t>mega-</a:t>
             </a:r>
             <a:endParaRPr lang="en-US" sz="1300" dirty="0"/>
           </a:p>
@@ -40036,7 +41275,7 @@
                 <a:ea typeface="Trebuchet MS" pitchFamily="34" charset="-122"/>
                 <a:cs typeface="Trebuchet MS" pitchFamily="34" charset="-120"/>
               </a:rPr>
-              <a:t>-ics</a:t>
+              <a:t>-s</a:t>
             </a:r>
             <a:endParaRPr lang="en-US" sz="1300" dirty="0"/>
           </a:p>
@@ -40100,7 +41339,7 @@
                 <a:ea typeface="Trebuchet MS" pitchFamily="34" charset="-122"/>
                 <a:cs typeface="Trebuchet MS" pitchFamily="34" charset="-120"/>
               </a:rPr>
-              <a:t>tele-</a:t>
+              <a:t>micro-</a:t>
             </a:r>
             <a:endParaRPr lang="en-US" sz="1300" dirty="0"/>
           </a:p>
@@ -40189,7 +41428,7 @@
                 <a:ea typeface="Trebuchet MS" pitchFamily="34" charset="-122"/>
                 <a:cs typeface="Trebuchet MS" pitchFamily="34" charset="-120"/>
               </a:rPr>
-              <a:t>-etic</a:t>
+              <a:t>-ic</a:t>
             </a:r>
             <a:endParaRPr lang="en-US" sz="1300" dirty="0"/>
           </a:p>
@@ -40253,7 +41492,7 @@
                 <a:ea typeface="Trebuchet MS" pitchFamily="34" charset="-122"/>
                 <a:cs typeface="Trebuchet MS" pitchFamily="34" charset="-120"/>
               </a:rPr>
-              <a:t>mega-</a:t>
+              <a:t>mono-</a:t>
             </a:r>
             <a:endParaRPr lang="en-US" sz="1300" dirty="0"/>
           </a:p>
@@ -40406,7 +41645,7 @@
                 <a:ea typeface="Trebuchet MS" pitchFamily="34" charset="-122"/>
                 <a:cs typeface="Trebuchet MS" pitchFamily="34" charset="-120"/>
               </a:rPr>
-              <a:t>saxo-</a:t>
+              <a:t>poly-</a:t>
             </a:r>
             <a:endParaRPr lang="en-US" sz="1300" dirty="0"/>
           </a:p>
@@ -40495,7 +41734,7 @@
                 <a:ea typeface="Trebuchet MS" pitchFamily="34" charset="-122"/>
                 <a:cs typeface="Trebuchet MS" pitchFamily="34" charset="-120"/>
               </a:rPr>
-              <a:t>-eme</a:t>
+              <a:t>-ed</a:t>
             </a:r>
             <a:endParaRPr lang="en-US" sz="1300" dirty="0"/>
           </a:p>
@@ -40559,7 +41798,7 @@
                 <a:ea typeface="Trebuchet MS" pitchFamily="34" charset="-122"/>
                 <a:cs typeface="Trebuchet MS" pitchFamily="34" charset="-120"/>
               </a:rPr>
-              <a:t>xylo-</a:t>
+              <a:t>tele-</a:t>
             </a:r>
             <a:endParaRPr lang="en-US" sz="1300" dirty="0"/>
           </a:p>
@@ -40648,7 +41887,7 @@
                 <a:ea typeface="Trebuchet MS" pitchFamily="34" charset="-122"/>
                 <a:cs typeface="Trebuchet MS" pitchFamily="34" charset="-120"/>
               </a:rPr>
-              <a:t>-ic</a:t>
+              <a:t>-ing</a:t>
             </a:r>
             <a:endParaRPr lang="en-US" sz="1300" dirty="0"/>
           </a:p>
@@ -40702,7 +41941,7 @@
         <p:spPr>
           <a:xfrm>
             <a:off x="1508760" y="4178808"/>
-            <a:ext cx="1243584" cy="420624"/>
+            <a:ext cx="1097280" cy="420624"/>
           </a:xfrm>
           <a:prstGeom prst="rect">
             <a:avLst>
@@ -40736,7 +41975,7 @@
         <p:spPr>
           <a:xfrm>
             <a:off x="1508760" y="4178808"/>
-            <a:ext cx="1243584" cy="420624"/>
+            <a:ext cx="1097280" cy="420624"/>
           </a:xfrm>
           <a:prstGeom prst="rect">
             <a:avLst/>
@@ -40760,7 +41999,7 @@
                 <a:ea typeface="Trebuchet MS" pitchFamily="34" charset="-122"/>
                 <a:cs typeface="Trebuchet MS" pitchFamily="34" charset="-120"/>
               </a:rPr>
-              <a:t>micro-</a:t>
+              <a:t>mega-</a:t>
             </a:r>
             <a:endParaRPr lang="en-US" sz="1300" dirty="0"/>
           </a:p>
@@ -40774,7 +42013,7 @@
         </p:nvSpPr>
         <p:spPr>
           <a:xfrm>
-            <a:off x="2779776" y="4178808"/>
+            <a:off x="2633472" y="4178808"/>
             <a:ext cx="320040" cy="420624"/>
           </a:xfrm>
           <a:prstGeom prst="rect">
@@ -40813,7 +42052,7 @@
         </p:nvSpPr>
         <p:spPr>
           <a:xfrm>
-            <a:off x="3127248" y="4178808"/>
+            <a:off x="2980944" y="4178808"/>
             <a:ext cx="1389888" cy="420624"/>
           </a:xfrm>
           <a:prstGeom prst="rect">
@@ -40847,7 +42086,7 @@
         </p:nvSpPr>
         <p:spPr>
           <a:xfrm>
-            <a:off x="3127248" y="4178808"/>
+            <a:off x="2980944" y="4178808"/>
             <a:ext cx="1389888" cy="420624"/>
           </a:xfrm>
           <a:prstGeom prst="rect">
@@ -40886,7 +42125,7 @@
         </p:nvSpPr>
         <p:spPr>
           <a:xfrm>
-            <a:off x="4544568" y="4178808"/>
+            <a:off x="4398264" y="4178808"/>
             <a:ext cx="320040" cy="420624"/>
           </a:xfrm>
           <a:prstGeom prst="rect">
@@ -40925,8 +42164,8 @@
         </p:nvSpPr>
         <p:spPr>
           <a:xfrm>
-            <a:off x="4892040" y="4178808"/>
-            <a:ext cx="950976" cy="420624"/>
+            <a:off x="4745736" y="4178808"/>
+            <a:ext cx="822960" cy="420624"/>
           </a:xfrm>
           <a:prstGeom prst="rect">
             <a:avLst>
@@ -40959,8 +42198,8 @@
         </p:nvSpPr>
         <p:spPr>
           <a:xfrm>
-            <a:off x="4892040" y="4178808"/>
-            <a:ext cx="950976" cy="420624"/>
+            <a:off x="4745736" y="4178808"/>
+            <a:ext cx="822960" cy="420624"/>
           </a:xfrm>
           <a:prstGeom prst="rect">
             <a:avLst/>
@@ -40984,7 +42223,7 @@
                 <a:ea typeface="Trebuchet MS" pitchFamily="34" charset="-122"/>
                 <a:cs typeface="Trebuchet MS" pitchFamily="34" charset="-120"/>
               </a:rPr>
-              <a:t>-ics</a:t>
+              <a:t>-s</a:t>
             </a:r>
             <a:endParaRPr lang="en-US" sz="1300" dirty="0"/>
           </a:p>
@@ -40998,7 +42237,7 @@
         </p:nvSpPr>
         <p:spPr>
           <a:xfrm>
-            <a:off x="5916168" y="4178808"/>
+            <a:off x="5641848" y="4178808"/>
             <a:ext cx="365760" cy="420624"/>
           </a:xfrm>
           <a:prstGeom prst="rect">
@@ -41037,7 +42276,7 @@
         </p:nvSpPr>
         <p:spPr>
           <a:xfrm>
-            <a:off x="6327648" y="4178808"/>
+            <a:off x="6053328" y="4178808"/>
             <a:ext cx="2194560" cy="420624"/>
           </a:xfrm>
           <a:prstGeom prst="rect">
@@ -41064,7 +42303,7 @@
         </p:nvSpPr>
         <p:spPr>
           <a:xfrm>
-            <a:off x="6327648" y="4178808"/>
+            <a:off x="6053328" y="4178808"/>
             <a:ext cx="2194560" cy="420624"/>
           </a:xfrm>
           <a:prstGeom prst="rect">
@@ -41089,7 +42328,7 @@
                 <a:ea typeface="Trebuchet MS" pitchFamily="34" charset="-122"/>
                 <a:cs typeface="Trebuchet MS" pitchFamily="34" charset="-120"/>
               </a:rPr>
-              <a:t>telephone</a:t>
+              <a:t>phone</a:t>
             </a:r>
             <a:endParaRPr lang="en-US" sz="1400" dirty="0"/>
           </a:p>
@@ -41381,7 +42620,7 @@
                 <a:ea typeface="Calibri" pitchFamily="34" charset="-122"/>
                 <a:cs typeface="Calibri" pitchFamily="34" charset="-120"/>
               </a:rPr>
-              <a:t>Word Labs  •  wordlabs.app  •  Root: 'phone' = sound, voice</a:t>
+              <a:t>Word Labs  •  wordlabs.app  •  Root: 'phone' = sound; a device for talking to someone</a:t>
             </a:r>
             <a:endParaRPr lang="en-US" sz="800" dirty="0"/>
           </a:p>
@@ -41493,7 +42732,7 @@
                 <a:ea typeface="Trebuchet MS" pitchFamily="34" charset="-122"/>
                 <a:cs typeface="Trebuchet MS" pitchFamily="34" charset="-120"/>
               </a:rPr>
-              <a:t>telephone</a:t>
+              <a:t>phone</a:t>
             </a:r>
             <a:endParaRPr lang="en-US" sz="1200" dirty="0"/>
           </a:p>
@@ -41559,7 +42798,7 @@
                 <a:ea typeface="Calibri" pitchFamily="34" charset="-122"/>
                 <a:cs typeface="Calibri" pitchFamily="34" charset="-120"/>
               </a:rPr>
-              <a:t>A pair of small speakers you wear over your ears to listen to music or audio privately.</a:t>
+              <a:t>a method of teaching reading by linking sounds to letters</a:t>
             </a:r>
             <a:endParaRPr lang="en-US" sz="1200" dirty="0"/>
           </a:p>
@@ -41632,7 +42871,7 @@
                 <a:ea typeface="Trebuchet MS" pitchFamily="34" charset="-122"/>
                 <a:cs typeface="Trebuchet MS" pitchFamily="34" charset="-120"/>
               </a:rPr>
-              <a:t>microphone</a:t>
+              <a:t>phones</a:t>
             </a:r>
             <a:endParaRPr lang="en-US" sz="1200" dirty="0"/>
           </a:p>
@@ -41698,7 +42937,7 @@
                 <a:ea typeface="Calibri" pitchFamily="34" charset="-122"/>
                 <a:cs typeface="Calibri" pitchFamily="34" charset="-120"/>
               </a:rPr>
-              <a:t>A musical instrument made of wooden bars that you hit with small mallets to make musical notes.</a:t>
+              <a:t>contacted someone by telephone</a:t>
             </a:r>
             <a:endParaRPr lang="en-US" sz="1200" dirty="0"/>
           </a:p>
@@ -41771,7 +43010,7 @@
                 <a:ea typeface="Trebuchet MS" pitchFamily="34" charset="-122"/>
                 <a:cs typeface="Trebuchet MS" pitchFamily="34" charset="-120"/>
               </a:rPr>
-              <a:t>headphones</a:t>
+              <a:t>phonics</a:t>
             </a:r>
             <a:endParaRPr lang="en-US" sz="1200" dirty="0"/>
           </a:p>
@@ -41837,7 +43076,7 @@
                 <a:ea typeface="Calibri" pitchFamily="34" charset="-122"/>
                 <a:cs typeface="Calibri" pitchFamily="34" charset="-120"/>
               </a:rPr>
-              <a:t>A device that lets you talk to someone far away by sending your voice through wires or signals.</a:t>
+              <a:t>a device used to talk to someone who is far away</a:t>
             </a:r>
             <a:endParaRPr lang="en-US" sz="1200" dirty="0"/>
           </a:p>
@@ -41910,7 +43149,7 @@
                 <a:ea typeface="Trebuchet MS" pitchFamily="34" charset="-122"/>
                 <a:cs typeface="Trebuchet MS" pitchFamily="34" charset="-120"/>
               </a:rPr>
-              <a:t>saxophone</a:t>
+              <a:t>telephone</a:t>
             </a:r>
             <a:endParaRPr lang="en-US" sz="1200" dirty="0"/>
           </a:p>
@@ -41976,7 +43215,7 @@
                 <a:ea typeface="Calibri" pitchFamily="34" charset="-122"/>
                 <a:cs typeface="Calibri" pitchFamily="34" charset="-120"/>
               </a:rPr>
-              <a:t>A way of learning to read by matching letters to the sounds they make.</a:t>
+              <a:t>devices used to talk with people who are far away, or contacts someone this way</a:t>
             </a:r>
             <a:endParaRPr lang="en-US" sz="1200" dirty="0"/>
           </a:p>
@@ -42049,7 +43288,7 @@
                 <a:ea typeface="Trebuchet MS" pitchFamily="34" charset="-122"/>
                 <a:cs typeface="Trebuchet MS" pitchFamily="34" charset="-120"/>
               </a:rPr>
-              <a:t>xylophone</a:t>
+              <a:t>telephoned</a:t>
             </a:r>
             <a:endParaRPr lang="en-US" sz="1200" dirty="0"/>
           </a:p>
@@ -42115,7 +43354,7 @@
                 <a:ea typeface="Calibri" pitchFamily="34" charset="-122"/>
                 <a:cs typeface="Calibri" pitchFamily="34" charset="-120"/>
               </a:rPr>
-              <a:t>A cone-shaped device you speak into to make your voice much louder outdoors.</a:t>
+              <a:t>contacting someone using a telephone</a:t>
             </a:r>
             <a:endParaRPr lang="en-US" sz="1200" dirty="0"/>
           </a:p>
@@ -42188,7 +43427,7 @@
                 <a:ea typeface="Trebuchet MS" pitchFamily="34" charset="-122"/>
                 <a:cs typeface="Trebuchet MS" pitchFamily="34" charset="-120"/>
               </a:rPr>
-              <a:t>phonics</a:t>
+              <a:t>telephones</a:t>
             </a:r>
             <a:endParaRPr lang="en-US" sz="1200" dirty="0"/>
           </a:p>
@@ -42254,7 +43493,7 @@
                 <a:ea typeface="Calibri" pitchFamily="34" charset="-122"/>
                 <a:cs typeface="Calibri" pitchFamily="34" charset="-120"/>
               </a:rPr>
-              <a:t>A musical instrument you blow into that makes a rich, jazzy sound.</a:t>
+              <a:t>a device used to talk to someone else who is far away, by sending sound through wires or signals</a:t>
             </a:r>
             <a:endParaRPr lang="en-US" sz="1200" dirty="0"/>
           </a:p>
@@ -42327,7 +43566,7 @@
                 <a:ea typeface="Trebuchet MS" pitchFamily="34" charset="-122"/>
                 <a:cs typeface="Trebuchet MS" pitchFamily="34" charset="-120"/>
               </a:rPr>
-              <a:t>megaphone</a:t>
+              <a:t>telephoning</a:t>
             </a:r>
             <a:endParaRPr lang="en-US" sz="1200" dirty="0"/>
           </a:p>
@@ -42393,7 +43632,7 @@
                 <a:ea typeface="Calibri" pitchFamily="34" charset="-122"/>
                 <a:cs typeface="Calibri" pitchFamily="34" charset="-120"/>
               </a:rPr>
-              <a:t>A tool that picks up sounds and makes them louder so more people can hear.</a:t>
+              <a:t>devices used to talk to people far away (plural of phone)</a:t>
             </a:r>
             <a:endParaRPr lang="en-US" sz="1200" dirty="0"/>
           </a:p>
@@ -42685,7 +43924,7 @@
                 <a:ea typeface="Calibri" pitchFamily="34" charset="-122"/>
                 <a:cs typeface="Calibri" pitchFamily="34" charset="-120"/>
               </a:rPr>
-              <a:t>Word Labs  •  wordlabs.app  •  Root: 'phone' = sound, voice</a:t>
+              <a:t>Word Labs  •  wordlabs.app  •  Root: 'phone' = sound; a device for talking to someone</a:t>
             </a:r>
             <a:endParaRPr lang="en-US" sz="800" dirty="0"/>
           </a:p>
@@ -42888,7 +44127,7 @@
                 <a:ea typeface="Calibri" pitchFamily="34" charset="-122"/>
                 <a:cs typeface="Calibri" pitchFamily="34" charset="-120"/>
               </a:rPr>
-              <a:t>The scientist spoke into the microphone so the whole audience could hear her clearly.</a:t>
+              <a:t>I called my mum on the phone to say I'd be late.</a:t>
             </a:r>
             <a:endParaRPr lang="en-US" sz="1500" dirty="0"/>
           </a:p>
@@ -43052,7 +44291,7 @@
                 <a:ea typeface="Calibri" pitchFamily="34" charset="-122"/>
                 <a:cs typeface="Calibri" pitchFamily="34" charset="-120"/>
               </a:rPr>
-              <a:t>We learned about phonics in class today, matching letters to the sounds they make.</a:t>
+              <a:t>All the students put their phones away before the test started.</a:t>
             </a:r>
             <a:endParaRPr lang="en-US" sz="1500" dirty="0"/>
           </a:p>
@@ -43216,7 +44455,7 @@
                 <a:ea typeface="Calibri" pitchFamily="34" charset="-122"/>
                 <a:cs typeface="Calibri" pitchFamily="34" charset="-120"/>
               </a:rPr>
-              <a:t>The teacher used a megaphone to call the students in from the oval.</a:t>
+              <a:t>In phonics lessons, we learn how letters make different sounds.</a:t>
             </a:r>
             <a:endParaRPr lang="en-US" sz="1500" dirty="0"/>
           </a:p>
